--- a/PPT/Viscoplastic Squeeze pptGE 2.pptx
+++ b/PPT/Viscoplastic Squeeze pptGE 2.pptx
@@ -19698,7 +19698,14 @@
                         <a:latin typeface="Cambria Math" panose="02040503050406030204" pitchFamily="18" charset="0"/>
                         <a:ea typeface="Cambria Math" panose="02040503050406030204" pitchFamily="18" charset="0"/>
                       </a:rPr>
-                      <m:t>𝑔h</m:t>
+                      <m:t>𝑔</m:t>
+                    </m:r>
+                    <m:r>
+                      <a:rPr lang="fr-FR" sz="2200" b="0" i="1" smtClean="0">
+                        <a:latin typeface="Cambria Math" panose="02040503050406030204" pitchFamily="18" charset="0"/>
+                        <a:ea typeface="Cambria Math" panose="02040503050406030204" pitchFamily="18" charset="0"/>
+                      </a:rPr>
+                      <m:t>h</m:t>
                     </m:r>
                     <m:r>
                       <a:rPr lang="fr-FR" sz="2200" b="0" i="1" smtClean="0">
@@ -19827,7 +19834,14 @@
                             <a:latin typeface="Cambria Math" panose="02040503050406030204" pitchFamily="18" charset="0"/>
                             <a:ea typeface="Cambria Math" panose="02040503050406030204" pitchFamily="18" charset="0"/>
                           </a:rPr>
-                          <m:t>−1</m:t>
+                          <m:t>−</m:t>
+                        </m:r>
+                        <m:r>
+                          <a:rPr lang="fr-FR" sz="2200" b="0" i="1" smtClean="0">
+                            <a:latin typeface="Cambria Math" panose="02040503050406030204" pitchFamily="18" charset="0"/>
+                            <a:ea typeface="Cambria Math" panose="02040503050406030204" pitchFamily="18" charset="0"/>
+                          </a:rPr>
+                          <m:t>1</m:t>
                         </m:r>
                       </m:e>
                     </m:d>
@@ -23632,8 +23646,8 @@
         </p:blipFill>
         <p:spPr>
           <a:xfrm rot="16200000">
-            <a:off x="8839288" y="1829182"/>
-            <a:ext cx="1333554" cy="3691497"/>
+            <a:off x="5478716" y="1573889"/>
+            <a:ext cx="1220017" cy="3377209"/>
           </a:xfrm>
           <a:prstGeom prst="rect">
             <a:avLst/>
@@ -23662,8 +23676,8 @@
         </p:blipFill>
         <p:spPr>
           <a:xfrm rot="16200000">
-            <a:off x="8827753" y="3527713"/>
-            <a:ext cx="1356625" cy="3691497"/>
+            <a:off x="5456117" y="3914715"/>
+            <a:ext cx="1237654" cy="3367766"/>
           </a:xfrm>
           <a:prstGeom prst="rect">
             <a:avLst/>
@@ -23686,15 +23700,15 @@
         </p:nvPicPr>
         <p:blipFill>
           <a:blip r:embed="rId4"/>
-          <a:srcRect b="26704"/>
+          <a:srcRect l="18943" r="17548" b="26704"/>
           <a:stretch>
             <a:fillRect/>
           </a:stretch>
         </p:blipFill>
         <p:spPr>
           <a:xfrm>
-            <a:off x="616256" y="1514856"/>
-            <a:ext cx="4673241" cy="2568948"/>
+            <a:off x="844527" y="2429758"/>
+            <a:ext cx="3235098" cy="2800163"/>
           </a:xfrm>
           <a:prstGeom prst="rect">
             <a:avLst/>
@@ -23717,474 +23731,1127 @@
         </p:nvPicPr>
         <p:blipFill>
           <a:blip r:embed="rId5"/>
-          <a:srcRect t="15341" b="36324"/>
+          <a:srcRect l="13994" t="30105" r="9790" b="41735"/>
           <a:stretch>
             <a:fillRect/>
           </a:stretch>
         </p:blipFill>
         <p:spPr>
           <a:xfrm>
-            <a:off x="596727" y="4262711"/>
-            <a:ext cx="4692770" cy="1715784"/>
+            <a:off x="840187" y="5334075"/>
+            <a:ext cx="3235098" cy="904127"/>
           </a:xfrm>
           <a:prstGeom prst="rect">
             <a:avLst/>
           </a:prstGeom>
         </p:spPr>
       </p:pic>
-      <p:graphicFrame>
-        <p:nvGraphicFramePr>
-          <p:cNvPr id="20" name="Tableau 19">
+      <p:pic>
+        <p:nvPicPr>
+          <p:cNvPr id="5" name="Image 4">
             <a:extLst>
               <a:ext uri="{FF2B5EF4-FFF2-40B4-BE49-F238E27FC236}">
-                <a16:creationId xmlns:a16="http://schemas.microsoft.com/office/drawing/2014/main" id="{DD56A8C7-4F6E-43DD-5563-C5470E89CD91}"/>
+                <a16:creationId xmlns:a16="http://schemas.microsoft.com/office/drawing/2014/main" id="{9086D48F-C74F-68A0-64C4-E00C259248D1}"/>
               </a:ext>
             </a:extLst>
           </p:cNvPr>
-          <p:cNvGraphicFramePr>
-            <a:graphicFrameLocks noGrp="1"/>
-          </p:cNvGraphicFramePr>
+          <p:cNvPicPr>
+            <a:picLocks noChangeAspect="1"/>
+          </p:cNvPicPr>
           <p:nvPr/>
-        </p:nvGraphicFramePr>
-        <p:xfrm>
-          <a:off x="5854700" y="2232025"/>
-          <a:ext cx="482600" cy="2393950"/>
-        </p:xfrm>
-        <a:graphic>
-          <a:graphicData uri="http://schemas.openxmlformats.org/drawingml/2006/table">
-            <a:tbl>
-              <a:tblPr>
-                <a:tableStyleId>{3B4B98B0-60AC-42C2-AFA5-B58CD77FA1E5}</a:tableStyleId>
-              </a:tblPr>
-              <a:tblGrid>
-                <a:gridCol w="482600">
-                  <a:extLst>
-                    <a:ext uri="{9D8B030D-6E8A-4147-A177-3AD203B41FA5}">
-                      <a16:colId xmlns:a16="http://schemas.microsoft.com/office/drawing/2014/main" val="2102062938"/>
-                    </a:ext>
-                  </a:extLst>
-                </a:gridCol>
-              </a:tblGrid>
-              <a:tr h="184150">
-                <a:tc>
-                  <a:txBody>
-                    <a:bodyPr/>
-                    <a:lstStyle/>
-                    <a:p>
-                      <a:pPr algn="r" fontAlgn="b">
-                        <a:buNone/>
-                      </a:pPr>
-                      <a:r>
-                        <a:rPr lang="fr-FR" sz="1100" u="none" strike="noStrike">
-                          <a:effectLst/>
-                        </a:rPr>
-                        <a:t>20237</a:t>
-                      </a:r>
-                      <a:endParaRPr lang="fr-FR" sz="1100" b="0" i="0" u="none" strike="noStrike">
-                        <a:solidFill>
-                          <a:srgbClr val="000000"/>
-                        </a:solidFill>
-                        <a:effectLst/>
-                        <a:latin typeface="Calibri" panose="020F0502020204030204" pitchFamily="34" charset="0"/>
-                      </a:endParaRPr>
-                    </a:p>
-                  </a:txBody>
-                  <a:tcPr marL="6350" marR="6350" marT="6350" marB="0" anchor="b"/>
-                </a:tc>
-                <a:extLst>
-                  <a:ext uri="{0D108BD9-81ED-4DB2-BD59-A6C34878D82A}">
-                    <a16:rowId xmlns:a16="http://schemas.microsoft.com/office/drawing/2014/main" val="3165312532"/>
-                  </a:ext>
-                </a:extLst>
-              </a:tr>
-              <a:tr h="184150">
-                <a:tc>
-                  <a:txBody>
-                    <a:bodyPr/>
-                    <a:lstStyle/>
-                    <a:p>
-                      <a:pPr algn="r" fontAlgn="b">
-                        <a:buNone/>
-                      </a:pPr>
-                      <a:r>
-                        <a:rPr lang="fr-FR" sz="1100" u="none" strike="noStrike">
-                          <a:effectLst/>
-                        </a:rPr>
-                        <a:t>20237</a:t>
-                      </a:r>
-                      <a:endParaRPr lang="fr-FR" sz="1100" b="0" i="0" u="none" strike="noStrike">
-                        <a:solidFill>
-                          <a:srgbClr val="000000"/>
-                        </a:solidFill>
-                        <a:effectLst/>
-                        <a:latin typeface="Calibri" panose="020F0502020204030204" pitchFamily="34" charset="0"/>
-                      </a:endParaRPr>
-                    </a:p>
-                  </a:txBody>
-                  <a:tcPr marL="6350" marR="6350" marT="6350" marB="0" anchor="b"/>
-                </a:tc>
-                <a:extLst>
-                  <a:ext uri="{0D108BD9-81ED-4DB2-BD59-A6C34878D82A}">
-                    <a16:rowId xmlns:a16="http://schemas.microsoft.com/office/drawing/2014/main" val="1222329519"/>
-                  </a:ext>
-                </a:extLst>
-              </a:tr>
-              <a:tr h="184150">
-                <a:tc>
-                  <a:txBody>
-                    <a:bodyPr/>
-                    <a:lstStyle/>
-                    <a:p>
-                      <a:pPr algn="r" fontAlgn="b">
-                        <a:buNone/>
-                      </a:pPr>
-                      <a:r>
-                        <a:rPr lang="fr-FR" sz="1100" u="none" strike="noStrike">
-                          <a:effectLst/>
-                        </a:rPr>
-                        <a:t>20237</a:t>
-                      </a:r>
-                      <a:endParaRPr lang="fr-FR" sz="1100" b="0" i="0" u="none" strike="noStrike">
-                        <a:solidFill>
-                          <a:srgbClr val="000000"/>
-                        </a:solidFill>
-                        <a:effectLst/>
-                        <a:latin typeface="Calibri" panose="020F0502020204030204" pitchFamily="34" charset="0"/>
-                      </a:endParaRPr>
-                    </a:p>
-                  </a:txBody>
-                  <a:tcPr marL="6350" marR="6350" marT="6350" marB="0" anchor="b"/>
-                </a:tc>
-                <a:extLst>
-                  <a:ext uri="{0D108BD9-81ED-4DB2-BD59-A6C34878D82A}">
-                    <a16:rowId xmlns:a16="http://schemas.microsoft.com/office/drawing/2014/main" val="401926866"/>
-                  </a:ext>
-                </a:extLst>
-              </a:tr>
-              <a:tr h="184150">
-                <a:tc>
-                  <a:txBody>
-                    <a:bodyPr/>
-                    <a:lstStyle/>
-                    <a:p>
-                      <a:pPr algn="r" fontAlgn="b">
-                        <a:buNone/>
-                      </a:pPr>
-                      <a:r>
-                        <a:rPr lang="fr-FR" sz="1100" u="none" strike="noStrike">
-                          <a:effectLst/>
-                        </a:rPr>
-                        <a:t>20237</a:t>
-                      </a:r>
-                      <a:endParaRPr lang="fr-FR" sz="1100" b="0" i="0" u="none" strike="noStrike">
-                        <a:solidFill>
-                          <a:srgbClr val="000000"/>
-                        </a:solidFill>
-                        <a:effectLst/>
-                        <a:latin typeface="Calibri" panose="020F0502020204030204" pitchFamily="34" charset="0"/>
-                      </a:endParaRPr>
-                    </a:p>
-                  </a:txBody>
-                  <a:tcPr marL="6350" marR="6350" marT="6350" marB="0" anchor="b"/>
-                </a:tc>
-                <a:extLst>
-                  <a:ext uri="{0D108BD9-81ED-4DB2-BD59-A6C34878D82A}">
-                    <a16:rowId xmlns:a16="http://schemas.microsoft.com/office/drawing/2014/main" val="2955897145"/>
-                  </a:ext>
-                </a:extLst>
-              </a:tr>
-              <a:tr h="184150">
-                <a:tc>
-                  <a:txBody>
-                    <a:bodyPr/>
-                    <a:lstStyle/>
-                    <a:p>
-                      <a:pPr algn="r" fontAlgn="b">
-                        <a:buNone/>
-                      </a:pPr>
-                      <a:r>
-                        <a:rPr lang="fr-FR" sz="1100" u="none" strike="noStrike">
-                          <a:effectLst/>
-                        </a:rPr>
-                        <a:t>20237</a:t>
-                      </a:r>
-                      <a:endParaRPr lang="fr-FR" sz="1100" b="0" i="0" u="none" strike="noStrike">
-                        <a:solidFill>
-                          <a:srgbClr val="000000"/>
-                        </a:solidFill>
-                        <a:effectLst/>
-                        <a:latin typeface="Calibri" panose="020F0502020204030204" pitchFamily="34" charset="0"/>
-                      </a:endParaRPr>
-                    </a:p>
-                  </a:txBody>
-                  <a:tcPr marL="6350" marR="6350" marT="6350" marB="0" anchor="b"/>
-                </a:tc>
-                <a:extLst>
-                  <a:ext uri="{0D108BD9-81ED-4DB2-BD59-A6C34878D82A}">
-                    <a16:rowId xmlns:a16="http://schemas.microsoft.com/office/drawing/2014/main" val="3134451234"/>
-                  </a:ext>
-                </a:extLst>
-              </a:tr>
-              <a:tr h="184150">
-                <a:tc>
-                  <a:txBody>
-                    <a:bodyPr/>
-                    <a:lstStyle/>
-                    <a:p>
-                      <a:pPr algn="r" fontAlgn="b">
-                        <a:buNone/>
-                      </a:pPr>
-                      <a:r>
-                        <a:rPr lang="fr-FR" sz="1100" u="none" strike="noStrike">
-                          <a:effectLst/>
-                        </a:rPr>
-                        <a:t>20237</a:t>
-                      </a:r>
-                      <a:endParaRPr lang="fr-FR" sz="1100" b="0" i="0" u="none" strike="noStrike">
-                        <a:solidFill>
-                          <a:srgbClr val="000000"/>
-                        </a:solidFill>
-                        <a:effectLst/>
-                        <a:latin typeface="Calibri" panose="020F0502020204030204" pitchFamily="34" charset="0"/>
-                      </a:endParaRPr>
-                    </a:p>
-                  </a:txBody>
-                  <a:tcPr marL="6350" marR="6350" marT="6350" marB="0" anchor="b"/>
-                </a:tc>
-                <a:extLst>
-                  <a:ext uri="{0D108BD9-81ED-4DB2-BD59-A6C34878D82A}">
-                    <a16:rowId xmlns:a16="http://schemas.microsoft.com/office/drawing/2014/main" val="2405994100"/>
-                  </a:ext>
-                </a:extLst>
-              </a:tr>
-              <a:tr h="184150">
-                <a:tc>
-                  <a:txBody>
-                    <a:bodyPr/>
-                    <a:lstStyle/>
-                    <a:p>
-                      <a:pPr algn="r" fontAlgn="b">
-                        <a:buNone/>
-                      </a:pPr>
-                      <a:r>
-                        <a:rPr lang="fr-FR" sz="1100" u="none" strike="noStrike">
-                          <a:effectLst/>
-                        </a:rPr>
-                        <a:t>20237</a:t>
-                      </a:r>
-                      <a:endParaRPr lang="fr-FR" sz="1100" b="0" i="0" u="none" strike="noStrike">
-                        <a:solidFill>
-                          <a:srgbClr val="000000"/>
-                        </a:solidFill>
-                        <a:effectLst/>
-                        <a:latin typeface="Calibri" panose="020F0502020204030204" pitchFamily="34" charset="0"/>
-                      </a:endParaRPr>
-                    </a:p>
-                  </a:txBody>
-                  <a:tcPr marL="6350" marR="6350" marT="6350" marB="0" anchor="b"/>
-                </a:tc>
-                <a:extLst>
-                  <a:ext uri="{0D108BD9-81ED-4DB2-BD59-A6C34878D82A}">
-                    <a16:rowId xmlns:a16="http://schemas.microsoft.com/office/drawing/2014/main" val="1325872843"/>
-                  </a:ext>
-                </a:extLst>
-              </a:tr>
-              <a:tr h="184150">
-                <a:tc>
-                  <a:txBody>
-                    <a:bodyPr/>
-                    <a:lstStyle/>
-                    <a:p>
-                      <a:pPr algn="r" fontAlgn="b">
-                        <a:buNone/>
-                      </a:pPr>
-                      <a:r>
-                        <a:rPr lang="fr-FR" sz="1100" u="none" strike="noStrike">
-                          <a:effectLst/>
-                        </a:rPr>
-                        <a:t>20237</a:t>
-                      </a:r>
-                      <a:endParaRPr lang="fr-FR" sz="1100" b="0" i="0" u="none" strike="noStrike">
-                        <a:solidFill>
-                          <a:srgbClr val="000000"/>
-                        </a:solidFill>
-                        <a:effectLst/>
-                        <a:latin typeface="Calibri" panose="020F0502020204030204" pitchFamily="34" charset="0"/>
-                      </a:endParaRPr>
-                    </a:p>
-                  </a:txBody>
-                  <a:tcPr marL="6350" marR="6350" marT="6350" marB="0" anchor="b"/>
-                </a:tc>
-                <a:extLst>
-                  <a:ext uri="{0D108BD9-81ED-4DB2-BD59-A6C34878D82A}">
-                    <a16:rowId xmlns:a16="http://schemas.microsoft.com/office/drawing/2014/main" val="1825915395"/>
-                  </a:ext>
-                </a:extLst>
-              </a:tr>
-              <a:tr h="184150">
-                <a:tc>
-                  <a:txBody>
-                    <a:bodyPr/>
-                    <a:lstStyle/>
-                    <a:p>
-                      <a:pPr algn="r" fontAlgn="b">
-                        <a:buNone/>
-                      </a:pPr>
-                      <a:r>
-                        <a:rPr lang="fr-FR" sz="1100" u="none" strike="noStrike">
-                          <a:effectLst/>
-                        </a:rPr>
-                        <a:t>168120</a:t>
-                      </a:r>
-                      <a:endParaRPr lang="fr-FR" sz="1100" b="0" i="0" u="none" strike="noStrike">
-                        <a:solidFill>
-                          <a:srgbClr val="000000"/>
-                        </a:solidFill>
-                        <a:effectLst/>
-                        <a:latin typeface="Calibri" panose="020F0502020204030204" pitchFamily="34" charset="0"/>
-                      </a:endParaRPr>
-                    </a:p>
-                  </a:txBody>
-                  <a:tcPr marL="6350" marR="6350" marT="6350" marB="0" anchor="b"/>
-                </a:tc>
-                <a:extLst>
-                  <a:ext uri="{0D108BD9-81ED-4DB2-BD59-A6C34878D82A}">
-                    <a16:rowId xmlns:a16="http://schemas.microsoft.com/office/drawing/2014/main" val="2973683591"/>
-                  </a:ext>
-                </a:extLst>
-              </a:tr>
-              <a:tr h="184150">
-                <a:tc>
-                  <a:txBody>
-                    <a:bodyPr/>
-                    <a:lstStyle/>
-                    <a:p>
-                      <a:pPr algn="r" fontAlgn="b">
-                        <a:buNone/>
-                      </a:pPr>
-                      <a:r>
-                        <a:rPr lang="fr-FR" sz="1100" u="none" strike="noStrike">
-                          <a:effectLst/>
-                        </a:rPr>
-                        <a:t>168120</a:t>
-                      </a:r>
-                      <a:endParaRPr lang="fr-FR" sz="1100" b="0" i="0" u="none" strike="noStrike">
-                        <a:solidFill>
-                          <a:srgbClr val="000000"/>
-                        </a:solidFill>
-                        <a:effectLst/>
-                        <a:latin typeface="Calibri" panose="020F0502020204030204" pitchFamily="34" charset="0"/>
-                      </a:endParaRPr>
-                    </a:p>
-                  </a:txBody>
-                  <a:tcPr marL="6350" marR="6350" marT="6350" marB="0" anchor="b"/>
-                </a:tc>
-                <a:extLst>
-                  <a:ext uri="{0D108BD9-81ED-4DB2-BD59-A6C34878D82A}">
-                    <a16:rowId xmlns:a16="http://schemas.microsoft.com/office/drawing/2014/main" val="348222818"/>
-                  </a:ext>
-                </a:extLst>
-              </a:tr>
-              <a:tr h="184150">
-                <a:tc>
-                  <a:txBody>
-                    <a:bodyPr/>
-                    <a:lstStyle/>
-                    <a:p>
-                      <a:pPr algn="r" fontAlgn="b">
-                        <a:buNone/>
-                      </a:pPr>
-                      <a:r>
-                        <a:rPr lang="fr-FR" sz="1100" u="none" strike="noStrike">
-                          <a:effectLst/>
-                        </a:rPr>
-                        <a:t>168120</a:t>
-                      </a:r>
-                      <a:endParaRPr lang="fr-FR" sz="1100" b="0" i="0" u="none" strike="noStrike">
-                        <a:solidFill>
-                          <a:srgbClr val="000000"/>
-                        </a:solidFill>
-                        <a:effectLst/>
-                        <a:latin typeface="Calibri" panose="020F0502020204030204" pitchFamily="34" charset="0"/>
-                      </a:endParaRPr>
-                    </a:p>
-                  </a:txBody>
-                  <a:tcPr marL="6350" marR="6350" marT="6350" marB="0" anchor="b"/>
-                </a:tc>
-                <a:extLst>
-                  <a:ext uri="{0D108BD9-81ED-4DB2-BD59-A6C34878D82A}">
-                    <a16:rowId xmlns:a16="http://schemas.microsoft.com/office/drawing/2014/main" val="3071970259"/>
-                  </a:ext>
-                </a:extLst>
-              </a:tr>
-              <a:tr h="184150">
-                <a:tc>
-                  <a:txBody>
-                    <a:bodyPr/>
-                    <a:lstStyle/>
-                    <a:p>
-                      <a:pPr algn="r" fontAlgn="b">
-                        <a:buNone/>
-                      </a:pPr>
-                      <a:r>
-                        <a:rPr lang="fr-FR" sz="1100" u="none" strike="noStrike">
-                          <a:effectLst/>
-                        </a:rPr>
-                        <a:t>168120</a:t>
-                      </a:r>
-                      <a:endParaRPr lang="fr-FR" sz="1100" b="0" i="0" u="none" strike="noStrike">
-                        <a:solidFill>
-                          <a:srgbClr val="000000"/>
-                        </a:solidFill>
-                        <a:effectLst/>
-                        <a:latin typeface="Calibri" panose="020F0502020204030204" pitchFamily="34" charset="0"/>
-                      </a:endParaRPr>
-                    </a:p>
-                  </a:txBody>
-                  <a:tcPr marL="6350" marR="6350" marT="6350" marB="0" anchor="b"/>
-                </a:tc>
-                <a:extLst>
-                  <a:ext uri="{0D108BD9-81ED-4DB2-BD59-A6C34878D82A}">
-                    <a16:rowId xmlns:a16="http://schemas.microsoft.com/office/drawing/2014/main" val="1811235388"/>
-                  </a:ext>
-                </a:extLst>
-              </a:tr>
-              <a:tr h="184150">
-                <a:tc>
-                  <a:txBody>
-                    <a:bodyPr/>
-                    <a:lstStyle/>
-                    <a:p>
-                      <a:pPr algn="r" fontAlgn="b">
-                        <a:buNone/>
-                      </a:pPr>
-                      <a:r>
-                        <a:rPr lang="fr-FR" sz="1100" u="none" strike="noStrike" dirty="0">
-                          <a:effectLst/>
-                        </a:rPr>
-                        <a:t>168120</a:t>
-                      </a:r>
-                      <a:endParaRPr lang="fr-FR" sz="1100" b="0" i="0" u="none" strike="noStrike" dirty="0">
-                        <a:solidFill>
-                          <a:srgbClr val="000000"/>
-                        </a:solidFill>
-                        <a:effectLst/>
-                        <a:latin typeface="Calibri" panose="020F0502020204030204" pitchFamily="34" charset="0"/>
-                      </a:endParaRPr>
-                    </a:p>
-                  </a:txBody>
-                  <a:tcPr marL="6350" marR="6350" marT="6350" marB="0" anchor="b"/>
-                </a:tc>
-                <a:extLst>
-                  <a:ext uri="{0D108BD9-81ED-4DB2-BD59-A6C34878D82A}">
-                    <a16:rowId xmlns:a16="http://schemas.microsoft.com/office/drawing/2014/main" val="1861402916"/>
-                  </a:ext>
-                </a:extLst>
-              </a:tr>
-            </a:tbl>
-          </a:graphicData>
-        </a:graphic>
-      </p:graphicFrame>
+        </p:nvPicPr>
+        <p:blipFill>
+          <a:blip r:embed="rId6"/>
+          <a:srcRect t="18139" r="3939" b="18212"/>
+          <a:stretch>
+            <a:fillRect/>
+          </a:stretch>
+        </p:blipFill>
+        <p:spPr>
+          <a:xfrm>
+            <a:off x="8061142" y="2136519"/>
+            <a:ext cx="3365214" cy="1672328"/>
+          </a:xfrm>
+          <a:prstGeom prst="rect">
+            <a:avLst/>
+          </a:prstGeom>
+        </p:spPr>
+      </p:pic>
+      <p:sp>
+        <p:nvSpPr>
+          <p:cNvPr id="14" name="Espace réservé du texte 2">
+            <a:extLst>
+              <a:ext uri="{FF2B5EF4-FFF2-40B4-BE49-F238E27FC236}">
+                <a16:creationId xmlns:a16="http://schemas.microsoft.com/office/drawing/2014/main" id="{B299F1E4-EE5F-D959-4941-9DD84ACF3F97}"/>
+              </a:ext>
+            </a:extLst>
+          </p:cNvPr>
+          <p:cNvSpPr txBox="1">
+            <a:spLocks/>
+          </p:cNvSpPr>
+          <p:nvPr/>
+        </p:nvSpPr>
+        <p:spPr>
+          <a:xfrm>
+            <a:off x="819842" y="1701311"/>
+            <a:ext cx="3235098" cy="816551"/>
+          </a:xfrm>
+          <a:prstGeom prst="rect">
+            <a:avLst/>
+          </a:prstGeom>
+        </p:spPr>
+        <p:txBody>
+          <a:bodyPr vert="horz" lIns="91440" tIns="0" rIns="91440" bIns="0" rtlCol="0">
+            <a:normAutofit/>
+          </a:bodyPr>
+          <a:lstStyle>
+            <a:defPPr>
+              <a:defRPr lang="fr-FR"/>
+            </a:defPPr>
+            <a:lvl1pPr marL="0" indent="0" algn="l" defTabSz="914400" rtl="0" eaLnBrk="1" latinLnBrk="0" hangingPunct="1">
+              <a:lnSpc>
+                <a:spcPct val="100000"/>
+              </a:lnSpc>
+              <a:spcBef>
+                <a:spcPts val="0"/>
+              </a:spcBef>
+              <a:buFont typeface="Arial" panose="020B0604020202020204" pitchFamily="34" charset="0"/>
+              <a:buNone/>
+              <a:defRPr lang="fr-FR" sz="2400" kern="1200">
+                <a:solidFill>
+                  <a:schemeClr val="accent6"/>
+                </a:solidFill>
+                <a:latin typeface="+mn-lt"/>
+                <a:ea typeface="+mn-ea"/>
+                <a:cs typeface="+mn-cs"/>
+              </a:defRPr>
+            </a:lvl1pPr>
+            <a:lvl2pPr marL="347472" indent="-347472" algn="l" defTabSz="914400" rtl="0" eaLnBrk="1" latinLnBrk="0" hangingPunct="1">
+              <a:lnSpc>
+                <a:spcPct val="100000"/>
+              </a:lnSpc>
+              <a:spcBef>
+                <a:spcPts val="0"/>
+              </a:spcBef>
+              <a:buFont typeface="Arial" panose="020B0604020202020204" pitchFamily="34" charset="0"/>
+              <a:buChar char="•"/>
+              <a:defRPr lang="fr-FR" sz="2400" kern="1200">
+                <a:solidFill>
+                  <a:schemeClr val="accent6"/>
+                </a:solidFill>
+                <a:latin typeface="+mn-lt"/>
+                <a:ea typeface="+mn-ea"/>
+                <a:cs typeface="+mn-cs"/>
+              </a:defRPr>
+            </a:lvl2pPr>
+            <a:lvl3pPr marL="685800" indent="-347472" algn="l" defTabSz="914400" rtl="0" eaLnBrk="1" latinLnBrk="0" hangingPunct="1">
+              <a:lnSpc>
+                <a:spcPct val="100000"/>
+              </a:lnSpc>
+              <a:spcBef>
+                <a:spcPts val="0"/>
+              </a:spcBef>
+              <a:buFont typeface="Arial" panose="020B0604020202020204" pitchFamily="34" charset="0"/>
+              <a:buChar char="•"/>
+              <a:defRPr lang="fr-FR" sz="2400" kern="1200">
+                <a:solidFill>
+                  <a:schemeClr val="accent6"/>
+                </a:solidFill>
+                <a:latin typeface="+mn-lt"/>
+                <a:ea typeface="+mn-ea"/>
+                <a:cs typeface="+mn-cs"/>
+              </a:defRPr>
+            </a:lvl3pPr>
+            <a:lvl4pPr marL="1600200" indent="-347472" algn="l" defTabSz="914400" rtl="0" eaLnBrk="1" latinLnBrk="0" hangingPunct="1">
+              <a:lnSpc>
+                <a:spcPct val="100000"/>
+              </a:lnSpc>
+              <a:spcBef>
+                <a:spcPts val="360"/>
+              </a:spcBef>
+              <a:buFont typeface="Arial" panose="020B0604020202020204" pitchFamily="34" charset="0"/>
+              <a:buChar char="•"/>
+              <a:defRPr lang="fr-FR" sz="1800" kern="1200">
+                <a:solidFill>
+                  <a:schemeClr val="accent6"/>
+                </a:solidFill>
+                <a:latin typeface="+mn-lt"/>
+                <a:ea typeface="+mn-ea"/>
+                <a:cs typeface="+mn-cs"/>
+              </a:defRPr>
+            </a:lvl4pPr>
+            <a:lvl5pPr marL="2057400" indent="-347472" algn="l" defTabSz="914400" rtl="0" eaLnBrk="1" latinLnBrk="0" hangingPunct="1">
+              <a:lnSpc>
+                <a:spcPct val="100000"/>
+              </a:lnSpc>
+              <a:spcBef>
+                <a:spcPts val="360"/>
+              </a:spcBef>
+              <a:buFont typeface="Arial" panose="020B0604020202020204" pitchFamily="34" charset="0"/>
+              <a:buChar char="•"/>
+              <a:defRPr lang="fr-FR" sz="1800" kern="1200">
+                <a:solidFill>
+                  <a:schemeClr val="accent6"/>
+                </a:solidFill>
+                <a:latin typeface="+mn-lt"/>
+                <a:ea typeface="+mn-ea"/>
+                <a:cs typeface="+mn-cs"/>
+              </a:defRPr>
+            </a:lvl5pPr>
+            <a:lvl6pPr marL="2514600" indent="-228600" algn="l" defTabSz="914400" rtl="0" eaLnBrk="1" latinLnBrk="0" hangingPunct="1">
+              <a:lnSpc>
+                <a:spcPct val="90000"/>
+              </a:lnSpc>
+              <a:spcBef>
+                <a:spcPts val="500"/>
+              </a:spcBef>
+              <a:buFont typeface="Arial" panose="020B0604020202020204" pitchFamily="34" charset="0"/>
+              <a:buChar char="•"/>
+              <a:defRPr lang="fr-FR" sz="1800" kern="1200">
+                <a:solidFill>
+                  <a:schemeClr val="tx1"/>
+                </a:solidFill>
+                <a:latin typeface="+mn-lt"/>
+                <a:ea typeface="+mn-ea"/>
+                <a:cs typeface="+mn-cs"/>
+              </a:defRPr>
+            </a:lvl6pPr>
+            <a:lvl7pPr marL="2971800" indent="-228600" algn="l" defTabSz="914400" rtl="0" eaLnBrk="1" latinLnBrk="0" hangingPunct="1">
+              <a:lnSpc>
+                <a:spcPct val="90000"/>
+              </a:lnSpc>
+              <a:spcBef>
+                <a:spcPts val="500"/>
+              </a:spcBef>
+              <a:buFont typeface="Arial" panose="020B0604020202020204" pitchFamily="34" charset="0"/>
+              <a:buChar char="•"/>
+              <a:defRPr lang="fr-FR" sz="1800" kern="1200">
+                <a:solidFill>
+                  <a:schemeClr val="tx1"/>
+                </a:solidFill>
+                <a:latin typeface="+mn-lt"/>
+                <a:ea typeface="+mn-ea"/>
+                <a:cs typeface="+mn-cs"/>
+              </a:defRPr>
+            </a:lvl7pPr>
+            <a:lvl8pPr marL="3429000" indent="-228600" algn="l" defTabSz="914400" rtl="0" eaLnBrk="1" latinLnBrk="0" hangingPunct="1">
+              <a:lnSpc>
+                <a:spcPct val="90000"/>
+              </a:lnSpc>
+              <a:spcBef>
+                <a:spcPts val="500"/>
+              </a:spcBef>
+              <a:buFont typeface="Arial" panose="020B0604020202020204" pitchFamily="34" charset="0"/>
+              <a:buChar char="•"/>
+              <a:defRPr lang="fr-FR" sz="1800" kern="1200">
+                <a:solidFill>
+                  <a:schemeClr val="tx1"/>
+                </a:solidFill>
+                <a:latin typeface="+mn-lt"/>
+                <a:ea typeface="+mn-ea"/>
+                <a:cs typeface="+mn-cs"/>
+              </a:defRPr>
+            </a:lvl8pPr>
+            <a:lvl9pPr marL="3886200" indent="-228600" algn="l" defTabSz="914400" rtl="0" eaLnBrk="1" latinLnBrk="0" hangingPunct="1">
+              <a:lnSpc>
+                <a:spcPct val="90000"/>
+              </a:lnSpc>
+              <a:spcBef>
+                <a:spcPts val="500"/>
+              </a:spcBef>
+              <a:buFont typeface="Arial" panose="020B0604020202020204" pitchFamily="34" charset="0"/>
+              <a:buChar char="•"/>
+              <a:defRPr lang="fr-FR" sz="1800" kern="1200">
+                <a:solidFill>
+                  <a:schemeClr val="tx1"/>
+                </a:solidFill>
+                <a:latin typeface="+mn-lt"/>
+                <a:ea typeface="+mn-ea"/>
+                <a:cs typeface="+mn-cs"/>
+              </a:defRPr>
+            </a:lvl9pPr>
+          </a:lstStyle>
+          <a:p>
+            <a:pPr algn="ctr"/>
+            <a:r>
+              <a:rPr lang="fr-FR" sz="2000" dirty="0"/>
+              <a:t>1.   Dépôt d’une goutte sur une lame de verre</a:t>
+            </a:r>
+          </a:p>
+          <a:p>
+            <a:endParaRPr lang="fr-FR" sz="2000" dirty="0"/>
+          </a:p>
+          <a:p>
+            <a:endParaRPr lang="fr-FR" sz="2000" dirty="0"/>
+          </a:p>
+        </p:txBody>
+      </p:sp>
+      <p:sp>
+        <p:nvSpPr>
+          <p:cNvPr id="16" name="Espace réservé du texte 2">
+            <a:extLst>
+              <a:ext uri="{FF2B5EF4-FFF2-40B4-BE49-F238E27FC236}">
+                <a16:creationId xmlns:a16="http://schemas.microsoft.com/office/drawing/2014/main" id="{B533FDA5-161F-5845-E88B-34EEFA195498}"/>
+              </a:ext>
+            </a:extLst>
+          </p:cNvPr>
+          <p:cNvSpPr txBox="1">
+            <a:spLocks/>
+          </p:cNvSpPr>
+          <p:nvPr/>
+        </p:nvSpPr>
+        <p:spPr>
+          <a:xfrm>
+            <a:off x="4215188" y="1867820"/>
+            <a:ext cx="3562141" cy="816551"/>
+          </a:xfrm>
+          <a:prstGeom prst="rect">
+            <a:avLst/>
+          </a:prstGeom>
+        </p:spPr>
+        <p:txBody>
+          <a:bodyPr vert="horz" lIns="91440" tIns="0" rIns="91440" bIns="0" rtlCol="0">
+            <a:normAutofit/>
+          </a:bodyPr>
+          <a:lstStyle>
+            <a:defPPr>
+              <a:defRPr lang="fr-FR"/>
+            </a:defPPr>
+            <a:lvl1pPr marL="0" indent="0" algn="l" defTabSz="914400" rtl="0" eaLnBrk="1" latinLnBrk="0" hangingPunct="1">
+              <a:lnSpc>
+                <a:spcPct val="100000"/>
+              </a:lnSpc>
+              <a:spcBef>
+                <a:spcPts val="0"/>
+              </a:spcBef>
+              <a:buFont typeface="Arial" panose="020B0604020202020204" pitchFamily="34" charset="0"/>
+              <a:buNone/>
+              <a:defRPr lang="fr-FR" sz="2400" kern="1200">
+                <a:solidFill>
+                  <a:schemeClr val="accent6"/>
+                </a:solidFill>
+                <a:latin typeface="+mn-lt"/>
+                <a:ea typeface="+mn-ea"/>
+                <a:cs typeface="+mn-cs"/>
+              </a:defRPr>
+            </a:lvl1pPr>
+            <a:lvl2pPr marL="347472" indent="-347472" algn="l" defTabSz="914400" rtl="0" eaLnBrk="1" latinLnBrk="0" hangingPunct="1">
+              <a:lnSpc>
+                <a:spcPct val="100000"/>
+              </a:lnSpc>
+              <a:spcBef>
+                <a:spcPts val="0"/>
+              </a:spcBef>
+              <a:buFont typeface="Arial" panose="020B0604020202020204" pitchFamily="34" charset="0"/>
+              <a:buChar char="•"/>
+              <a:defRPr lang="fr-FR" sz="2400" kern="1200">
+                <a:solidFill>
+                  <a:schemeClr val="accent6"/>
+                </a:solidFill>
+                <a:latin typeface="+mn-lt"/>
+                <a:ea typeface="+mn-ea"/>
+                <a:cs typeface="+mn-cs"/>
+              </a:defRPr>
+            </a:lvl2pPr>
+            <a:lvl3pPr marL="685800" indent="-347472" algn="l" defTabSz="914400" rtl="0" eaLnBrk="1" latinLnBrk="0" hangingPunct="1">
+              <a:lnSpc>
+                <a:spcPct val="100000"/>
+              </a:lnSpc>
+              <a:spcBef>
+                <a:spcPts val="0"/>
+              </a:spcBef>
+              <a:buFont typeface="Arial" panose="020B0604020202020204" pitchFamily="34" charset="0"/>
+              <a:buChar char="•"/>
+              <a:defRPr lang="fr-FR" sz="2400" kern="1200">
+                <a:solidFill>
+                  <a:schemeClr val="accent6"/>
+                </a:solidFill>
+                <a:latin typeface="+mn-lt"/>
+                <a:ea typeface="+mn-ea"/>
+                <a:cs typeface="+mn-cs"/>
+              </a:defRPr>
+            </a:lvl3pPr>
+            <a:lvl4pPr marL="1600200" indent="-347472" algn="l" defTabSz="914400" rtl="0" eaLnBrk="1" latinLnBrk="0" hangingPunct="1">
+              <a:lnSpc>
+                <a:spcPct val="100000"/>
+              </a:lnSpc>
+              <a:spcBef>
+                <a:spcPts val="360"/>
+              </a:spcBef>
+              <a:buFont typeface="Arial" panose="020B0604020202020204" pitchFamily="34" charset="0"/>
+              <a:buChar char="•"/>
+              <a:defRPr lang="fr-FR" sz="1800" kern="1200">
+                <a:solidFill>
+                  <a:schemeClr val="accent6"/>
+                </a:solidFill>
+                <a:latin typeface="+mn-lt"/>
+                <a:ea typeface="+mn-ea"/>
+                <a:cs typeface="+mn-cs"/>
+              </a:defRPr>
+            </a:lvl4pPr>
+            <a:lvl5pPr marL="2057400" indent="-347472" algn="l" defTabSz="914400" rtl="0" eaLnBrk="1" latinLnBrk="0" hangingPunct="1">
+              <a:lnSpc>
+                <a:spcPct val="100000"/>
+              </a:lnSpc>
+              <a:spcBef>
+                <a:spcPts val="360"/>
+              </a:spcBef>
+              <a:buFont typeface="Arial" panose="020B0604020202020204" pitchFamily="34" charset="0"/>
+              <a:buChar char="•"/>
+              <a:defRPr lang="fr-FR" sz="1800" kern="1200">
+                <a:solidFill>
+                  <a:schemeClr val="accent6"/>
+                </a:solidFill>
+                <a:latin typeface="+mn-lt"/>
+                <a:ea typeface="+mn-ea"/>
+                <a:cs typeface="+mn-cs"/>
+              </a:defRPr>
+            </a:lvl5pPr>
+            <a:lvl6pPr marL="2514600" indent="-228600" algn="l" defTabSz="914400" rtl="0" eaLnBrk="1" latinLnBrk="0" hangingPunct="1">
+              <a:lnSpc>
+                <a:spcPct val="90000"/>
+              </a:lnSpc>
+              <a:spcBef>
+                <a:spcPts val="500"/>
+              </a:spcBef>
+              <a:buFont typeface="Arial" panose="020B0604020202020204" pitchFamily="34" charset="0"/>
+              <a:buChar char="•"/>
+              <a:defRPr lang="fr-FR" sz="1800" kern="1200">
+                <a:solidFill>
+                  <a:schemeClr val="tx1"/>
+                </a:solidFill>
+                <a:latin typeface="+mn-lt"/>
+                <a:ea typeface="+mn-ea"/>
+                <a:cs typeface="+mn-cs"/>
+              </a:defRPr>
+            </a:lvl6pPr>
+            <a:lvl7pPr marL="2971800" indent="-228600" algn="l" defTabSz="914400" rtl="0" eaLnBrk="1" latinLnBrk="0" hangingPunct="1">
+              <a:lnSpc>
+                <a:spcPct val="90000"/>
+              </a:lnSpc>
+              <a:spcBef>
+                <a:spcPts val="500"/>
+              </a:spcBef>
+              <a:buFont typeface="Arial" panose="020B0604020202020204" pitchFamily="34" charset="0"/>
+              <a:buChar char="•"/>
+              <a:defRPr lang="fr-FR" sz="1800" kern="1200">
+                <a:solidFill>
+                  <a:schemeClr val="tx1"/>
+                </a:solidFill>
+                <a:latin typeface="+mn-lt"/>
+                <a:ea typeface="+mn-ea"/>
+                <a:cs typeface="+mn-cs"/>
+              </a:defRPr>
+            </a:lvl7pPr>
+            <a:lvl8pPr marL="3429000" indent="-228600" algn="l" defTabSz="914400" rtl="0" eaLnBrk="1" latinLnBrk="0" hangingPunct="1">
+              <a:lnSpc>
+                <a:spcPct val="90000"/>
+              </a:lnSpc>
+              <a:spcBef>
+                <a:spcPts val="500"/>
+              </a:spcBef>
+              <a:buFont typeface="Arial" panose="020B0604020202020204" pitchFamily="34" charset="0"/>
+              <a:buChar char="•"/>
+              <a:defRPr lang="fr-FR" sz="1800" kern="1200">
+                <a:solidFill>
+                  <a:schemeClr val="tx1"/>
+                </a:solidFill>
+                <a:latin typeface="+mn-lt"/>
+                <a:ea typeface="+mn-ea"/>
+                <a:cs typeface="+mn-cs"/>
+              </a:defRPr>
+            </a:lvl8pPr>
+            <a:lvl9pPr marL="3886200" indent="-228600" algn="l" defTabSz="914400" rtl="0" eaLnBrk="1" latinLnBrk="0" hangingPunct="1">
+              <a:lnSpc>
+                <a:spcPct val="90000"/>
+              </a:lnSpc>
+              <a:spcBef>
+                <a:spcPts val="500"/>
+              </a:spcBef>
+              <a:buFont typeface="Arial" panose="020B0604020202020204" pitchFamily="34" charset="0"/>
+              <a:buChar char="•"/>
+              <a:defRPr lang="fr-FR" sz="1800" kern="1200">
+                <a:solidFill>
+                  <a:schemeClr val="tx1"/>
+                </a:solidFill>
+                <a:latin typeface="+mn-lt"/>
+                <a:ea typeface="+mn-ea"/>
+                <a:cs typeface="+mn-cs"/>
+              </a:defRPr>
+            </a:lvl9pPr>
+          </a:lstStyle>
+          <a:p>
+            <a:pPr algn="ctr"/>
+            <a:r>
+              <a:rPr lang="fr-FR" sz="2000" dirty="0"/>
+              <a:t>2.   Dépôt de la lame supérieure et photo sur panneau LED</a:t>
+            </a:r>
+          </a:p>
+          <a:p>
+            <a:endParaRPr lang="fr-FR" sz="2000" dirty="0"/>
+          </a:p>
+          <a:p>
+            <a:endParaRPr lang="fr-FR" sz="2000" dirty="0"/>
+          </a:p>
+        </p:txBody>
+      </p:sp>
+      <p:sp>
+        <p:nvSpPr>
+          <p:cNvPr id="17" name="Espace réservé du texte 2">
+            <a:extLst>
+              <a:ext uri="{FF2B5EF4-FFF2-40B4-BE49-F238E27FC236}">
+                <a16:creationId xmlns:a16="http://schemas.microsoft.com/office/drawing/2014/main" id="{ED0BE98A-FE39-14F2-CE34-DFF3DEA20172}"/>
+              </a:ext>
+            </a:extLst>
+          </p:cNvPr>
+          <p:cNvSpPr txBox="1">
+            <a:spLocks/>
+          </p:cNvSpPr>
+          <p:nvPr/>
+        </p:nvSpPr>
+        <p:spPr>
+          <a:xfrm>
+            <a:off x="7903451" y="4007992"/>
+            <a:ext cx="3562141" cy="816551"/>
+          </a:xfrm>
+          <a:prstGeom prst="rect">
+            <a:avLst/>
+          </a:prstGeom>
+        </p:spPr>
+        <p:txBody>
+          <a:bodyPr vert="horz" lIns="91440" tIns="0" rIns="91440" bIns="0" rtlCol="0">
+            <a:normAutofit/>
+          </a:bodyPr>
+          <a:lstStyle>
+            <a:defPPr>
+              <a:defRPr lang="fr-FR"/>
+            </a:defPPr>
+            <a:lvl1pPr marL="0" indent="0" algn="l" defTabSz="914400" rtl="0" eaLnBrk="1" latinLnBrk="0" hangingPunct="1">
+              <a:lnSpc>
+                <a:spcPct val="100000"/>
+              </a:lnSpc>
+              <a:spcBef>
+                <a:spcPts val="0"/>
+              </a:spcBef>
+              <a:buFont typeface="Arial" panose="020B0604020202020204" pitchFamily="34" charset="0"/>
+              <a:buNone/>
+              <a:defRPr lang="fr-FR" sz="2400" kern="1200">
+                <a:solidFill>
+                  <a:schemeClr val="accent6"/>
+                </a:solidFill>
+                <a:latin typeface="+mn-lt"/>
+                <a:ea typeface="+mn-ea"/>
+                <a:cs typeface="+mn-cs"/>
+              </a:defRPr>
+            </a:lvl1pPr>
+            <a:lvl2pPr marL="347472" indent="-347472" algn="l" defTabSz="914400" rtl="0" eaLnBrk="1" latinLnBrk="0" hangingPunct="1">
+              <a:lnSpc>
+                <a:spcPct val="100000"/>
+              </a:lnSpc>
+              <a:spcBef>
+                <a:spcPts val="0"/>
+              </a:spcBef>
+              <a:buFont typeface="Arial" panose="020B0604020202020204" pitchFamily="34" charset="0"/>
+              <a:buChar char="•"/>
+              <a:defRPr lang="fr-FR" sz="2400" kern="1200">
+                <a:solidFill>
+                  <a:schemeClr val="accent6"/>
+                </a:solidFill>
+                <a:latin typeface="+mn-lt"/>
+                <a:ea typeface="+mn-ea"/>
+                <a:cs typeface="+mn-cs"/>
+              </a:defRPr>
+            </a:lvl2pPr>
+            <a:lvl3pPr marL="685800" indent="-347472" algn="l" defTabSz="914400" rtl="0" eaLnBrk="1" latinLnBrk="0" hangingPunct="1">
+              <a:lnSpc>
+                <a:spcPct val="100000"/>
+              </a:lnSpc>
+              <a:spcBef>
+                <a:spcPts val="0"/>
+              </a:spcBef>
+              <a:buFont typeface="Arial" panose="020B0604020202020204" pitchFamily="34" charset="0"/>
+              <a:buChar char="•"/>
+              <a:defRPr lang="fr-FR" sz="2400" kern="1200">
+                <a:solidFill>
+                  <a:schemeClr val="accent6"/>
+                </a:solidFill>
+                <a:latin typeface="+mn-lt"/>
+                <a:ea typeface="+mn-ea"/>
+                <a:cs typeface="+mn-cs"/>
+              </a:defRPr>
+            </a:lvl3pPr>
+            <a:lvl4pPr marL="1600200" indent="-347472" algn="l" defTabSz="914400" rtl="0" eaLnBrk="1" latinLnBrk="0" hangingPunct="1">
+              <a:lnSpc>
+                <a:spcPct val="100000"/>
+              </a:lnSpc>
+              <a:spcBef>
+                <a:spcPts val="360"/>
+              </a:spcBef>
+              <a:buFont typeface="Arial" panose="020B0604020202020204" pitchFamily="34" charset="0"/>
+              <a:buChar char="•"/>
+              <a:defRPr lang="fr-FR" sz="1800" kern="1200">
+                <a:solidFill>
+                  <a:schemeClr val="accent6"/>
+                </a:solidFill>
+                <a:latin typeface="+mn-lt"/>
+                <a:ea typeface="+mn-ea"/>
+                <a:cs typeface="+mn-cs"/>
+              </a:defRPr>
+            </a:lvl4pPr>
+            <a:lvl5pPr marL="2057400" indent="-347472" algn="l" defTabSz="914400" rtl="0" eaLnBrk="1" latinLnBrk="0" hangingPunct="1">
+              <a:lnSpc>
+                <a:spcPct val="100000"/>
+              </a:lnSpc>
+              <a:spcBef>
+                <a:spcPts val="360"/>
+              </a:spcBef>
+              <a:buFont typeface="Arial" panose="020B0604020202020204" pitchFamily="34" charset="0"/>
+              <a:buChar char="•"/>
+              <a:defRPr lang="fr-FR" sz="1800" kern="1200">
+                <a:solidFill>
+                  <a:schemeClr val="accent6"/>
+                </a:solidFill>
+                <a:latin typeface="+mn-lt"/>
+                <a:ea typeface="+mn-ea"/>
+                <a:cs typeface="+mn-cs"/>
+              </a:defRPr>
+            </a:lvl5pPr>
+            <a:lvl6pPr marL="2514600" indent="-228600" algn="l" defTabSz="914400" rtl="0" eaLnBrk="1" latinLnBrk="0" hangingPunct="1">
+              <a:lnSpc>
+                <a:spcPct val="90000"/>
+              </a:lnSpc>
+              <a:spcBef>
+                <a:spcPts val="500"/>
+              </a:spcBef>
+              <a:buFont typeface="Arial" panose="020B0604020202020204" pitchFamily="34" charset="0"/>
+              <a:buChar char="•"/>
+              <a:defRPr lang="fr-FR" sz="1800" kern="1200">
+                <a:solidFill>
+                  <a:schemeClr val="tx1"/>
+                </a:solidFill>
+                <a:latin typeface="+mn-lt"/>
+                <a:ea typeface="+mn-ea"/>
+                <a:cs typeface="+mn-cs"/>
+              </a:defRPr>
+            </a:lvl6pPr>
+            <a:lvl7pPr marL="2971800" indent="-228600" algn="l" defTabSz="914400" rtl="0" eaLnBrk="1" latinLnBrk="0" hangingPunct="1">
+              <a:lnSpc>
+                <a:spcPct val="90000"/>
+              </a:lnSpc>
+              <a:spcBef>
+                <a:spcPts val="500"/>
+              </a:spcBef>
+              <a:buFont typeface="Arial" panose="020B0604020202020204" pitchFamily="34" charset="0"/>
+              <a:buChar char="•"/>
+              <a:defRPr lang="fr-FR" sz="1800" kern="1200">
+                <a:solidFill>
+                  <a:schemeClr val="tx1"/>
+                </a:solidFill>
+                <a:latin typeface="+mn-lt"/>
+                <a:ea typeface="+mn-ea"/>
+                <a:cs typeface="+mn-cs"/>
+              </a:defRPr>
+            </a:lvl7pPr>
+            <a:lvl8pPr marL="3429000" indent="-228600" algn="l" defTabSz="914400" rtl="0" eaLnBrk="1" latinLnBrk="0" hangingPunct="1">
+              <a:lnSpc>
+                <a:spcPct val="90000"/>
+              </a:lnSpc>
+              <a:spcBef>
+                <a:spcPts val="500"/>
+              </a:spcBef>
+              <a:buFont typeface="Arial" panose="020B0604020202020204" pitchFamily="34" charset="0"/>
+              <a:buChar char="•"/>
+              <a:defRPr lang="fr-FR" sz="1800" kern="1200">
+                <a:solidFill>
+                  <a:schemeClr val="tx1"/>
+                </a:solidFill>
+                <a:latin typeface="+mn-lt"/>
+                <a:ea typeface="+mn-ea"/>
+                <a:cs typeface="+mn-cs"/>
+              </a:defRPr>
+            </a:lvl8pPr>
+            <a:lvl9pPr marL="3886200" indent="-228600" algn="l" defTabSz="914400" rtl="0" eaLnBrk="1" latinLnBrk="0" hangingPunct="1">
+              <a:lnSpc>
+                <a:spcPct val="90000"/>
+              </a:lnSpc>
+              <a:spcBef>
+                <a:spcPts val="500"/>
+              </a:spcBef>
+              <a:buFont typeface="Arial" panose="020B0604020202020204" pitchFamily="34" charset="0"/>
+              <a:buChar char="•"/>
+              <a:defRPr lang="fr-FR" sz="1800" kern="1200">
+                <a:solidFill>
+                  <a:schemeClr val="tx1"/>
+                </a:solidFill>
+                <a:latin typeface="+mn-lt"/>
+                <a:ea typeface="+mn-ea"/>
+                <a:cs typeface="+mn-cs"/>
+              </a:defRPr>
+            </a:lvl9pPr>
+          </a:lstStyle>
+          <a:p>
+            <a:pPr algn="ctr"/>
+            <a:r>
+              <a:rPr lang="fr-FR" sz="2000" dirty="0"/>
+              <a:t>5.   Mesure des diamètres</a:t>
+            </a:r>
+          </a:p>
+          <a:p>
+            <a:endParaRPr lang="fr-FR" sz="2000" dirty="0"/>
+          </a:p>
+          <a:p>
+            <a:endParaRPr lang="fr-FR" sz="2000" dirty="0"/>
+          </a:p>
+        </p:txBody>
+      </p:sp>
+      <p:pic>
+        <p:nvPicPr>
+          <p:cNvPr id="21" name="Image 20">
+            <a:extLst>
+              <a:ext uri="{FF2B5EF4-FFF2-40B4-BE49-F238E27FC236}">
+                <a16:creationId xmlns:a16="http://schemas.microsoft.com/office/drawing/2014/main" id="{094CAB02-E8DF-B0AA-7D78-DFA544E19F60}"/>
+              </a:ext>
+            </a:extLst>
+          </p:cNvPr>
+          <p:cNvPicPr>
+            <a:picLocks noChangeAspect="1"/>
+          </p:cNvPicPr>
+          <p:nvPr/>
+        </p:nvPicPr>
+        <p:blipFill>
+          <a:blip r:embed="rId7"/>
+          <a:stretch>
+            <a:fillRect/>
+          </a:stretch>
+        </p:blipFill>
+        <p:spPr>
+          <a:xfrm rot="16200000">
+            <a:off x="8903327" y="3670563"/>
+            <a:ext cx="1756763" cy="3367767"/>
+          </a:xfrm>
+          <a:prstGeom prst="rect">
+            <a:avLst/>
+          </a:prstGeom>
+        </p:spPr>
+      </p:pic>
+      <p:sp>
+        <p:nvSpPr>
+          <p:cNvPr id="22" name="Espace réservé du texte 2">
+            <a:extLst>
+              <a:ext uri="{FF2B5EF4-FFF2-40B4-BE49-F238E27FC236}">
+                <a16:creationId xmlns:a16="http://schemas.microsoft.com/office/drawing/2014/main" id="{C8525F47-AF11-DBE1-DD7C-9229CF1CEED6}"/>
+              </a:ext>
+            </a:extLst>
+          </p:cNvPr>
+          <p:cNvSpPr txBox="1">
+            <a:spLocks/>
+          </p:cNvSpPr>
+          <p:nvPr/>
+        </p:nvSpPr>
+        <p:spPr>
+          <a:xfrm>
+            <a:off x="7937577" y="1662923"/>
+            <a:ext cx="3562141" cy="816551"/>
+          </a:xfrm>
+          <a:prstGeom prst="rect">
+            <a:avLst/>
+          </a:prstGeom>
+        </p:spPr>
+        <p:txBody>
+          <a:bodyPr vert="horz" lIns="91440" tIns="0" rIns="91440" bIns="0" rtlCol="0">
+            <a:normAutofit/>
+          </a:bodyPr>
+          <a:lstStyle>
+            <a:defPPr>
+              <a:defRPr lang="fr-FR"/>
+            </a:defPPr>
+            <a:lvl1pPr marL="0" indent="0" algn="l" defTabSz="914400" rtl="0" eaLnBrk="1" latinLnBrk="0" hangingPunct="1">
+              <a:lnSpc>
+                <a:spcPct val="100000"/>
+              </a:lnSpc>
+              <a:spcBef>
+                <a:spcPts val="0"/>
+              </a:spcBef>
+              <a:buFont typeface="Arial" panose="020B0604020202020204" pitchFamily="34" charset="0"/>
+              <a:buNone/>
+              <a:defRPr lang="fr-FR" sz="2400" kern="1200">
+                <a:solidFill>
+                  <a:schemeClr val="accent6"/>
+                </a:solidFill>
+                <a:latin typeface="+mn-lt"/>
+                <a:ea typeface="+mn-ea"/>
+                <a:cs typeface="+mn-cs"/>
+              </a:defRPr>
+            </a:lvl1pPr>
+            <a:lvl2pPr marL="347472" indent="-347472" algn="l" defTabSz="914400" rtl="0" eaLnBrk="1" latinLnBrk="0" hangingPunct="1">
+              <a:lnSpc>
+                <a:spcPct val="100000"/>
+              </a:lnSpc>
+              <a:spcBef>
+                <a:spcPts val="0"/>
+              </a:spcBef>
+              <a:buFont typeface="Arial" panose="020B0604020202020204" pitchFamily="34" charset="0"/>
+              <a:buChar char="•"/>
+              <a:defRPr lang="fr-FR" sz="2400" kern="1200">
+                <a:solidFill>
+                  <a:schemeClr val="accent6"/>
+                </a:solidFill>
+                <a:latin typeface="+mn-lt"/>
+                <a:ea typeface="+mn-ea"/>
+                <a:cs typeface="+mn-cs"/>
+              </a:defRPr>
+            </a:lvl2pPr>
+            <a:lvl3pPr marL="685800" indent="-347472" algn="l" defTabSz="914400" rtl="0" eaLnBrk="1" latinLnBrk="0" hangingPunct="1">
+              <a:lnSpc>
+                <a:spcPct val="100000"/>
+              </a:lnSpc>
+              <a:spcBef>
+                <a:spcPts val="0"/>
+              </a:spcBef>
+              <a:buFont typeface="Arial" panose="020B0604020202020204" pitchFamily="34" charset="0"/>
+              <a:buChar char="•"/>
+              <a:defRPr lang="fr-FR" sz="2400" kern="1200">
+                <a:solidFill>
+                  <a:schemeClr val="accent6"/>
+                </a:solidFill>
+                <a:latin typeface="+mn-lt"/>
+                <a:ea typeface="+mn-ea"/>
+                <a:cs typeface="+mn-cs"/>
+              </a:defRPr>
+            </a:lvl3pPr>
+            <a:lvl4pPr marL="1600200" indent="-347472" algn="l" defTabSz="914400" rtl="0" eaLnBrk="1" latinLnBrk="0" hangingPunct="1">
+              <a:lnSpc>
+                <a:spcPct val="100000"/>
+              </a:lnSpc>
+              <a:spcBef>
+                <a:spcPts val="360"/>
+              </a:spcBef>
+              <a:buFont typeface="Arial" panose="020B0604020202020204" pitchFamily="34" charset="0"/>
+              <a:buChar char="•"/>
+              <a:defRPr lang="fr-FR" sz="1800" kern="1200">
+                <a:solidFill>
+                  <a:schemeClr val="accent6"/>
+                </a:solidFill>
+                <a:latin typeface="+mn-lt"/>
+                <a:ea typeface="+mn-ea"/>
+                <a:cs typeface="+mn-cs"/>
+              </a:defRPr>
+            </a:lvl4pPr>
+            <a:lvl5pPr marL="2057400" indent="-347472" algn="l" defTabSz="914400" rtl="0" eaLnBrk="1" latinLnBrk="0" hangingPunct="1">
+              <a:lnSpc>
+                <a:spcPct val="100000"/>
+              </a:lnSpc>
+              <a:spcBef>
+                <a:spcPts val="360"/>
+              </a:spcBef>
+              <a:buFont typeface="Arial" panose="020B0604020202020204" pitchFamily="34" charset="0"/>
+              <a:buChar char="•"/>
+              <a:defRPr lang="fr-FR" sz="1800" kern="1200">
+                <a:solidFill>
+                  <a:schemeClr val="accent6"/>
+                </a:solidFill>
+                <a:latin typeface="+mn-lt"/>
+                <a:ea typeface="+mn-ea"/>
+                <a:cs typeface="+mn-cs"/>
+              </a:defRPr>
+            </a:lvl5pPr>
+            <a:lvl6pPr marL="2514600" indent="-228600" algn="l" defTabSz="914400" rtl="0" eaLnBrk="1" latinLnBrk="0" hangingPunct="1">
+              <a:lnSpc>
+                <a:spcPct val="90000"/>
+              </a:lnSpc>
+              <a:spcBef>
+                <a:spcPts val="500"/>
+              </a:spcBef>
+              <a:buFont typeface="Arial" panose="020B0604020202020204" pitchFamily="34" charset="0"/>
+              <a:buChar char="•"/>
+              <a:defRPr lang="fr-FR" sz="1800" kern="1200">
+                <a:solidFill>
+                  <a:schemeClr val="tx1"/>
+                </a:solidFill>
+                <a:latin typeface="+mn-lt"/>
+                <a:ea typeface="+mn-ea"/>
+                <a:cs typeface="+mn-cs"/>
+              </a:defRPr>
+            </a:lvl6pPr>
+            <a:lvl7pPr marL="2971800" indent="-228600" algn="l" defTabSz="914400" rtl="0" eaLnBrk="1" latinLnBrk="0" hangingPunct="1">
+              <a:lnSpc>
+                <a:spcPct val="90000"/>
+              </a:lnSpc>
+              <a:spcBef>
+                <a:spcPts val="500"/>
+              </a:spcBef>
+              <a:buFont typeface="Arial" panose="020B0604020202020204" pitchFamily="34" charset="0"/>
+              <a:buChar char="•"/>
+              <a:defRPr lang="fr-FR" sz="1800" kern="1200">
+                <a:solidFill>
+                  <a:schemeClr val="tx1"/>
+                </a:solidFill>
+                <a:latin typeface="+mn-lt"/>
+                <a:ea typeface="+mn-ea"/>
+                <a:cs typeface="+mn-cs"/>
+              </a:defRPr>
+            </a:lvl7pPr>
+            <a:lvl8pPr marL="3429000" indent="-228600" algn="l" defTabSz="914400" rtl="0" eaLnBrk="1" latinLnBrk="0" hangingPunct="1">
+              <a:lnSpc>
+                <a:spcPct val="90000"/>
+              </a:lnSpc>
+              <a:spcBef>
+                <a:spcPts val="500"/>
+              </a:spcBef>
+              <a:buFont typeface="Arial" panose="020B0604020202020204" pitchFamily="34" charset="0"/>
+              <a:buChar char="•"/>
+              <a:defRPr lang="fr-FR" sz="1800" kern="1200">
+                <a:solidFill>
+                  <a:schemeClr val="tx1"/>
+                </a:solidFill>
+                <a:latin typeface="+mn-lt"/>
+                <a:ea typeface="+mn-ea"/>
+                <a:cs typeface="+mn-cs"/>
+              </a:defRPr>
+            </a:lvl8pPr>
+            <a:lvl9pPr marL="3886200" indent="-228600" algn="l" defTabSz="914400" rtl="0" eaLnBrk="1" latinLnBrk="0" hangingPunct="1">
+              <a:lnSpc>
+                <a:spcPct val="90000"/>
+              </a:lnSpc>
+              <a:spcBef>
+                <a:spcPts val="500"/>
+              </a:spcBef>
+              <a:buFont typeface="Arial" panose="020B0604020202020204" pitchFamily="34" charset="0"/>
+              <a:buChar char="•"/>
+              <a:defRPr lang="fr-FR" sz="1800" kern="1200">
+                <a:solidFill>
+                  <a:schemeClr val="tx1"/>
+                </a:solidFill>
+                <a:latin typeface="+mn-lt"/>
+                <a:ea typeface="+mn-ea"/>
+                <a:cs typeface="+mn-cs"/>
+              </a:defRPr>
+            </a:lvl9pPr>
+          </a:lstStyle>
+          <a:p>
+            <a:pPr algn="ctr"/>
+            <a:r>
+              <a:rPr lang="fr-FR" sz="2000" dirty="0"/>
+              <a:t>3.   Compression par une masse</a:t>
+            </a:r>
+          </a:p>
+          <a:p>
+            <a:endParaRPr lang="fr-FR" sz="2000" dirty="0"/>
+          </a:p>
+          <a:p>
+            <a:endParaRPr lang="fr-FR" sz="2000" dirty="0"/>
+          </a:p>
+        </p:txBody>
+      </p:sp>
+      <p:sp>
+        <p:nvSpPr>
+          <p:cNvPr id="23" name="Espace réservé du texte 2">
+            <a:extLst>
+              <a:ext uri="{FF2B5EF4-FFF2-40B4-BE49-F238E27FC236}">
+                <a16:creationId xmlns:a16="http://schemas.microsoft.com/office/drawing/2014/main" id="{19F40A4E-6234-7E03-121E-41129E15DA6F}"/>
+              </a:ext>
+            </a:extLst>
+          </p:cNvPr>
+          <p:cNvSpPr txBox="1">
+            <a:spLocks/>
+          </p:cNvSpPr>
+          <p:nvPr/>
+        </p:nvSpPr>
+        <p:spPr>
+          <a:xfrm>
+            <a:off x="4206127" y="4195107"/>
+            <a:ext cx="3562141" cy="816551"/>
+          </a:xfrm>
+          <a:prstGeom prst="rect">
+            <a:avLst/>
+          </a:prstGeom>
+        </p:spPr>
+        <p:txBody>
+          <a:bodyPr vert="horz" lIns="91440" tIns="0" rIns="91440" bIns="0" rtlCol="0">
+            <a:normAutofit/>
+          </a:bodyPr>
+          <a:lstStyle>
+            <a:defPPr>
+              <a:defRPr lang="fr-FR"/>
+            </a:defPPr>
+            <a:lvl1pPr marL="0" indent="0" algn="l" defTabSz="914400" rtl="0" eaLnBrk="1" latinLnBrk="0" hangingPunct="1">
+              <a:lnSpc>
+                <a:spcPct val="100000"/>
+              </a:lnSpc>
+              <a:spcBef>
+                <a:spcPts val="0"/>
+              </a:spcBef>
+              <a:buFont typeface="Arial" panose="020B0604020202020204" pitchFamily="34" charset="0"/>
+              <a:buNone/>
+              <a:defRPr lang="fr-FR" sz="2400" kern="1200">
+                <a:solidFill>
+                  <a:schemeClr val="accent6"/>
+                </a:solidFill>
+                <a:latin typeface="+mn-lt"/>
+                <a:ea typeface="+mn-ea"/>
+                <a:cs typeface="+mn-cs"/>
+              </a:defRPr>
+            </a:lvl1pPr>
+            <a:lvl2pPr marL="347472" indent="-347472" algn="l" defTabSz="914400" rtl="0" eaLnBrk="1" latinLnBrk="0" hangingPunct="1">
+              <a:lnSpc>
+                <a:spcPct val="100000"/>
+              </a:lnSpc>
+              <a:spcBef>
+                <a:spcPts val="0"/>
+              </a:spcBef>
+              <a:buFont typeface="Arial" panose="020B0604020202020204" pitchFamily="34" charset="0"/>
+              <a:buChar char="•"/>
+              <a:defRPr lang="fr-FR" sz="2400" kern="1200">
+                <a:solidFill>
+                  <a:schemeClr val="accent6"/>
+                </a:solidFill>
+                <a:latin typeface="+mn-lt"/>
+                <a:ea typeface="+mn-ea"/>
+                <a:cs typeface="+mn-cs"/>
+              </a:defRPr>
+            </a:lvl2pPr>
+            <a:lvl3pPr marL="685800" indent="-347472" algn="l" defTabSz="914400" rtl="0" eaLnBrk="1" latinLnBrk="0" hangingPunct="1">
+              <a:lnSpc>
+                <a:spcPct val="100000"/>
+              </a:lnSpc>
+              <a:spcBef>
+                <a:spcPts val="0"/>
+              </a:spcBef>
+              <a:buFont typeface="Arial" panose="020B0604020202020204" pitchFamily="34" charset="0"/>
+              <a:buChar char="•"/>
+              <a:defRPr lang="fr-FR" sz="2400" kern="1200">
+                <a:solidFill>
+                  <a:schemeClr val="accent6"/>
+                </a:solidFill>
+                <a:latin typeface="+mn-lt"/>
+                <a:ea typeface="+mn-ea"/>
+                <a:cs typeface="+mn-cs"/>
+              </a:defRPr>
+            </a:lvl3pPr>
+            <a:lvl4pPr marL="1600200" indent="-347472" algn="l" defTabSz="914400" rtl="0" eaLnBrk="1" latinLnBrk="0" hangingPunct="1">
+              <a:lnSpc>
+                <a:spcPct val="100000"/>
+              </a:lnSpc>
+              <a:spcBef>
+                <a:spcPts val="360"/>
+              </a:spcBef>
+              <a:buFont typeface="Arial" panose="020B0604020202020204" pitchFamily="34" charset="0"/>
+              <a:buChar char="•"/>
+              <a:defRPr lang="fr-FR" sz="1800" kern="1200">
+                <a:solidFill>
+                  <a:schemeClr val="accent6"/>
+                </a:solidFill>
+                <a:latin typeface="+mn-lt"/>
+                <a:ea typeface="+mn-ea"/>
+                <a:cs typeface="+mn-cs"/>
+              </a:defRPr>
+            </a:lvl4pPr>
+            <a:lvl5pPr marL="2057400" indent="-347472" algn="l" defTabSz="914400" rtl="0" eaLnBrk="1" latinLnBrk="0" hangingPunct="1">
+              <a:lnSpc>
+                <a:spcPct val="100000"/>
+              </a:lnSpc>
+              <a:spcBef>
+                <a:spcPts val="360"/>
+              </a:spcBef>
+              <a:buFont typeface="Arial" panose="020B0604020202020204" pitchFamily="34" charset="0"/>
+              <a:buChar char="•"/>
+              <a:defRPr lang="fr-FR" sz="1800" kern="1200">
+                <a:solidFill>
+                  <a:schemeClr val="accent6"/>
+                </a:solidFill>
+                <a:latin typeface="+mn-lt"/>
+                <a:ea typeface="+mn-ea"/>
+                <a:cs typeface="+mn-cs"/>
+              </a:defRPr>
+            </a:lvl5pPr>
+            <a:lvl6pPr marL="2514600" indent="-228600" algn="l" defTabSz="914400" rtl="0" eaLnBrk="1" latinLnBrk="0" hangingPunct="1">
+              <a:lnSpc>
+                <a:spcPct val="90000"/>
+              </a:lnSpc>
+              <a:spcBef>
+                <a:spcPts val="500"/>
+              </a:spcBef>
+              <a:buFont typeface="Arial" panose="020B0604020202020204" pitchFamily="34" charset="0"/>
+              <a:buChar char="•"/>
+              <a:defRPr lang="fr-FR" sz="1800" kern="1200">
+                <a:solidFill>
+                  <a:schemeClr val="tx1"/>
+                </a:solidFill>
+                <a:latin typeface="+mn-lt"/>
+                <a:ea typeface="+mn-ea"/>
+                <a:cs typeface="+mn-cs"/>
+              </a:defRPr>
+            </a:lvl6pPr>
+            <a:lvl7pPr marL="2971800" indent="-228600" algn="l" defTabSz="914400" rtl="0" eaLnBrk="1" latinLnBrk="0" hangingPunct="1">
+              <a:lnSpc>
+                <a:spcPct val="90000"/>
+              </a:lnSpc>
+              <a:spcBef>
+                <a:spcPts val="500"/>
+              </a:spcBef>
+              <a:buFont typeface="Arial" panose="020B0604020202020204" pitchFamily="34" charset="0"/>
+              <a:buChar char="•"/>
+              <a:defRPr lang="fr-FR" sz="1800" kern="1200">
+                <a:solidFill>
+                  <a:schemeClr val="tx1"/>
+                </a:solidFill>
+                <a:latin typeface="+mn-lt"/>
+                <a:ea typeface="+mn-ea"/>
+                <a:cs typeface="+mn-cs"/>
+              </a:defRPr>
+            </a:lvl7pPr>
+            <a:lvl8pPr marL="3429000" indent="-228600" algn="l" defTabSz="914400" rtl="0" eaLnBrk="1" latinLnBrk="0" hangingPunct="1">
+              <a:lnSpc>
+                <a:spcPct val="90000"/>
+              </a:lnSpc>
+              <a:spcBef>
+                <a:spcPts val="500"/>
+              </a:spcBef>
+              <a:buFont typeface="Arial" panose="020B0604020202020204" pitchFamily="34" charset="0"/>
+              <a:buChar char="•"/>
+              <a:defRPr lang="fr-FR" sz="1800" kern="1200">
+                <a:solidFill>
+                  <a:schemeClr val="tx1"/>
+                </a:solidFill>
+                <a:latin typeface="+mn-lt"/>
+                <a:ea typeface="+mn-ea"/>
+                <a:cs typeface="+mn-cs"/>
+              </a:defRPr>
+            </a:lvl8pPr>
+            <a:lvl9pPr marL="3886200" indent="-228600" algn="l" defTabSz="914400" rtl="0" eaLnBrk="1" latinLnBrk="0" hangingPunct="1">
+              <a:lnSpc>
+                <a:spcPct val="90000"/>
+              </a:lnSpc>
+              <a:spcBef>
+                <a:spcPts val="500"/>
+              </a:spcBef>
+              <a:buFont typeface="Arial" panose="020B0604020202020204" pitchFamily="34" charset="0"/>
+              <a:buChar char="•"/>
+              <a:defRPr lang="fr-FR" sz="1800" kern="1200">
+                <a:solidFill>
+                  <a:schemeClr val="tx1"/>
+                </a:solidFill>
+                <a:latin typeface="+mn-lt"/>
+                <a:ea typeface="+mn-ea"/>
+                <a:cs typeface="+mn-cs"/>
+              </a:defRPr>
+            </a:lvl9pPr>
+          </a:lstStyle>
+          <a:p>
+            <a:pPr algn="ctr"/>
+            <a:r>
+              <a:rPr lang="fr-FR" sz="2000" dirty="0"/>
+              <a:t>4.   Photo sur panneau LED après la compression</a:t>
+            </a:r>
+          </a:p>
+          <a:p>
+            <a:endParaRPr lang="fr-FR" sz="2000" dirty="0"/>
+          </a:p>
+          <a:p>
+            <a:endParaRPr lang="fr-FR" sz="2000" dirty="0"/>
+          </a:p>
+        </p:txBody>
+      </p:sp>
     </p:spTree>
     <p:extLst>
       <p:ext uri="{BB962C8B-B14F-4D97-AF65-F5344CB8AC3E}">
@@ -24602,10 +25269,10 @@
       </p:sp>
       <p:pic>
         <p:nvPicPr>
-          <p:cNvPr id="15" name="Image 14">
+          <p:cNvPr id="4" name="Image 3">
             <a:extLst>
               <a:ext uri="{FF2B5EF4-FFF2-40B4-BE49-F238E27FC236}">
-                <a16:creationId xmlns:a16="http://schemas.microsoft.com/office/drawing/2014/main" id="{83D92E69-A0C6-9B79-2F67-1FCE34AE6529}"/>
+                <a16:creationId xmlns:a16="http://schemas.microsoft.com/office/drawing/2014/main" id="{F7531864-2F2C-62AE-4B9B-F48FA2DDBBA3}"/>
               </a:ext>
             </a:extLst>
           </p:cNvPr>
@@ -24622,47 +25289,17 @@
         </p:blipFill>
         <p:spPr>
           <a:xfrm>
-            <a:off x="840187" y="1669796"/>
-            <a:ext cx="6105143" cy="4650514"/>
+            <a:off x="840187" y="1507460"/>
+            <a:ext cx="6481916" cy="4931728"/>
           </a:xfrm>
           <a:prstGeom prst="rect">
             <a:avLst/>
           </a:prstGeom>
-          <a:ln w="57150">
+          <a:ln w="38100">
             <a:solidFill>
               <a:srgbClr val="AAC4E9"/>
             </a:solidFill>
           </a:ln>
-        </p:spPr>
-      </p:pic>
-      <p:pic>
-        <p:nvPicPr>
-          <p:cNvPr id="3" name="Image 2">
-            <a:extLst>
-              <a:ext uri="{FF2B5EF4-FFF2-40B4-BE49-F238E27FC236}">
-                <a16:creationId xmlns:a16="http://schemas.microsoft.com/office/drawing/2014/main" id="{A39D1102-F82B-9175-5E6D-F1971D087074}"/>
-              </a:ext>
-            </a:extLst>
-          </p:cNvPr>
-          <p:cNvPicPr>
-            <a:picLocks noChangeAspect="1"/>
-          </p:cNvPicPr>
-          <p:nvPr/>
-        </p:nvPicPr>
-        <p:blipFill>
-          <a:blip r:embed="rId3"/>
-          <a:stretch>
-            <a:fillRect/>
-          </a:stretch>
-        </p:blipFill>
-        <p:spPr>
-          <a:xfrm>
-            <a:off x="3368535" y="1358793"/>
-            <a:ext cx="5454930" cy="4140413"/>
-          </a:xfrm>
-          <a:prstGeom prst="rect">
-            <a:avLst/>
-          </a:prstGeom>
         </p:spPr>
       </p:pic>
     </p:spTree>
@@ -24793,7 +25430,7 @@
             </a:br>
             <a:r>
               <a:rPr lang="fr-FR" sz="2400" dirty="0"/>
-              <a:t>avec du kaolin (matériau modèle)</a:t>
+              <a:t>avec une émulsion (matériau modèle)</a:t>
             </a:r>
             <a:endParaRPr lang="fr-FR" dirty="0"/>
           </a:p>
@@ -25891,12 +26528,6 @@
 </file>
 
 <file path=customXml/item1.xml><?xml version="1.0" encoding="utf-8"?>
-<p:properties xmlns:p="http://schemas.microsoft.com/office/2006/metadata/properties" xmlns:xsi="http://www.w3.org/2001/XMLSchema-instance" xmlns:pc="http://schemas.microsoft.com/office/infopath/2007/PartnerControls">
-  <documentManagement/>
-</p:properties>
-</file>
-
-<file path=customXml/item2.xml><?xml version="1.0" encoding="utf-8"?>
 <ct:contentTypeSchema xmlns:ct="http://schemas.microsoft.com/office/2006/metadata/contentType" xmlns:ma="http://schemas.microsoft.com/office/2006/metadata/properties/metaAttributes" ct:_="" ma:_="" ma:contentTypeName="Document" ma:contentTypeID="0x0101007A262EAC855B9A4AA1EA640DE55D9291" ma:contentTypeVersion="1" ma:contentTypeDescription="Crée un document." ma:contentTypeScope="" ma:versionID="b77c85bbfd0b92efe37df041e558d067">
   <xsd:schema xmlns:xsd="http://www.w3.org/2001/XMLSchema" xmlns:xs="http://www.w3.org/2001/XMLSchema" xmlns:p="http://schemas.microsoft.com/office/2006/metadata/properties" xmlns:ns3="5fe2be53-eead-4083-8773-55ad5d51649a" targetNamespace="http://schemas.microsoft.com/office/2006/metadata/properties" ma:root="true" ma:fieldsID="d116f912760d7d2eb93dc091ad074d5c" ns3:_="">
     <xsd:import namespace="5fe2be53-eead-4083-8773-55ad5d51649a"/>
@@ -26022,6 +26653,12 @@
 </ct:contentTypeSchema>
 </file>
 
+<file path=customXml/item2.xml><?xml version="1.0" encoding="utf-8"?>
+<p:properties xmlns:p="http://schemas.microsoft.com/office/2006/metadata/properties" xmlns:xsi="http://www.w3.org/2001/XMLSchema-instance" xmlns:pc="http://schemas.microsoft.com/office/infopath/2007/PartnerControls">
+  <documentManagement/>
+</p:properties>
+</file>
+
 <file path=customXml/item3.xml><?xml version="1.0" encoding="utf-8"?>
 <?mso-contentType ?>
 <FormTemplates xmlns="http://schemas.microsoft.com/sharepoint/v3/contenttype/forms">
@@ -26032,22 +26669,6 @@
 </file>
 
 <file path=customXml/itemProps1.xml><?xml version="1.0" encoding="utf-8"?>
-<ds:datastoreItem xmlns:ds="http://schemas.openxmlformats.org/officeDocument/2006/customXml" ds:itemID="{BA719FA4-954C-4FA8-82CB-206659C3B826}">
-  <ds:schemaRefs>
-    <ds:schemaRef ds:uri="http://schemas.microsoft.com/office/infopath/2007/PartnerControls"/>
-    <ds:schemaRef ds:uri="http://purl.org/dc/elements/1.1/"/>
-    <ds:schemaRef ds:uri="http://schemas.microsoft.com/office/2006/metadata/properties"/>
-    <ds:schemaRef ds:uri="5fe2be53-eead-4083-8773-55ad5d51649a"/>
-    <ds:schemaRef ds:uri="http://purl.org/dc/terms/"/>
-    <ds:schemaRef ds:uri="http://schemas.openxmlformats.org/package/2006/metadata/core-properties"/>
-    <ds:schemaRef ds:uri="http://schemas.microsoft.com/office/2006/documentManagement/types"/>
-    <ds:schemaRef ds:uri="http://www.w3.org/XML/1998/namespace"/>
-    <ds:schemaRef ds:uri="http://purl.org/dc/dcmitype/"/>
-  </ds:schemaRefs>
-</ds:datastoreItem>
-</file>
-
-<file path=customXml/itemProps2.xml><?xml version="1.0" encoding="utf-8"?>
 <ds:datastoreItem xmlns:ds="http://schemas.openxmlformats.org/officeDocument/2006/customXml" ds:itemID="{995F1B84-5324-45B5-9B4C-63D8886BFBE7}">
   <ds:schemaRefs>
     <ds:schemaRef ds:uri="http://schemas.microsoft.com/office/2006/metadata/contentType"/>
@@ -26065,6 +26686,22 @@
 </ds:datastoreItem>
 </file>
 
+<file path=customXml/itemProps2.xml><?xml version="1.0" encoding="utf-8"?>
+<ds:datastoreItem xmlns:ds="http://schemas.openxmlformats.org/officeDocument/2006/customXml" ds:itemID="{BA719FA4-954C-4FA8-82CB-206659C3B826}">
+  <ds:schemaRefs>
+    <ds:schemaRef ds:uri="http://schemas.microsoft.com/office/infopath/2007/PartnerControls"/>
+    <ds:schemaRef ds:uri="http://purl.org/dc/elements/1.1/"/>
+    <ds:schemaRef ds:uri="http://schemas.microsoft.com/office/2006/metadata/properties"/>
+    <ds:schemaRef ds:uri="5fe2be53-eead-4083-8773-55ad5d51649a"/>
+    <ds:schemaRef ds:uri="http://purl.org/dc/terms/"/>
+    <ds:schemaRef ds:uri="http://schemas.openxmlformats.org/package/2006/metadata/core-properties"/>
+    <ds:schemaRef ds:uri="http://schemas.microsoft.com/office/2006/documentManagement/types"/>
+    <ds:schemaRef ds:uri="http://www.w3.org/XML/1998/namespace"/>
+    <ds:schemaRef ds:uri="http://purl.org/dc/dcmitype/"/>
+  </ds:schemaRefs>
+</ds:datastoreItem>
+</file>
+
 <file path=customXml/itemProps3.xml><?xml version="1.0" encoding="utf-8"?>
 <ds:datastoreItem xmlns:ds="http://schemas.openxmlformats.org/officeDocument/2006/customXml" ds:itemID="{16DBB56F-4362-4386-A1A1-3DF898896616}">
   <ds:schemaRefs>

--- a/PPT/Viscoplastic Squeeze pptGE 2.pptx
+++ b/PPT/Viscoplastic Squeeze pptGE 2.pptx
@@ -5,21 +5,23 @@
     <p:sldMasterId id="2147483650" r:id="rId4"/>
   </p:sldMasterIdLst>
   <p:notesMasterIdLst>
-    <p:notesMasterId r:id="rId14"/>
+    <p:notesMasterId r:id="rId16"/>
   </p:notesMasterIdLst>
   <p:handoutMasterIdLst>
-    <p:handoutMasterId r:id="rId15"/>
+    <p:handoutMasterId r:id="rId17"/>
   </p:handoutMasterIdLst>
   <p:sldIdLst>
     <p:sldId id="281" r:id="rId5"/>
     <p:sldId id="325" r:id="rId6"/>
     <p:sldId id="324" r:id="rId7"/>
     <p:sldId id="322" r:id="rId8"/>
-    <p:sldId id="326" r:id="rId9"/>
-    <p:sldId id="328" r:id="rId10"/>
-    <p:sldId id="329" r:id="rId11"/>
-    <p:sldId id="330" r:id="rId12"/>
-    <p:sldId id="331" r:id="rId13"/>
+    <p:sldId id="334" r:id="rId9"/>
+    <p:sldId id="329" r:id="rId10"/>
+    <p:sldId id="330" r:id="rId11"/>
+    <p:sldId id="331" r:id="rId12"/>
+    <p:sldId id="332" r:id="rId13"/>
+    <p:sldId id="333" r:id="rId14"/>
+    <p:sldId id="335" r:id="rId15"/>
   </p:sldIdLst>
   <p:sldSz cx="12192000" cy="6858000"/>
   <p:notesSz cx="13716000" cy="24384000"/>
@@ -18822,6 +18824,908 @@
     <p:extLst>
       <p:ext uri="{BB962C8B-B14F-4D97-AF65-F5344CB8AC3E}">
         <p14:creationId xmlns:p14="http://schemas.microsoft.com/office/powerpoint/2010/main" val="2952923800"/>
+      </p:ext>
+    </p:extLst>
+  </p:cSld>
+  <p:clrMapOvr>
+    <a:masterClrMapping/>
+  </p:clrMapOvr>
+</p:sld>
+</file>
+
+<file path=ppt/slides/slide10.xml><?xml version="1.0" encoding="utf-8"?>
+<p:sld xmlns:a="http://schemas.openxmlformats.org/drawingml/2006/main" xmlns:r="http://schemas.openxmlformats.org/officeDocument/2006/relationships" xmlns:p="http://schemas.openxmlformats.org/presentationml/2006/main">
+  <p:cSld>
+    <p:spTree>
+      <p:nvGrpSpPr>
+        <p:cNvPr id="1" name="">
+          <a:extLst>
+            <a:ext uri="{FF2B5EF4-FFF2-40B4-BE49-F238E27FC236}">
+              <a16:creationId xmlns:a16="http://schemas.microsoft.com/office/drawing/2014/main" id="{EB9094B6-A6F9-85D3-A456-D40F2095CDEC}"/>
+            </a:ext>
+          </a:extLst>
+        </p:cNvPr>
+        <p:cNvGrpSpPr/>
+        <p:nvPr/>
+      </p:nvGrpSpPr>
+      <p:grpSpPr>
+        <a:xfrm>
+          <a:off x="0" y="0"/>
+          <a:ext cx="0" cy="0"/>
+          <a:chOff x="0" y="0"/>
+          <a:chExt cx="0" cy="0"/>
+        </a:xfrm>
+      </p:grpSpPr>
+      <p:sp>
+        <p:nvSpPr>
+          <p:cNvPr id="7" name="Rectangle 6">
+            <a:extLst>
+              <a:ext uri="{FF2B5EF4-FFF2-40B4-BE49-F238E27FC236}">
+                <a16:creationId xmlns:a16="http://schemas.microsoft.com/office/drawing/2014/main" id="{C69B9D2A-8E7F-714A-1F8F-7E96AC22D63D}"/>
+              </a:ext>
+            </a:extLst>
+          </p:cNvPr>
+          <p:cNvSpPr/>
+          <p:nvPr/>
+        </p:nvSpPr>
+        <p:spPr>
+          <a:xfrm>
+            <a:off x="9226193" y="3383207"/>
+            <a:ext cx="2529425" cy="3474793"/>
+          </a:xfrm>
+          <a:prstGeom prst="rect">
+            <a:avLst/>
+          </a:prstGeom>
+          <a:solidFill>
+            <a:srgbClr val="FDFAF6"/>
+          </a:solidFill>
+          <a:ln>
+            <a:noFill/>
+          </a:ln>
+        </p:spPr>
+        <p:style>
+          <a:lnRef idx="2">
+            <a:schemeClr val="accent1">
+              <a:shade val="15000"/>
+            </a:schemeClr>
+          </a:lnRef>
+          <a:fillRef idx="1">
+            <a:schemeClr val="accent1"/>
+          </a:fillRef>
+          <a:effectRef idx="0">
+            <a:schemeClr val="accent1"/>
+          </a:effectRef>
+          <a:fontRef idx="minor">
+            <a:schemeClr val="lt1"/>
+          </a:fontRef>
+        </p:style>
+        <p:txBody>
+          <a:bodyPr rtlCol="0" anchor="ctr"/>
+          <a:lstStyle/>
+          <a:p>
+            <a:pPr algn="ctr"/>
+            <a:endParaRPr lang="fr-FR" dirty="0"/>
+          </a:p>
+        </p:txBody>
+      </p:sp>
+      <p:sp>
+        <p:nvSpPr>
+          <p:cNvPr id="8" name="Titre 1">
+            <a:extLst>
+              <a:ext uri="{FF2B5EF4-FFF2-40B4-BE49-F238E27FC236}">
+                <a16:creationId xmlns:a16="http://schemas.microsoft.com/office/drawing/2014/main" id="{36B81A51-494B-1C34-2777-251B7C61B544}"/>
+              </a:ext>
+            </a:extLst>
+          </p:cNvPr>
+          <p:cNvSpPr>
+            <a:spLocks noGrp="1"/>
+          </p:cNvSpPr>
+          <p:nvPr>
+            <p:ph type="title"/>
+          </p:nvPr>
+        </p:nvSpPr>
+        <p:spPr>
+          <a:xfrm>
+            <a:off x="840187" y="689619"/>
+            <a:ext cx="10511627" cy="646331"/>
+          </a:xfrm>
+        </p:spPr>
+        <p:txBody>
+          <a:bodyPr rtlCol="0"/>
+          <a:lstStyle>
+            <a:defPPr>
+              <a:defRPr lang="fr-FR"/>
+            </a:defPPr>
+          </a:lstStyle>
+          <a:p>
+            <a:pPr algn="ctr" rtl="0"/>
+            <a:r>
+              <a:rPr lang="fr-FR" dirty="0"/>
+              <a:t>Expérience 2 : étalement</a:t>
+            </a:r>
+            <a:br>
+              <a:rPr lang="fr-FR" dirty="0"/>
+            </a:br>
+            <a:r>
+              <a:rPr lang="fr-FR" sz="2400" dirty="0"/>
+              <a:t>de la colle</a:t>
+            </a:r>
+            <a:endParaRPr lang="fr-FR" dirty="0"/>
+          </a:p>
+        </p:txBody>
+      </p:sp>
+      <p:sp>
+        <p:nvSpPr>
+          <p:cNvPr id="13" name="Espace réservé du texte 2">
+            <a:extLst>
+              <a:ext uri="{FF2B5EF4-FFF2-40B4-BE49-F238E27FC236}">
+                <a16:creationId xmlns:a16="http://schemas.microsoft.com/office/drawing/2014/main" id="{2EE806E0-D5ED-FF72-A886-C2B1A379F7F9}"/>
+              </a:ext>
+            </a:extLst>
+          </p:cNvPr>
+          <p:cNvSpPr txBox="1">
+            <a:spLocks/>
+          </p:cNvSpPr>
+          <p:nvPr/>
+        </p:nvSpPr>
+        <p:spPr>
+          <a:xfrm>
+            <a:off x="8756763" y="1782811"/>
+            <a:ext cx="2815119" cy="3950169"/>
+          </a:xfrm>
+          <a:prstGeom prst="rect">
+            <a:avLst/>
+          </a:prstGeom>
+        </p:spPr>
+        <p:txBody>
+          <a:bodyPr vert="horz" lIns="91440" tIns="0" rIns="91440" bIns="0" rtlCol="0">
+            <a:normAutofit/>
+          </a:bodyPr>
+          <a:lstStyle>
+            <a:defPPr>
+              <a:defRPr lang="fr-FR"/>
+            </a:defPPr>
+            <a:lvl1pPr marL="0" indent="0" algn="l" defTabSz="914400" rtl="0" eaLnBrk="1" latinLnBrk="0" hangingPunct="1">
+              <a:lnSpc>
+                <a:spcPct val="100000"/>
+              </a:lnSpc>
+              <a:spcBef>
+                <a:spcPts val="0"/>
+              </a:spcBef>
+              <a:buFont typeface="Arial" panose="020B0604020202020204" pitchFamily="34" charset="0"/>
+              <a:buNone/>
+              <a:defRPr lang="fr-FR" sz="2400" kern="1200">
+                <a:solidFill>
+                  <a:schemeClr val="accent6"/>
+                </a:solidFill>
+                <a:latin typeface="+mn-lt"/>
+                <a:ea typeface="+mn-ea"/>
+                <a:cs typeface="+mn-cs"/>
+              </a:defRPr>
+            </a:lvl1pPr>
+            <a:lvl2pPr marL="347472" indent="-347472" algn="l" defTabSz="914400" rtl="0" eaLnBrk="1" latinLnBrk="0" hangingPunct="1">
+              <a:lnSpc>
+                <a:spcPct val="100000"/>
+              </a:lnSpc>
+              <a:spcBef>
+                <a:spcPts val="0"/>
+              </a:spcBef>
+              <a:buFont typeface="Arial" panose="020B0604020202020204" pitchFamily="34" charset="0"/>
+              <a:buChar char="•"/>
+              <a:defRPr lang="fr-FR" sz="2400" kern="1200">
+                <a:solidFill>
+                  <a:schemeClr val="accent6"/>
+                </a:solidFill>
+                <a:latin typeface="+mn-lt"/>
+                <a:ea typeface="+mn-ea"/>
+                <a:cs typeface="+mn-cs"/>
+              </a:defRPr>
+            </a:lvl2pPr>
+            <a:lvl3pPr marL="685800" indent="-347472" algn="l" defTabSz="914400" rtl="0" eaLnBrk="1" latinLnBrk="0" hangingPunct="1">
+              <a:lnSpc>
+                <a:spcPct val="100000"/>
+              </a:lnSpc>
+              <a:spcBef>
+                <a:spcPts val="0"/>
+              </a:spcBef>
+              <a:buFont typeface="Arial" panose="020B0604020202020204" pitchFamily="34" charset="0"/>
+              <a:buChar char="•"/>
+              <a:defRPr lang="fr-FR" sz="2400" kern="1200">
+                <a:solidFill>
+                  <a:schemeClr val="accent6"/>
+                </a:solidFill>
+                <a:latin typeface="+mn-lt"/>
+                <a:ea typeface="+mn-ea"/>
+                <a:cs typeface="+mn-cs"/>
+              </a:defRPr>
+            </a:lvl3pPr>
+            <a:lvl4pPr marL="1600200" indent="-347472" algn="l" defTabSz="914400" rtl="0" eaLnBrk="1" latinLnBrk="0" hangingPunct="1">
+              <a:lnSpc>
+                <a:spcPct val="100000"/>
+              </a:lnSpc>
+              <a:spcBef>
+                <a:spcPts val="360"/>
+              </a:spcBef>
+              <a:buFont typeface="Arial" panose="020B0604020202020204" pitchFamily="34" charset="0"/>
+              <a:buChar char="•"/>
+              <a:defRPr lang="fr-FR" sz="1800" kern="1200">
+                <a:solidFill>
+                  <a:schemeClr val="accent6"/>
+                </a:solidFill>
+                <a:latin typeface="+mn-lt"/>
+                <a:ea typeface="+mn-ea"/>
+                <a:cs typeface="+mn-cs"/>
+              </a:defRPr>
+            </a:lvl4pPr>
+            <a:lvl5pPr marL="2057400" indent="-347472" algn="l" defTabSz="914400" rtl="0" eaLnBrk="1" latinLnBrk="0" hangingPunct="1">
+              <a:lnSpc>
+                <a:spcPct val="100000"/>
+              </a:lnSpc>
+              <a:spcBef>
+                <a:spcPts val="360"/>
+              </a:spcBef>
+              <a:buFont typeface="Arial" panose="020B0604020202020204" pitchFamily="34" charset="0"/>
+              <a:buChar char="•"/>
+              <a:defRPr lang="fr-FR" sz="1800" kern="1200">
+                <a:solidFill>
+                  <a:schemeClr val="accent6"/>
+                </a:solidFill>
+                <a:latin typeface="+mn-lt"/>
+                <a:ea typeface="+mn-ea"/>
+                <a:cs typeface="+mn-cs"/>
+              </a:defRPr>
+            </a:lvl5pPr>
+            <a:lvl6pPr marL="2514600" indent="-228600" algn="l" defTabSz="914400" rtl="0" eaLnBrk="1" latinLnBrk="0" hangingPunct="1">
+              <a:lnSpc>
+                <a:spcPct val="90000"/>
+              </a:lnSpc>
+              <a:spcBef>
+                <a:spcPts val="500"/>
+              </a:spcBef>
+              <a:buFont typeface="Arial" panose="020B0604020202020204" pitchFamily="34" charset="0"/>
+              <a:buChar char="•"/>
+              <a:defRPr lang="fr-FR" sz="1800" kern="1200">
+                <a:solidFill>
+                  <a:schemeClr val="tx1"/>
+                </a:solidFill>
+                <a:latin typeface="+mn-lt"/>
+                <a:ea typeface="+mn-ea"/>
+                <a:cs typeface="+mn-cs"/>
+              </a:defRPr>
+            </a:lvl6pPr>
+            <a:lvl7pPr marL="2971800" indent="-228600" algn="l" defTabSz="914400" rtl="0" eaLnBrk="1" latinLnBrk="0" hangingPunct="1">
+              <a:lnSpc>
+                <a:spcPct val="90000"/>
+              </a:lnSpc>
+              <a:spcBef>
+                <a:spcPts val="500"/>
+              </a:spcBef>
+              <a:buFont typeface="Arial" panose="020B0604020202020204" pitchFamily="34" charset="0"/>
+              <a:buChar char="•"/>
+              <a:defRPr lang="fr-FR" sz="1800" kern="1200">
+                <a:solidFill>
+                  <a:schemeClr val="tx1"/>
+                </a:solidFill>
+                <a:latin typeface="+mn-lt"/>
+                <a:ea typeface="+mn-ea"/>
+                <a:cs typeface="+mn-cs"/>
+              </a:defRPr>
+            </a:lvl7pPr>
+            <a:lvl8pPr marL="3429000" indent="-228600" algn="l" defTabSz="914400" rtl="0" eaLnBrk="1" latinLnBrk="0" hangingPunct="1">
+              <a:lnSpc>
+                <a:spcPct val="90000"/>
+              </a:lnSpc>
+              <a:spcBef>
+                <a:spcPts val="500"/>
+              </a:spcBef>
+              <a:buFont typeface="Arial" panose="020B0604020202020204" pitchFamily="34" charset="0"/>
+              <a:buChar char="•"/>
+              <a:defRPr lang="fr-FR" sz="1800" kern="1200">
+                <a:solidFill>
+                  <a:schemeClr val="tx1"/>
+                </a:solidFill>
+                <a:latin typeface="+mn-lt"/>
+                <a:ea typeface="+mn-ea"/>
+                <a:cs typeface="+mn-cs"/>
+              </a:defRPr>
+            </a:lvl8pPr>
+            <a:lvl9pPr marL="3886200" indent="-228600" algn="l" defTabSz="914400" rtl="0" eaLnBrk="1" latinLnBrk="0" hangingPunct="1">
+              <a:lnSpc>
+                <a:spcPct val="90000"/>
+              </a:lnSpc>
+              <a:spcBef>
+                <a:spcPts val="500"/>
+              </a:spcBef>
+              <a:buFont typeface="Arial" panose="020B0604020202020204" pitchFamily="34" charset="0"/>
+              <a:buChar char="•"/>
+              <a:defRPr lang="fr-FR" sz="1800" kern="1200">
+                <a:solidFill>
+                  <a:schemeClr val="tx1"/>
+                </a:solidFill>
+                <a:latin typeface="+mn-lt"/>
+                <a:ea typeface="+mn-ea"/>
+                <a:cs typeface="+mn-cs"/>
+              </a:defRPr>
+            </a:lvl9pPr>
+          </a:lstStyle>
+          <a:p>
+            <a:r>
+              <a:rPr lang="fr-FR" sz="2000" dirty="0"/>
+              <a:t>Masse de la goutte compressée : </a:t>
+            </a:r>
+          </a:p>
+          <a:p>
+            <a:pPr marL="690372" lvl="1" indent="-342900">
+              <a:buFont typeface="Wingdings" panose="05000000000000000000" pitchFamily="2" charset="2"/>
+              <a:buChar char="§"/>
+            </a:pPr>
+            <a:r>
+              <a:rPr lang="fr-FR" sz="2000" dirty="0"/>
+              <a:t>95 mg</a:t>
+            </a:r>
+          </a:p>
+          <a:p>
+            <a:pPr marL="690372" lvl="1" indent="-342900">
+              <a:buFont typeface="Wingdings" panose="05000000000000000000" pitchFamily="2" charset="2"/>
+              <a:buChar char="§"/>
+            </a:pPr>
+            <a:r>
+              <a:rPr lang="fr-FR" sz="2000" dirty="0"/>
+              <a:t>55 mg</a:t>
+            </a:r>
+          </a:p>
+          <a:p>
+            <a:endParaRPr lang="fr-FR" sz="2000" dirty="0"/>
+          </a:p>
+          <a:p>
+            <a:r>
+              <a:rPr lang="fr-FR" sz="2000" dirty="0"/>
+              <a:t>Masse de compression :</a:t>
+            </a:r>
+          </a:p>
+          <a:p>
+            <a:pPr marL="690372" lvl="1" indent="-342900">
+              <a:buFont typeface="Wingdings" panose="05000000000000000000" pitchFamily="2" charset="2"/>
+              <a:buChar char="§"/>
+            </a:pPr>
+            <a:r>
+              <a:rPr lang="fr-FR" sz="2000" dirty="0"/>
+              <a:t>20 g</a:t>
+            </a:r>
+          </a:p>
+          <a:p>
+            <a:pPr marL="690372" lvl="1" indent="-342900">
+              <a:buFont typeface="Wingdings" panose="05000000000000000000" pitchFamily="2" charset="2"/>
+              <a:buChar char="§"/>
+            </a:pPr>
+            <a:r>
+              <a:rPr lang="fr-FR" sz="2000" dirty="0"/>
+              <a:t>40 g</a:t>
+            </a:r>
+          </a:p>
+          <a:p>
+            <a:pPr marL="690372" lvl="1" indent="-342900">
+              <a:buFont typeface="Wingdings" panose="05000000000000000000" pitchFamily="2" charset="2"/>
+              <a:buChar char="§"/>
+            </a:pPr>
+            <a:r>
+              <a:rPr lang="fr-FR" sz="2000" dirty="0"/>
+              <a:t>50 g</a:t>
+            </a:r>
+          </a:p>
+          <a:p>
+            <a:pPr marL="690372" lvl="1" indent="-342900">
+              <a:buFont typeface="Wingdings" panose="05000000000000000000" pitchFamily="2" charset="2"/>
+              <a:buChar char="§"/>
+            </a:pPr>
+            <a:r>
+              <a:rPr lang="fr-FR" sz="2000" dirty="0"/>
+              <a:t>100 g</a:t>
+            </a:r>
+          </a:p>
+          <a:p>
+            <a:pPr marL="690372" lvl="1" indent="-342900">
+              <a:buFont typeface="Wingdings" panose="05000000000000000000" pitchFamily="2" charset="2"/>
+              <a:buChar char="§"/>
+            </a:pPr>
+            <a:r>
+              <a:rPr lang="fr-FR" sz="2000" dirty="0"/>
+              <a:t>200 g</a:t>
+            </a:r>
+          </a:p>
+          <a:p>
+            <a:endParaRPr lang="fr-FR" sz="2000" dirty="0"/>
+          </a:p>
+          <a:p>
+            <a:endParaRPr lang="fr-FR" sz="2000" dirty="0"/>
+          </a:p>
+        </p:txBody>
+      </p:sp>
+      <p:pic>
+        <p:nvPicPr>
+          <p:cNvPr id="4" name="Image 3">
+            <a:extLst>
+              <a:ext uri="{FF2B5EF4-FFF2-40B4-BE49-F238E27FC236}">
+                <a16:creationId xmlns:a16="http://schemas.microsoft.com/office/drawing/2014/main" id="{0EE2757C-0D6D-02DD-E681-94F06ED8BCC3}"/>
+              </a:ext>
+            </a:extLst>
+          </p:cNvPr>
+          <p:cNvPicPr>
+            <a:picLocks noChangeAspect="1"/>
+          </p:cNvPicPr>
+          <p:nvPr/>
+        </p:nvPicPr>
+        <p:blipFill>
+          <a:blip r:embed="rId2"/>
+          <a:stretch>
+            <a:fillRect/>
+          </a:stretch>
+        </p:blipFill>
+        <p:spPr>
+          <a:xfrm>
+            <a:off x="1123552" y="1782810"/>
+            <a:ext cx="6895771" cy="3087141"/>
+          </a:xfrm>
+          <a:prstGeom prst="rect">
+            <a:avLst/>
+          </a:prstGeom>
+        </p:spPr>
+      </p:pic>
+    </p:spTree>
+    <p:extLst>
+      <p:ext uri="{BB962C8B-B14F-4D97-AF65-F5344CB8AC3E}">
+        <p14:creationId xmlns:p14="http://schemas.microsoft.com/office/powerpoint/2010/main" val="1147239845"/>
+      </p:ext>
+    </p:extLst>
+  </p:cSld>
+  <p:clrMapOvr>
+    <a:masterClrMapping/>
+  </p:clrMapOvr>
+</p:sld>
+</file>
+
+<file path=ppt/slides/slide11.xml><?xml version="1.0" encoding="utf-8"?>
+<p:sld xmlns:a="http://schemas.openxmlformats.org/drawingml/2006/main" xmlns:r="http://schemas.openxmlformats.org/officeDocument/2006/relationships" xmlns:p="http://schemas.openxmlformats.org/presentationml/2006/main">
+  <p:cSld>
+    <p:spTree>
+      <p:nvGrpSpPr>
+        <p:cNvPr id="1" name="">
+          <a:extLst>
+            <a:ext uri="{FF2B5EF4-FFF2-40B4-BE49-F238E27FC236}">
+              <a16:creationId xmlns:a16="http://schemas.microsoft.com/office/drawing/2014/main" id="{5A617724-78B4-A8E4-3695-F2AF2FEECF56}"/>
+            </a:ext>
+          </a:extLst>
+        </p:cNvPr>
+        <p:cNvGrpSpPr/>
+        <p:nvPr/>
+      </p:nvGrpSpPr>
+      <p:grpSpPr>
+        <a:xfrm>
+          <a:off x="0" y="0"/>
+          <a:ext cx="0" cy="0"/>
+          <a:chOff x="0" y="0"/>
+          <a:chExt cx="0" cy="0"/>
+        </a:xfrm>
+      </p:grpSpPr>
+      <p:sp>
+        <p:nvSpPr>
+          <p:cNvPr id="7" name="Rectangle 6">
+            <a:extLst>
+              <a:ext uri="{FF2B5EF4-FFF2-40B4-BE49-F238E27FC236}">
+                <a16:creationId xmlns:a16="http://schemas.microsoft.com/office/drawing/2014/main" id="{B780DDCC-6CE0-E6FE-326F-2B24A5E9A631}"/>
+              </a:ext>
+            </a:extLst>
+          </p:cNvPr>
+          <p:cNvSpPr/>
+          <p:nvPr/>
+        </p:nvSpPr>
+        <p:spPr>
+          <a:xfrm>
+            <a:off x="9226193" y="3383207"/>
+            <a:ext cx="2529425" cy="3474793"/>
+          </a:xfrm>
+          <a:prstGeom prst="rect">
+            <a:avLst/>
+          </a:prstGeom>
+          <a:solidFill>
+            <a:srgbClr val="FDFAF6"/>
+          </a:solidFill>
+          <a:ln>
+            <a:noFill/>
+          </a:ln>
+        </p:spPr>
+        <p:style>
+          <a:lnRef idx="2">
+            <a:schemeClr val="accent1">
+              <a:shade val="15000"/>
+            </a:schemeClr>
+          </a:lnRef>
+          <a:fillRef idx="1">
+            <a:schemeClr val="accent1"/>
+          </a:fillRef>
+          <a:effectRef idx="0">
+            <a:schemeClr val="accent1"/>
+          </a:effectRef>
+          <a:fontRef idx="minor">
+            <a:schemeClr val="lt1"/>
+          </a:fontRef>
+        </p:style>
+        <p:txBody>
+          <a:bodyPr rtlCol="0" anchor="ctr"/>
+          <a:lstStyle/>
+          <a:p>
+            <a:pPr algn="ctr"/>
+            <a:endParaRPr lang="fr-FR" dirty="0"/>
+          </a:p>
+        </p:txBody>
+      </p:sp>
+      <p:sp>
+        <p:nvSpPr>
+          <p:cNvPr id="8" name="Titre 1">
+            <a:extLst>
+              <a:ext uri="{FF2B5EF4-FFF2-40B4-BE49-F238E27FC236}">
+                <a16:creationId xmlns:a16="http://schemas.microsoft.com/office/drawing/2014/main" id="{91E46C50-1B0E-D0D8-CCCF-D341BCF0E3D1}"/>
+              </a:ext>
+            </a:extLst>
+          </p:cNvPr>
+          <p:cNvSpPr>
+            <a:spLocks noGrp="1"/>
+          </p:cNvSpPr>
+          <p:nvPr>
+            <p:ph type="title"/>
+          </p:nvPr>
+        </p:nvSpPr>
+        <p:spPr>
+          <a:xfrm>
+            <a:off x="840187" y="689619"/>
+            <a:ext cx="10511627" cy="646331"/>
+          </a:xfrm>
+        </p:spPr>
+        <p:txBody>
+          <a:bodyPr rtlCol="0"/>
+          <a:lstStyle>
+            <a:defPPr>
+              <a:defRPr lang="fr-FR"/>
+            </a:defPPr>
+          </a:lstStyle>
+          <a:p>
+            <a:pPr algn="ctr" rtl="0"/>
+            <a:r>
+              <a:rPr lang="fr-FR" dirty="0"/>
+              <a:t>Expérience 2 : étalement</a:t>
+            </a:r>
+            <a:br>
+              <a:rPr lang="fr-FR" dirty="0"/>
+            </a:br>
+            <a:r>
+              <a:rPr lang="fr-FR" sz="2400" dirty="0"/>
+              <a:t>de la colle</a:t>
+            </a:r>
+            <a:endParaRPr lang="fr-FR" dirty="0"/>
+          </a:p>
+        </p:txBody>
+      </p:sp>
+      <p:sp>
+        <p:nvSpPr>
+          <p:cNvPr id="13" name="Espace réservé du texte 2">
+            <a:extLst>
+              <a:ext uri="{FF2B5EF4-FFF2-40B4-BE49-F238E27FC236}">
+                <a16:creationId xmlns:a16="http://schemas.microsoft.com/office/drawing/2014/main" id="{A5A29F8C-31DF-EA59-63B0-222CE6131400}"/>
+              </a:ext>
+            </a:extLst>
+          </p:cNvPr>
+          <p:cNvSpPr txBox="1">
+            <a:spLocks/>
+          </p:cNvSpPr>
+          <p:nvPr/>
+        </p:nvSpPr>
+        <p:spPr>
+          <a:xfrm>
+            <a:off x="8756763" y="1782811"/>
+            <a:ext cx="2815119" cy="3950169"/>
+          </a:xfrm>
+          <a:prstGeom prst="rect">
+            <a:avLst/>
+          </a:prstGeom>
+        </p:spPr>
+        <p:txBody>
+          <a:bodyPr vert="horz" lIns="91440" tIns="0" rIns="91440" bIns="0" rtlCol="0">
+            <a:normAutofit/>
+          </a:bodyPr>
+          <a:lstStyle>
+            <a:defPPr>
+              <a:defRPr lang="fr-FR"/>
+            </a:defPPr>
+            <a:lvl1pPr marL="0" indent="0" algn="l" defTabSz="914400" rtl="0" eaLnBrk="1" latinLnBrk="0" hangingPunct="1">
+              <a:lnSpc>
+                <a:spcPct val="100000"/>
+              </a:lnSpc>
+              <a:spcBef>
+                <a:spcPts val="0"/>
+              </a:spcBef>
+              <a:buFont typeface="Arial" panose="020B0604020202020204" pitchFamily="34" charset="0"/>
+              <a:buNone/>
+              <a:defRPr lang="fr-FR" sz="2400" kern="1200">
+                <a:solidFill>
+                  <a:schemeClr val="accent6"/>
+                </a:solidFill>
+                <a:latin typeface="+mn-lt"/>
+                <a:ea typeface="+mn-ea"/>
+                <a:cs typeface="+mn-cs"/>
+              </a:defRPr>
+            </a:lvl1pPr>
+            <a:lvl2pPr marL="347472" indent="-347472" algn="l" defTabSz="914400" rtl="0" eaLnBrk="1" latinLnBrk="0" hangingPunct="1">
+              <a:lnSpc>
+                <a:spcPct val="100000"/>
+              </a:lnSpc>
+              <a:spcBef>
+                <a:spcPts val="0"/>
+              </a:spcBef>
+              <a:buFont typeface="Arial" panose="020B0604020202020204" pitchFamily="34" charset="0"/>
+              <a:buChar char="•"/>
+              <a:defRPr lang="fr-FR" sz="2400" kern="1200">
+                <a:solidFill>
+                  <a:schemeClr val="accent6"/>
+                </a:solidFill>
+                <a:latin typeface="+mn-lt"/>
+                <a:ea typeface="+mn-ea"/>
+                <a:cs typeface="+mn-cs"/>
+              </a:defRPr>
+            </a:lvl2pPr>
+            <a:lvl3pPr marL="685800" indent="-347472" algn="l" defTabSz="914400" rtl="0" eaLnBrk="1" latinLnBrk="0" hangingPunct="1">
+              <a:lnSpc>
+                <a:spcPct val="100000"/>
+              </a:lnSpc>
+              <a:spcBef>
+                <a:spcPts val="0"/>
+              </a:spcBef>
+              <a:buFont typeface="Arial" panose="020B0604020202020204" pitchFamily="34" charset="0"/>
+              <a:buChar char="•"/>
+              <a:defRPr lang="fr-FR" sz="2400" kern="1200">
+                <a:solidFill>
+                  <a:schemeClr val="accent6"/>
+                </a:solidFill>
+                <a:latin typeface="+mn-lt"/>
+                <a:ea typeface="+mn-ea"/>
+                <a:cs typeface="+mn-cs"/>
+              </a:defRPr>
+            </a:lvl3pPr>
+            <a:lvl4pPr marL="1600200" indent="-347472" algn="l" defTabSz="914400" rtl="0" eaLnBrk="1" latinLnBrk="0" hangingPunct="1">
+              <a:lnSpc>
+                <a:spcPct val="100000"/>
+              </a:lnSpc>
+              <a:spcBef>
+                <a:spcPts val="360"/>
+              </a:spcBef>
+              <a:buFont typeface="Arial" panose="020B0604020202020204" pitchFamily="34" charset="0"/>
+              <a:buChar char="•"/>
+              <a:defRPr lang="fr-FR" sz="1800" kern="1200">
+                <a:solidFill>
+                  <a:schemeClr val="accent6"/>
+                </a:solidFill>
+                <a:latin typeface="+mn-lt"/>
+                <a:ea typeface="+mn-ea"/>
+                <a:cs typeface="+mn-cs"/>
+              </a:defRPr>
+            </a:lvl4pPr>
+            <a:lvl5pPr marL="2057400" indent="-347472" algn="l" defTabSz="914400" rtl="0" eaLnBrk="1" latinLnBrk="0" hangingPunct="1">
+              <a:lnSpc>
+                <a:spcPct val="100000"/>
+              </a:lnSpc>
+              <a:spcBef>
+                <a:spcPts val="360"/>
+              </a:spcBef>
+              <a:buFont typeface="Arial" panose="020B0604020202020204" pitchFamily="34" charset="0"/>
+              <a:buChar char="•"/>
+              <a:defRPr lang="fr-FR" sz="1800" kern="1200">
+                <a:solidFill>
+                  <a:schemeClr val="accent6"/>
+                </a:solidFill>
+                <a:latin typeface="+mn-lt"/>
+                <a:ea typeface="+mn-ea"/>
+                <a:cs typeface="+mn-cs"/>
+              </a:defRPr>
+            </a:lvl5pPr>
+            <a:lvl6pPr marL="2514600" indent="-228600" algn="l" defTabSz="914400" rtl="0" eaLnBrk="1" latinLnBrk="0" hangingPunct="1">
+              <a:lnSpc>
+                <a:spcPct val="90000"/>
+              </a:lnSpc>
+              <a:spcBef>
+                <a:spcPts val="500"/>
+              </a:spcBef>
+              <a:buFont typeface="Arial" panose="020B0604020202020204" pitchFamily="34" charset="0"/>
+              <a:buChar char="•"/>
+              <a:defRPr lang="fr-FR" sz="1800" kern="1200">
+                <a:solidFill>
+                  <a:schemeClr val="tx1"/>
+                </a:solidFill>
+                <a:latin typeface="+mn-lt"/>
+                <a:ea typeface="+mn-ea"/>
+                <a:cs typeface="+mn-cs"/>
+              </a:defRPr>
+            </a:lvl6pPr>
+            <a:lvl7pPr marL="2971800" indent="-228600" algn="l" defTabSz="914400" rtl="0" eaLnBrk="1" latinLnBrk="0" hangingPunct="1">
+              <a:lnSpc>
+                <a:spcPct val="90000"/>
+              </a:lnSpc>
+              <a:spcBef>
+                <a:spcPts val="500"/>
+              </a:spcBef>
+              <a:buFont typeface="Arial" panose="020B0604020202020204" pitchFamily="34" charset="0"/>
+              <a:buChar char="•"/>
+              <a:defRPr lang="fr-FR" sz="1800" kern="1200">
+                <a:solidFill>
+                  <a:schemeClr val="tx1"/>
+                </a:solidFill>
+                <a:latin typeface="+mn-lt"/>
+                <a:ea typeface="+mn-ea"/>
+                <a:cs typeface="+mn-cs"/>
+              </a:defRPr>
+            </a:lvl7pPr>
+            <a:lvl8pPr marL="3429000" indent="-228600" algn="l" defTabSz="914400" rtl="0" eaLnBrk="1" latinLnBrk="0" hangingPunct="1">
+              <a:lnSpc>
+                <a:spcPct val="90000"/>
+              </a:lnSpc>
+              <a:spcBef>
+                <a:spcPts val="500"/>
+              </a:spcBef>
+              <a:buFont typeface="Arial" panose="020B0604020202020204" pitchFamily="34" charset="0"/>
+              <a:buChar char="•"/>
+              <a:defRPr lang="fr-FR" sz="1800" kern="1200">
+                <a:solidFill>
+                  <a:schemeClr val="tx1"/>
+                </a:solidFill>
+                <a:latin typeface="+mn-lt"/>
+                <a:ea typeface="+mn-ea"/>
+                <a:cs typeface="+mn-cs"/>
+              </a:defRPr>
+            </a:lvl8pPr>
+            <a:lvl9pPr marL="3886200" indent="-228600" algn="l" defTabSz="914400" rtl="0" eaLnBrk="1" latinLnBrk="0" hangingPunct="1">
+              <a:lnSpc>
+                <a:spcPct val="90000"/>
+              </a:lnSpc>
+              <a:spcBef>
+                <a:spcPts val="500"/>
+              </a:spcBef>
+              <a:buFont typeface="Arial" panose="020B0604020202020204" pitchFamily="34" charset="0"/>
+              <a:buChar char="•"/>
+              <a:defRPr lang="fr-FR" sz="1800" kern="1200">
+                <a:solidFill>
+                  <a:schemeClr val="tx1"/>
+                </a:solidFill>
+                <a:latin typeface="+mn-lt"/>
+                <a:ea typeface="+mn-ea"/>
+                <a:cs typeface="+mn-cs"/>
+              </a:defRPr>
+            </a:lvl9pPr>
+          </a:lstStyle>
+          <a:p>
+            <a:r>
+              <a:rPr lang="fr-FR" sz="2000" dirty="0"/>
+              <a:t>Masse de la goutte compressée : </a:t>
+            </a:r>
+          </a:p>
+          <a:p>
+            <a:pPr marL="690372" lvl="1" indent="-342900">
+              <a:buFont typeface="Wingdings" panose="05000000000000000000" pitchFamily="2" charset="2"/>
+              <a:buChar char="§"/>
+            </a:pPr>
+            <a:r>
+              <a:rPr lang="fr-FR" sz="2000" dirty="0"/>
+              <a:t>95 mg</a:t>
+            </a:r>
+          </a:p>
+          <a:p>
+            <a:pPr marL="690372" lvl="1" indent="-342900">
+              <a:buFont typeface="Wingdings" panose="05000000000000000000" pitchFamily="2" charset="2"/>
+              <a:buChar char="§"/>
+            </a:pPr>
+            <a:r>
+              <a:rPr lang="fr-FR" sz="2000" dirty="0"/>
+              <a:t>55 mg</a:t>
+            </a:r>
+          </a:p>
+          <a:p>
+            <a:endParaRPr lang="fr-FR" sz="2000" dirty="0"/>
+          </a:p>
+          <a:p>
+            <a:r>
+              <a:rPr lang="fr-FR" sz="2000" dirty="0"/>
+              <a:t>Masse de compression :</a:t>
+            </a:r>
+          </a:p>
+          <a:p>
+            <a:pPr marL="690372" lvl="1" indent="-342900">
+              <a:buFont typeface="Wingdings" panose="05000000000000000000" pitchFamily="2" charset="2"/>
+              <a:buChar char="§"/>
+            </a:pPr>
+            <a:r>
+              <a:rPr lang="fr-FR" sz="2000" dirty="0"/>
+              <a:t>20 g</a:t>
+            </a:r>
+          </a:p>
+          <a:p>
+            <a:pPr marL="690372" lvl="1" indent="-342900">
+              <a:buFont typeface="Wingdings" panose="05000000000000000000" pitchFamily="2" charset="2"/>
+              <a:buChar char="§"/>
+            </a:pPr>
+            <a:r>
+              <a:rPr lang="fr-FR" sz="2000" dirty="0"/>
+              <a:t>40 g</a:t>
+            </a:r>
+          </a:p>
+          <a:p>
+            <a:pPr marL="690372" lvl="1" indent="-342900">
+              <a:buFont typeface="Wingdings" panose="05000000000000000000" pitchFamily="2" charset="2"/>
+              <a:buChar char="§"/>
+            </a:pPr>
+            <a:r>
+              <a:rPr lang="fr-FR" sz="2000" dirty="0"/>
+              <a:t>50 g</a:t>
+            </a:r>
+          </a:p>
+          <a:p>
+            <a:pPr marL="690372" lvl="1" indent="-342900">
+              <a:buFont typeface="Wingdings" panose="05000000000000000000" pitchFamily="2" charset="2"/>
+              <a:buChar char="§"/>
+            </a:pPr>
+            <a:r>
+              <a:rPr lang="fr-FR" sz="2000" dirty="0"/>
+              <a:t>100 g</a:t>
+            </a:r>
+          </a:p>
+          <a:p>
+            <a:pPr marL="690372" lvl="1" indent="-342900">
+              <a:buFont typeface="Wingdings" panose="05000000000000000000" pitchFamily="2" charset="2"/>
+              <a:buChar char="§"/>
+            </a:pPr>
+            <a:r>
+              <a:rPr lang="fr-FR" sz="2000" dirty="0"/>
+              <a:t>200 g</a:t>
+            </a:r>
+          </a:p>
+          <a:p>
+            <a:endParaRPr lang="fr-FR" sz="2000" dirty="0"/>
+          </a:p>
+          <a:p>
+            <a:endParaRPr lang="fr-FR" sz="2000" dirty="0"/>
+          </a:p>
+        </p:txBody>
+      </p:sp>
+      <p:pic>
+        <p:nvPicPr>
+          <p:cNvPr id="3" name="Image 2">
+            <a:extLst>
+              <a:ext uri="{FF2B5EF4-FFF2-40B4-BE49-F238E27FC236}">
+                <a16:creationId xmlns:a16="http://schemas.microsoft.com/office/drawing/2014/main" id="{307624CE-9F1C-E56F-73F5-8BC10DE830FD}"/>
+              </a:ext>
+            </a:extLst>
+          </p:cNvPr>
+          <p:cNvPicPr>
+            <a:picLocks noChangeAspect="1"/>
+          </p:cNvPicPr>
+          <p:nvPr/>
+        </p:nvPicPr>
+        <p:blipFill>
+          <a:blip r:embed="rId2"/>
+          <a:stretch>
+            <a:fillRect/>
+          </a:stretch>
+        </p:blipFill>
+        <p:spPr>
+          <a:xfrm>
+            <a:off x="673245" y="1783089"/>
+            <a:ext cx="7899782" cy="3949891"/>
+          </a:xfrm>
+          <a:prstGeom prst="rect">
+            <a:avLst/>
+          </a:prstGeom>
+        </p:spPr>
+      </p:pic>
+    </p:spTree>
+    <p:extLst>
+      <p:ext uri="{BB962C8B-B14F-4D97-AF65-F5344CB8AC3E}">
+        <p14:creationId xmlns:p14="http://schemas.microsoft.com/office/powerpoint/2010/main" val="4281024515"/>
       </p:ext>
     </p:extLst>
   </p:cSld>
@@ -21574,49 +22478,14 @@
             <a:pPr algn="ctr"/>
             <a:r>
               <a:rPr lang="fr-FR" sz="2000" dirty="0"/>
-              <a:t>Rayon et hauteur du cylindre de fluide au cours de la compression sous une masse de 100g.</a:t>
+              <a:t>Rayon et hauteur du cylindre de fluide au cours d’une compression</a:t>
             </a:r>
             <a:endParaRPr lang="ar-AE" sz="2000" dirty="0"/>
           </a:p>
         </p:txBody>
       </p:sp>
-      <p:pic>
-        <p:nvPicPr>
-          <p:cNvPr id="6" name="Image 5">
-            <a:extLst>
-              <a:ext uri="{FF2B5EF4-FFF2-40B4-BE49-F238E27FC236}">
-                <a16:creationId xmlns:a16="http://schemas.microsoft.com/office/drawing/2014/main" id="{6AD15995-69B0-6746-6AF8-2BFBBB94EDF2}"/>
-              </a:ext>
-            </a:extLst>
-          </p:cNvPr>
-          <p:cNvPicPr>
-            <a:picLocks noChangeAspect="1"/>
-          </p:cNvPicPr>
-          <p:nvPr/>
-        </p:nvPicPr>
-        <p:blipFill>
-          <a:blip r:embed="rId3"/>
-          <a:stretch>
-            <a:fillRect/>
-          </a:stretch>
-        </p:blipFill>
-        <p:spPr>
-          <a:xfrm>
-            <a:off x="4111193" y="1409823"/>
-            <a:ext cx="6541536" cy="4115027"/>
-          </a:xfrm>
-          <a:prstGeom prst="rect">
-            <a:avLst/>
-          </a:prstGeom>
-          <a:ln w="57150">
-            <a:solidFill>
-              <a:srgbClr val="F5CDCE"/>
-            </a:solidFill>
-          </a:ln>
-        </p:spPr>
-      </p:pic>
-      <mc:AlternateContent xmlns:mc="http://schemas.openxmlformats.org/markup-compatibility/2006" xmlns:a14="http://schemas.microsoft.com/office/drawing/2010/main">
-        <mc:Choice Requires="a14">
+      <mc:AlternateContent xmlns:mc="http://schemas.openxmlformats.org/markup-compatibility/2006">
+        <mc:Choice xmlns:a14="http://schemas.microsoft.com/office/drawing/2010/main" Requires="a14">
           <p:sp>
             <p:nvSpPr>
               <p:cNvPr id="7" name="Espace réservé du texte 2">
@@ -21633,7 +22502,7 @@
             </p:nvSpPr>
             <p:spPr>
               <a:xfrm>
-                <a:off x="1098570" y="1538630"/>
+                <a:off x="667294" y="1538630"/>
                 <a:ext cx="2704399" cy="4944362"/>
               </a:xfrm>
               <a:prstGeom prst="rect">
@@ -21826,73 +22695,7 @@
                       <m:sSub>
                         <m:sSubPr>
                           <m:ctrlPr>
-                            <a:rPr lang="fr-FR" sz="2000" b="0" i="1" smtClean="0">
-                              <a:latin typeface="Cambria Math" panose="02040503050406030204" pitchFamily="18" charset="0"/>
-                            </a:rPr>
-                          </m:ctrlPr>
-                        </m:sSubPr>
-                        <m:e>
-                          <m:r>
-                            <a:rPr lang="fr-FR" sz="2000" b="0" i="1" smtClean="0">
-                              <a:latin typeface="Cambria Math" panose="02040503050406030204" pitchFamily="18" charset="0"/>
-                            </a:rPr>
-                            <m:t>h</m:t>
-                          </m:r>
-                        </m:e>
-                        <m:sub>
-                          <m:r>
-                            <a:rPr lang="fr-FR" sz="2000" b="0" i="1" smtClean="0">
-                              <a:latin typeface="Cambria Math" panose="02040503050406030204" pitchFamily="18" charset="0"/>
-                            </a:rPr>
-                            <m:t>0</m:t>
-                          </m:r>
-                        </m:sub>
-                      </m:sSub>
-                      <m:r>
-                        <a:rPr lang="fr-FR" sz="2000" b="0" i="1" smtClean="0">
-                          <a:latin typeface="Cambria Math" panose="02040503050406030204" pitchFamily="18" charset="0"/>
-                        </a:rPr>
-                        <m:t>=</m:t>
-                      </m:r>
-                      <m:r>
-                        <a:rPr lang="fr-FR" sz="2000" b="0" i="1" smtClean="0">
-                          <a:latin typeface="Cambria Math" panose="02040503050406030204" pitchFamily="18" charset="0"/>
-                        </a:rPr>
-                        <m:t>5</m:t>
-                      </m:r>
-                      <m:r>
-                        <a:rPr lang="fr-FR" sz="2000" b="0" i="1" smtClean="0">
-                          <a:latin typeface="Cambria Math" panose="02040503050406030204" pitchFamily="18" charset="0"/>
-                        </a:rPr>
-                        <m:t> </m:t>
-                      </m:r>
-                      <m:r>
-                        <a:rPr lang="fr-FR" sz="2000" b="0" i="1" smtClean="0">
-                          <a:latin typeface="Cambria Math" panose="02040503050406030204" pitchFamily="18" charset="0"/>
-                        </a:rPr>
-                        <m:t>𝑚𝑚</m:t>
-                      </m:r>
-                    </m:oMath>
-                  </m:oMathPara>
-                </a14:m>
-                <a:endParaRPr lang="fr-FR" sz="2000" b="0" dirty="0"/>
-              </a:p>
-              <a:p>
-                <a:pPr>
-                  <a:lnSpc>
-                    <a:spcPct val="150000"/>
-                  </a:lnSpc>
-                </a:pPr>
-                <a14:m>
-                  <m:oMathPara xmlns:m="http://schemas.openxmlformats.org/officeDocument/2006/math">
-                    <m:oMathParaPr>
-                      <m:jc m:val="centerGroup"/>
-                    </m:oMathParaPr>
-                    <m:oMath xmlns:m="http://schemas.openxmlformats.org/officeDocument/2006/math">
-                      <m:sSub>
-                        <m:sSubPr>
-                          <m:ctrlPr>
-                            <a:rPr lang="fr-FR" sz="2000" i="1">
+                            <a:rPr lang="fr-FR" sz="2000" i="1" smtClean="0">
                               <a:latin typeface="Cambria Math" panose="02040503050406030204" pitchFamily="18" charset="0"/>
                             </a:rPr>
                           </m:ctrlPr>
@@ -21921,18 +22724,6 @@
                         <m:t>=</m:t>
                       </m:r>
                       <m:r>
-                        <a:rPr lang="fr-FR" sz="2000" b="0" i="1" smtClean="0">
-                          <a:latin typeface="Cambria Math" panose="02040503050406030204" pitchFamily="18" charset="0"/>
-                        </a:rPr>
-                        <m:t>2</m:t>
-                      </m:r>
-                      <m:r>
-                        <a:rPr lang="fr-FR" sz="2000" b="0" i="1" smtClean="0">
-                          <a:latin typeface="Cambria Math" panose="02040503050406030204" pitchFamily="18" charset="0"/>
-                        </a:rPr>
-                        <m:t>,</m:t>
-                      </m:r>
-                      <m:r>
                         <a:rPr lang="fr-FR" sz="2000" i="1">
                           <a:latin typeface="Cambria Math" panose="02040503050406030204" pitchFamily="18" charset="0"/>
                         </a:rPr>
@@ -21949,6 +22740,72 @@
                           <a:latin typeface="Cambria Math" panose="02040503050406030204" pitchFamily="18" charset="0"/>
                         </a:rPr>
                         <m:t>𝑚𝑚</m:t>
+                      </m:r>
+                    </m:oMath>
+                  </m:oMathPara>
+                </a14:m>
+                <a:endParaRPr lang="fr-FR" sz="2000" dirty="0"/>
+              </a:p>
+              <a:p>
+                <a:pPr>
+                  <a:lnSpc>
+                    <a:spcPct val="150000"/>
+                  </a:lnSpc>
+                </a:pPr>
+                <a14:m>
+                  <m:oMathPara xmlns:m="http://schemas.openxmlformats.org/officeDocument/2006/math">
+                    <m:oMathParaPr>
+                      <m:jc m:val="centerGroup"/>
+                    </m:oMathParaPr>
+                    <m:oMath xmlns:m="http://schemas.openxmlformats.org/officeDocument/2006/math">
+                      <m:sSub>
+                        <m:sSubPr>
+                          <m:ctrlPr>
+                            <a:rPr lang="fr-FR" sz="2000" b="0" i="1" smtClean="0">
+                              <a:latin typeface="Cambria Math" panose="02040503050406030204" pitchFamily="18" charset="0"/>
+                            </a:rPr>
+                          </m:ctrlPr>
+                        </m:sSubPr>
+                        <m:e>
+                          <m:r>
+                            <a:rPr lang="fr-FR" sz="2000" b="0" i="1" smtClean="0">
+                              <a:latin typeface="Cambria Math" panose="02040503050406030204" pitchFamily="18" charset="0"/>
+                            </a:rPr>
+                            <m:t>𝑚</m:t>
+                          </m:r>
+                        </m:e>
+                        <m:sub>
+                          <m:r>
+                            <a:rPr lang="fr-FR" sz="2000" b="0" i="1" smtClean="0">
+                              <a:latin typeface="Cambria Math" panose="02040503050406030204" pitchFamily="18" charset="0"/>
+                            </a:rPr>
+                            <m:t>𝑔𝑜𝑢𝑡𝑡𝑒</m:t>
+                          </m:r>
+                        </m:sub>
+                      </m:sSub>
+                      <m:r>
+                        <a:rPr lang="fr-FR" sz="2000" b="0" i="1" smtClean="0">
+                          <a:latin typeface="Cambria Math" panose="02040503050406030204" pitchFamily="18" charset="0"/>
+                        </a:rPr>
+                        <m:t>=</m:t>
+                      </m:r>
+                      <m:r>
+                        <a:rPr lang="fr-FR" sz="2000" b="0" i="1" smtClean="0">
+                          <a:latin typeface="Cambria Math" panose="02040503050406030204" pitchFamily="18" charset="0"/>
+                        </a:rPr>
+                        <m:t>95</m:t>
+                      </m:r>
+                      <m:r>
+                        <a:rPr lang="fr-FR" sz="2000" b="0" i="1" smtClean="0">
+                          <a:latin typeface="Cambria Math" panose="02040503050406030204" pitchFamily="18" charset="0"/>
+                        </a:rPr>
+                        <m:t> </m:t>
+                      </m:r>
+                      <m:r>
+                        <a:rPr lang="fr-FR" sz="2000" b="0" i="1" smtClean="0">
+                          <a:latin typeface="Cambria Math" panose="02040503050406030204" pitchFamily="18" charset="0"/>
+                        </a:rPr>
+                        <m:t>𝑚𝑔</m:t>
                       </m:r>
                     </m:oMath>
                   </m:oMathPara>
@@ -22422,7 +23279,7 @@
             </p:txBody>
           </p:sp>
         </mc:Choice>
-        <mc:Fallback xmlns="">
+        <mc:Fallback>
           <p:sp>
             <p:nvSpPr>
               <p:cNvPr id="7" name="Espace réservé du texte 2">
@@ -22439,14 +23296,14 @@
             </p:nvSpPr>
             <p:spPr>
               <a:xfrm>
-                <a:off x="1098570" y="1538630"/>
+                <a:off x="667294" y="1538630"/>
                 <a:ext cx="2704399" cy="4944362"/>
               </a:xfrm>
               <a:prstGeom prst="rect">
                 <a:avLst/>
               </a:prstGeom>
               <a:blipFill>
-                <a:blip r:embed="rId4"/>
+                <a:blip r:embed="rId3"/>
                 <a:stretch>
                   <a:fillRect/>
                 </a:stretch>
@@ -22467,6 +23324,66 @@
           </p:sp>
         </mc:Fallback>
       </mc:AlternateContent>
+      <p:pic>
+        <p:nvPicPr>
+          <p:cNvPr id="4" name="Image 3">
+            <a:extLst>
+              <a:ext uri="{FF2B5EF4-FFF2-40B4-BE49-F238E27FC236}">
+                <a16:creationId xmlns:a16="http://schemas.microsoft.com/office/drawing/2014/main" id="{2DE26D45-60F5-DF62-D05C-A2CAE565F352}"/>
+              </a:ext>
+            </a:extLst>
+          </p:cNvPr>
+          <p:cNvPicPr>
+            <a:picLocks noChangeAspect="1"/>
+          </p:cNvPicPr>
+          <p:nvPr/>
+        </p:nvPicPr>
+        <p:blipFill>
+          <a:blip r:embed="rId4"/>
+          <a:stretch>
+            <a:fillRect/>
+          </a:stretch>
+        </p:blipFill>
+        <p:spPr>
+          <a:xfrm>
+            <a:off x="3302619" y="1532385"/>
+            <a:ext cx="8158682" cy="4265433"/>
+          </a:xfrm>
+          <a:prstGeom prst="rect">
+            <a:avLst/>
+          </a:prstGeom>
+        </p:spPr>
+      </p:pic>
+      <p:pic>
+        <p:nvPicPr>
+          <p:cNvPr id="8" name="Image 7">
+            <a:extLst>
+              <a:ext uri="{FF2B5EF4-FFF2-40B4-BE49-F238E27FC236}">
+                <a16:creationId xmlns:a16="http://schemas.microsoft.com/office/drawing/2014/main" id="{E16185B9-D77F-9293-389D-FBE43B8D5A15}"/>
+              </a:ext>
+            </a:extLst>
+          </p:cNvPr>
+          <p:cNvPicPr>
+            <a:picLocks noChangeAspect="1"/>
+          </p:cNvPicPr>
+          <p:nvPr/>
+        </p:nvPicPr>
+        <p:blipFill>
+          <a:blip r:embed="rId5"/>
+          <a:stretch>
+            <a:fillRect/>
+          </a:stretch>
+        </p:blipFill>
+        <p:spPr>
+          <a:xfrm>
+            <a:off x="5862539" y="1060182"/>
+            <a:ext cx="5434378" cy="2810084"/>
+          </a:xfrm>
+          <a:prstGeom prst="rect">
+            <a:avLst/>
+          </a:prstGeom>
+        </p:spPr>
+      </p:pic>
     </p:spTree>
     <p:extLst>
       <p:ext uri="{BB962C8B-B14F-4D97-AF65-F5344CB8AC3E}">
@@ -22485,7 +23402,13 @@
   <p:cSld>
     <p:spTree>
       <p:nvGrpSpPr>
-        <p:cNvPr id="1" name=""/>
+        <p:cNvPr id="1" name="">
+          <a:extLst>
+            <a:ext uri="{FF2B5EF4-FFF2-40B4-BE49-F238E27FC236}">
+              <a16:creationId xmlns:a16="http://schemas.microsoft.com/office/drawing/2014/main" id="{E01061B0-6A26-0613-D24F-68962A5E9DA2}"/>
+            </a:ext>
+          </a:extLst>
+        </p:cNvPr>
         <p:cNvGrpSpPr/>
         <p:nvPr/>
       </p:nvGrpSpPr>
@@ -22497,113 +23420,14 @@
           <a:chExt cx="0" cy="0"/>
         </a:xfrm>
       </p:grpSpPr>
-      <p:pic>
-        <p:nvPicPr>
-          <p:cNvPr id="7" name="Image 6">
-            <a:extLst>
-              <a:ext uri="{FF2B5EF4-FFF2-40B4-BE49-F238E27FC236}">
-                <a16:creationId xmlns:a16="http://schemas.microsoft.com/office/drawing/2014/main" id="{98BE0CC3-4269-6CEB-0DB1-2542A6166A88}"/>
-              </a:ext>
-            </a:extLst>
-          </p:cNvPr>
-          <p:cNvPicPr>
-            <a:picLocks noChangeAspect="1"/>
-          </p:cNvPicPr>
-          <p:nvPr/>
-        </p:nvPicPr>
-        <p:blipFill>
-          <a:blip r:embed="rId2"/>
-          <a:stretch>
-            <a:fillRect/>
-          </a:stretch>
-        </p:blipFill>
-        <p:spPr>
-          <a:xfrm>
-            <a:off x="133563" y="1094975"/>
-            <a:ext cx="6200074" cy="3706159"/>
-          </a:xfrm>
-          <a:prstGeom prst="rect">
-            <a:avLst/>
-          </a:prstGeom>
-        </p:spPr>
-      </p:pic>
-      <p:sp>
-        <p:nvSpPr>
-          <p:cNvPr id="12" name="Titre 1">
-            <a:extLst>
-              <a:ext uri="{FF2B5EF4-FFF2-40B4-BE49-F238E27FC236}">
-                <a16:creationId xmlns:a16="http://schemas.microsoft.com/office/drawing/2014/main" id="{519FC911-B328-A0E9-F524-9E4307FC2AEB}"/>
-              </a:ext>
-            </a:extLst>
-          </p:cNvPr>
-          <p:cNvSpPr>
-            <a:spLocks noGrp="1"/>
-          </p:cNvSpPr>
-          <p:nvPr>
-            <p:ph type="title"/>
-          </p:nvPr>
-        </p:nvSpPr>
-        <p:spPr>
-          <a:xfrm>
-            <a:off x="840186" y="366454"/>
-            <a:ext cx="10511627" cy="646331"/>
-          </a:xfrm>
-        </p:spPr>
-        <p:txBody>
-          <a:bodyPr rtlCol="0"/>
-          <a:lstStyle>
-            <a:defPPr>
-              <a:defRPr lang="fr-FR"/>
-            </a:defPPr>
-          </a:lstStyle>
-          <a:p>
-            <a:pPr rtl="0"/>
-            <a:r>
-              <a:rPr lang="fr-FR" dirty="0"/>
-              <a:t>Etalement</a:t>
-            </a:r>
-          </a:p>
-        </p:txBody>
-      </p:sp>
-      <p:pic>
-        <p:nvPicPr>
-          <p:cNvPr id="14" name="Image 13">
-            <a:extLst>
-              <a:ext uri="{FF2B5EF4-FFF2-40B4-BE49-F238E27FC236}">
-                <a16:creationId xmlns:a16="http://schemas.microsoft.com/office/drawing/2014/main" id="{7991C441-A0A1-6A58-1F96-7B09A1CA3693}"/>
-              </a:ext>
-            </a:extLst>
-          </p:cNvPr>
-          <p:cNvPicPr>
-            <a:picLocks noChangeAspect="1"/>
-          </p:cNvPicPr>
-          <p:nvPr/>
-        </p:nvPicPr>
-        <p:blipFill>
-          <a:blip r:embed="rId3"/>
-          <a:srcRect l="1458"/>
-          <a:stretch>
-            <a:fillRect/>
-          </a:stretch>
-        </p:blipFill>
-        <p:spPr>
-          <a:xfrm>
-            <a:off x="5948737" y="3289463"/>
-            <a:ext cx="6109700" cy="3434973"/>
-          </a:xfrm>
-          <a:prstGeom prst="rect">
-            <a:avLst/>
-          </a:prstGeom>
-        </p:spPr>
-      </p:pic>
-      <mc:AlternateContent xmlns:mc="http://schemas.openxmlformats.org/markup-compatibility/2006" xmlns:a14="http://schemas.microsoft.com/office/drawing/2010/main">
-        <mc:Choice Requires="a14">
+      <mc:AlternateContent xmlns:mc="http://schemas.openxmlformats.org/markup-compatibility/2006">
+        <mc:Choice xmlns:a14="http://schemas.microsoft.com/office/drawing/2010/main" Requires="a14">
           <p:sp>
             <p:nvSpPr>
-              <p:cNvPr id="15" name="Espace réservé du texte 2">
+              <p:cNvPr id="8" name="Espace réservé du texte 2">
                 <a:extLst>
                   <a:ext uri="{FF2B5EF4-FFF2-40B4-BE49-F238E27FC236}">
-                    <a16:creationId xmlns:a16="http://schemas.microsoft.com/office/drawing/2014/main" id="{C5930DD3-6DA0-4D04-6D55-C0C6853E9299}"/>
+                    <a16:creationId xmlns:a16="http://schemas.microsoft.com/office/drawing/2014/main" id="{0757656F-A5B1-BFAE-98AF-90D55FAFD8F5}"/>
                   </a:ext>
                 </a:extLst>
               </p:cNvPr>
@@ -22614,8 +23438,8 @@
             </p:nvSpPr>
             <p:spPr>
               <a:xfrm>
-                <a:off x="1727289" y="4772726"/>
-                <a:ext cx="2704399" cy="701136"/>
+                <a:off x="971451" y="1939731"/>
+                <a:ext cx="4707860" cy="4512440"/>
               </a:xfrm>
               <a:prstGeom prst="rect">
                 <a:avLst/>
@@ -22794,9 +23618,65 @@
               </a:lstStyle>
               <a:p>
                 <a:pPr>
-                  <a:lnSpc>
-                    <a:spcPct val="150000"/>
-                  </a:lnSpc>
+                  <a:spcAft>
+                    <a:spcPts val="1200"/>
+                  </a:spcAft>
+                </a:pPr>
+                <a:r>
+                  <a:rPr lang="fr-FR" sz="2000" b="1" dirty="0"/>
+                  <a:t>Influence des paramètres rhéologiques :</a:t>
+                </a:r>
+              </a:p>
+              <a:p>
+                <a:pPr marL="342900" indent="-342900">
+                  <a:spcAft>
+                    <a:spcPts val="1200"/>
+                  </a:spcAft>
+                  <a:buFont typeface="Arial" panose="020B0604020202020204" pitchFamily="34" charset="0"/>
+                  <a:buChar char="•"/>
+                </a:pPr>
+                <a14:m>
+                  <m:oMath xmlns:m="http://schemas.openxmlformats.org/officeDocument/2006/math">
+                    <m:sSub>
+                      <m:sSubPr>
+                        <m:ctrlPr>
+                          <a:rPr lang="fr-FR" sz="2000" i="1">
+                            <a:latin typeface="Cambria Math" panose="02040503050406030204" pitchFamily="18" charset="0"/>
+                            <a:ea typeface="Cambria Math" panose="02040503050406030204" pitchFamily="18" charset="0"/>
+                          </a:rPr>
+                        </m:ctrlPr>
+                      </m:sSubPr>
+                      <m:e>
+                        <m:r>
+                          <a:rPr lang="ar-AE" sz="2000" i="1">
+                            <a:latin typeface="Cambria Math" panose="02040503050406030204" pitchFamily="18" charset="0"/>
+                            <a:ea typeface="Cambria Math" panose="02040503050406030204" pitchFamily="18" charset="0"/>
+                          </a:rPr>
+                          <m:t>𝜏</m:t>
+                        </m:r>
+                      </m:e>
+                      <m:sub>
+                        <m:r>
+                          <a:rPr lang="fr-FR" sz="2000" i="1">
+                            <a:latin typeface="Cambria Math" panose="02040503050406030204" pitchFamily="18" charset="0"/>
+                            <a:ea typeface="Cambria Math" panose="02040503050406030204" pitchFamily="18" charset="0"/>
+                          </a:rPr>
+                          <m:t>0</m:t>
+                        </m:r>
+                      </m:sub>
+                    </m:sSub>
+                  </m:oMath>
+                </a14:m>
+                <a:r>
+                  <a:rPr lang="fr-FR" sz="2000" dirty="0"/>
+                  <a:t> impacte la position finale d’étalement (diamètre final) : </a:t>
+                </a:r>
+              </a:p>
+              <a:p>
+                <a:pPr>
+                  <a:spcAft>
+                    <a:spcPts val="1200"/>
+                  </a:spcAft>
                 </a:pPr>
                 <a14:m>
                   <m:oMathPara xmlns:m="http://schemas.openxmlformats.org/officeDocument/2006/math">
@@ -22804,59 +23684,261 @@
                       <m:jc m:val="centerGroup"/>
                     </m:oMathParaPr>
                     <m:oMath xmlns:m="http://schemas.openxmlformats.org/officeDocument/2006/math">
+                      <m:sSub>
+                        <m:sSubPr>
+                          <m:ctrlPr>
+                            <a:rPr lang="fr-FR" sz="2000" i="1" smtClean="0">
+                              <a:latin typeface="Cambria Math" panose="02040503050406030204" pitchFamily="18" charset="0"/>
+                              <a:ea typeface="Cambria Math" panose="02040503050406030204" pitchFamily="18" charset="0"/>
+                            </a:rPr>
+                          </m:ctrlPr>
+                        </m:sSubPr>
+                        <m:e>
+                          <m:r>
+                            <a:rPr lang="ar-AE" sz="2000" i="1">
+                              <a:latin typeface="Cambria Math" panose="02040503050406030204" pitchFamily="18" charset="0"/>
+                              <a:ea typeface="Cambria Math" panose="02040503050406030204" pitchFamily="18" charset="0"/>
+                            </a:rPr>
+                            <m:t>𝜏</m:t>
+                          </m:r>
+                        </m:e>
+                        <m:sub>
+                          <m:r>
+                            <a:rPr lang="fr-FR" sz="2000" i="1">
+                              <a:latin typeface="Cambria Math" panose="02040503050406030204" pitchFamily="18" charset="0"/>
+                              <a:ea typeface="Cambria Math" panose="02040503050406030204" pitchFamily="18" charset="0"/>
+                            </a:rPr>
+                            <m:t>0</m:t>
+                          </m:r>
+                        </m:sub>
+                      </m:sSub>
                       <m:r>
-                        <a:rPr lang="fr-FR" b="1" i="1" smtClean="0">
+                        <a:rPr lang="fr-FR" sz="2000" b="0" i="1" smtClean="0">
                           <a:latin typeface="Cambria Math" panose="02040503050406030204" pitchFamily="18" charset="0"/>
+                          <a:ea typeface="Cambria Math" panose="02040503050406030204" pitchFamily="18" charset="0"/>
                         </a:rPr>
-                        <m:t>𝑮</m:t>
+                        <m:t>↗  ⇒ </m:t>
                       </m:r>
+                      <m:sSub>
+                        <m:sSubPr>
+                          <m:ctrlPr>
+                            <a:rPr lang="fr-FR" sz="2000" b="0" i="1" smtClean="0">
+                              <a:latin typeface="Cambria Math" panose="02040503050406030204" pitchFamily="18" charset="0"/>
+                              <a:ea typeface="Cambria Math" panose="02040503050406030204" pitchFamily="18" charset="0"/>
+                            </a:rPr>
+                          </m:ctrlPr>
+                        </m:sSubPr>
+                        <m:e>
+                          <m:r>
+                            <a:rPr lang="fr-FR" sz="2000" b="0" i="1" smtClean="0">
+                              <a:latin typeface="Cambria Math" panose="02040503050406030204" pitchFamily="18" charset="0"/>
+                              <a:ea typeface="Cambria Math" panose="02040503050406030204" pitchFamily="18" charset="0"/>
+                            </a:rPr>
+                            <m:t>𝐷</m:t>
+                          </m:r>
+                        </m:e>
+                        <m:sub>
+                          <m:r>
+                            <a:rPr lang="fr-FR" sz="2000" b="0" i="1" smtClean="0">
+                              <a:latin typeface="Cambria Math" panose="02040503050406030204" pitchFamily="18" charset="0"/>
+                              <a:ea typeface="Cambria Math" panose="02040503050406030204" pitchFamily="18" charset="0"/>
+                            </a:rPr>
+                            <m:t>𝑓𝑖𝑛𝑎𝑙</m:t>
+                          </m:r>
+                        </m:sub>
+                      </m:sSub>
                       <m:r>
-                        <a:rPr lang="fr-FR" b="1" i="1">
+                        <a:rPr lang="fr-FR" sz="2000" b="0" i="1" smtClean="0">
                           <a:latin typeface="Cambria Math" panose="02040503050406030204" pitchFamily="18" charset="0"/>
+                          <a:ea typeface="Cambria Math" panose="02040503050406030204" pitchFamily="18" charset="0"/>
                         </a:rPr>
-                        <m:t>=</m:t>
-                      </m:r>
-                      <m:r>
-                        <a:rPr lang="fr-FR" b="1" i="1" smtClean="0">
-                          <a:latin typeface="Cambria Math" panose="02040503050406030204" pitchFamily="18" charset="0"/>
-                        </a:rPr>
-                        <m:t>𝟐𝟐𝟎</m:t>
-                      </m:r>
-                      <m:r>
-                        <a:rPr lang="fr-FR" b="1" i="1">
-                          <a:latin typeface="Cambria Math" panose="02040503050406030204" pitchFamily="18" charset="0"/>
-                        </a:rPr>
-                        <m:t> </m:t>
-                      </m:r>
-                      <m:r>
-                        <a:rPr lang="fr-FR" b="1" i="1">
-                          <a:latin typeface="Cambria Math" panose="02040503050406030204" pitchFamily="18" charset="0"/>
-                        </a:rPr>
-                        <m:t>𝑷𝒂</m:t>
+                        <m:t>↘</m:t>
                       </m:r>
                     </m:oMath>
                   </m:oMathPara>
                 </a14:m>
-                <a:endParaRPr lang="fr-FR" b="1" dirty="0"/>
+                <a:endParaRPr lang="fr-FR" sz="2000" dirty="0"/>
+              </a:p>
+              <a:p>
+                <a:pPr marL="342900" indent="-342900">
+                  <a:spcAft>
+                    <a:spcPts val="1200"/>
+                  </a:spcAft>
+                  <a:buFont typeface="Arial" panose="020B0604020202020204" pitchFamily="34" charset="0"/>
+                  <a:buChar char="•"/>
+                </a:pPr>
+                <a:r>
+                  <a:rPr lang="fr-FR" sz="2000" dirty="0"/>
+                  <a:t>k, m impactent uniquement la « dynamique » de l’étalement /</a:t>
+                </a:r>
+              </a:p>
+              <a:p>
+                <a:pPr algn="ctr">
+                  <a:spcAft>
+                    <a:spcPts val="1200"/>
+                  </a:spcAft>
+                </a:pPr>
+                <a14:m>
+                  <m:oMath xmlns:m="http://schemas.openxmlformats.org/officeDocument/2006/math">
+                    <m:r>
+                      <a:rPr lang="fr-FR" sz="2000" b="0" i="1" smtClean="0">
+                        <a:latin typeface="Cambria Math" panose="02040503050406030204" pitchFamily="18" charset="0"/>
+                        <a:ea typeface="Cambria Math" panose="02040503050406030204" pitchFamily="18" charset="0"/>
+                      </a:rPr>
+                      <m:t>𝑘</m:t>
+                    </m:r>
+                    <m:r>
+                      <a:rPr lang="fr-FR" sz="2000" i="1">
+                        <a:latin typeface="Cambria Math" panose="02040503050406030204" pitchFamily="18" charset="0"/>
+                        <a:ea typeface="Cambria Math" panose="02040503050406030204" pitchFamily="18" charset="0"/>
+                      </a:rPr>
+                      <m:t>↗  ⇒</m:t>
+                    </m:r>
+                    <m:r>
+                      <a:rPr lang="fr-FR" sz="2000" b="0" i="1" smtClean="0">
+                        <a:latin typeface="Cambria Math" panose="02040503050406030204" pitchFamily="18" charset="0"/>
+                        <a:ea typeface="Cambria Math" panose="02040503050406030204" pitchFamily="18" charset="0"/>
+                      </a:rPr>
+                      <m:t> </m:t>
+                    </m:r>
+                    <m:sSub>
+                      <m:sSubPr>
+                        <m:ctrlPr>
+                          <a:rPr lang="fr-FR" sz="2000" b="0" i="1" smtClean="0">
+                            <a:latin typeface="Cambria Math" panose="02040503050406030204" pitchFamily="18" charset="0"/>
+                            <a:ea typeface="Cambria Math" panose="02040503050406030204" pitchFamily="18" charset="0"/>
+                          </a:rPr>
+                        </m:ctrlPr>
+                      </m:sSubPr>
+                      <m:e>
+                        <m:r>
+                          <a:rPr lang="fr-FR" sz="2000" b="0" i="1" smtClean="0">
+                            <a:latin typeface="Cambria Math" panose="02040503050406030204" pitchFamily="18" charset="0"/>
+                            <a:ea typeface="Cambria Math" panose="02040503050406030204" pitchFamily="18" charset="0"/>
+                          </a:rPr>
+                          <m:t>𝑡</m:t>
+                        </m:r>
+                      </m:e>
+                      <m:sub>
+                        <m:r>
+                          <a:rPr lang="fr-FR" sz="2000" b="0" i="1" smtClean="0">
+                            <a:latin typeface="Cambria Math" panose="02040503050406030204" pitchFamily="18" charset="0"/>
+                            <a:ea typeface="Cambria Math" panose="02040503050406030204" pitchFamily="18" charset="0"/>
+                          </a:rPr>
+                          <m:t>𝑓𝑖𝑛𝑎𝑙</m:t>
+                        </m:r>
+                      </m:sub>
+                    </m:sSub>
+                    <m:r>
+                      <a:rPr lang="fr-FR" sz="2000" i="1">
+                        <a:latin typeface="Cambria Math" panose="02040503050406030204" pitchFamily="18" charset="0"/>
+                        <a:ea typeface="Cambria Math" panose="02040503050406030204" pitchFamily="18" charset="0"/>
+                      </a:rPr>
+                      <m:t>↗</m:t>
+                    </m:r>
+                  </m:oMath>
+                </a14:m>
+                <a:r>
+                  <a:rPr lang="fr-FR" sz="2000" dirty="0"/>
+                  <a:t> </a:t>
+                </a:r>
+                <a:r>
+                  <a:rPr lang="fr-FR" sz="1800" i="1" dirty="0">
+                    <a:latin typeface="Cambria Math" panose="02040503050406030204" pitchFamily="18" charset="0"/>
+                    <a:ea typeface="Cambria Math" panose="02040503050406030204" pitchFamily="18" charset="0"/>
+                  </a:rPr>
+                  <a:t>(ralenti)</a:t>
+                </a:r>
+              </a:p>
+              <a:p>
+                <a:pPr algn="ctr">
+                  <a:spcAft>
+                    <a:spcPts val="1200"/>
+                  </a:spcAft>
+                </a:pPr>
+                <a14:m>
+                  <m:oMath xmlns:m="http://schemas.openxmlformats.org/officeDocument/2006/math">
+                    <m:r>
+                      <a:rPr lang="fr-FR" sz="2000" b="0" i="1" smtClean="0">
+                        <a:latin typeface="Cambria Math" panose="02040503050406030204" pitchFamily="18" charset="0"/>
+                        <a:ea typeface="Cambria Math" panose="02040503050406030204" pitchFamily="18" charset="0"/>
+                      </a:rPr>
+                      <m:t>𝑚</m:t>
+                    </m:r>
+                    <m:r>
+                      <a:rPr lang="fr-FR" sz="2000" i="1">
+                        <a:latin typeface="Cambria Math" panose="02040503050406030204" pitchFamily="18" charset="0"/>
+                        <a:ea typeface="Cambria Math" panose="02040503050406030204" pitchFamily="18" charset="0"/>
+                      </a:rPr>
+                      <m:t>↗  ⇒ </m:t>
+                    </m:r>
+                    <m:sSub>
+                      <m:sSubPr>
+                        <m:ctrlPr>
+                          <a:rPr lang="fr-FR" sz="2000" i="1">
+                            <a:latin typeface="Cambria Math" panose="02040503050406030204" pitchFamily="18" charset="0"/>
+                            <a:ea typeface="Cambria Math" panose="02040503050406030204" pitchFamily="18" charset="0"/>
+                          </a:rPr>
+                        </m:ctrlPr>
+                      </m:sSubPr>
+                      <m:e>
+                        <m:r>
+                          <a:rPr lang="fr-FR" sz="2000" b="0" i="1" smtClean="0">
+                            <a:latin typeface="Cambria Math" panose="02040503050406030204" pitchFamily="18" charset="0"/>
+                            <a:ea typeface="Cambria Math" panose="02040503050406030204" pitchFamily="18" charset="0"/>
+                          </a:rPr>
+                          <m:t>𝑡</m:t>
+                        </m:r>
+                      </m:e>
+                      <m:sub>
+                        <m:r>
+                          <a:rPr lang="fr-FR" sz="2000" i="1">
+                            <a:latin typeface="Cambria Math" panose="02040503050406030204" pitchFamily="18" charset="0"/>
+                            <a:ea typeface="Cambria Math" panose="02040503050406030204" pitchFamily="18" charset="0"/>
+                          </a:rPr>
+                          <m:t>𝑓𝑖𝑛𝑎𝑙</m:t>
+                        </m:r>
+                      </m:sub>
+                    </m:sSub>
+                    <m:r>
+                      <a:rPr lang="fr-FR" sz="2000" i="1">
+                        <a:latin typeface="Cambria Math" panose="02040503050406030204" pitchFamily="18" charset="0"/>
+                        <a:ea typeface="Cambria Math" panose="02040503050406030204" pitchFamily="18" charset="0"/>
+                      </a:rPr>
+                      <m:t>↘</m:t>
+                    </m:r>
+                  </m:oMath>
+                </a14:m>
+                <a:r>
+                  <a:rPr lang="fr-FR" sz="2000" dirty="0"/>
+                  <a:t> </a:t>
+                </a:r>
+                <a:r>
+                  <a:rPr lang="fr-FR" sz="1800" i="1" dirty="0">
+                    <a:latin typeface="Cambria Math" panose="02040503050406030204" pitchFamily="18" charset="0"/>
+                    <a:ea typeface="Cambria Math" panose="02040503050406030204" pitchFamily="18" charset="0"/>
+                  </a:rPr>
+                  <a:t>(accélère)</a:t>
+                </a:r>
               </a:p>
               <a:p>
                 <a:pPr>
-                  <a:lnSpc>
-                    <a:spcPct val="150000"/>
-                  </a:lnSpc>
+                  <a:spcAft>
+                    <a:spcPts val="1200"/>
+                  </a:spcAft>
                 </a:pPr>
                 <a:endParaRPr lang="fr-FR" sz="2000" dirty="0"/>
               </a:p>
             </p:txBody>
           </p:sp>
         </mc:Choice>
-        <mc:Fallback xmlns="">
+        <mc:Fallback>
           <p:sp>
             <p:nvSpPr>
-              <p:cNvPr id="15" name="Espace réservé du texte 2">
+              <p:cNvPr id="8" name="Espace réservé du texte 2">
                 <a:extLst>
                   <a:ext uri="{FF2B5EF4-FFF2-40B4-BE49-F238E27FC236}">
-                    <a16:creationId xmlns:a16="http://schemas.microsoft.com/office/drawing/2014/main" id="{C5930DD3-6DA0-4D04-6D55-C0C6853E9299}"/>
+                    <a16:creationId xmlns:a16="http://schemas.microsoft.com/office/drawing/2014/main" id="{0757656F-A5B1-BFAE-98AF-90D55FAFD8F5}"/>
                   </a:ext>
                 </a:extLst>
               </p:cNvPr>
@@ -22867,16 +23949,16 @@
             </p:nvSpPr>
             <p:spPr>
               <a:xfrm>
-                <a:off x="1727289" y="4772726"/>
-                <a:ext cx="2704399" cy="701136"/>
+                <a:off x="971451" y="1939731"/>
+                <a:ext cx="4707860" cy="4512440"/>
               </a:xfrm>
               <a:prstGeom prst="rect">
                 <a:avLst/>
               </a:prstGeom>
               <a:blipFill>
-                <a:blip r:embed="rId4"/>
+                <a:blip r:embed="rId2"/>
                 <a:stretch>
-                  <a:fillRect/>
+                  <a:fillRect l="-1294" t="-1757" r="-776"/>
                 </a:stretch>
               </a:blipFill>
             </p:spPr>
@@ -22895,14 +23977,79 @@
           </p:sp>
         </mc:Fallback>
       </mc:AlternateContent>
-      <mc:AlternateContent xmlns:mc="http://schemas.openxmlformats.org/markup-compatibility/2006" xmlns:a14="http://schemas.microsoft.com/office/drawing/2010/main">
-        <mc:Choice Requires="a14">
+      <p:sp>
+        <p:nvSpPr>
+          <p:cNvPr id="2" name="Titre 1">
+            <a:extLst>
+              <a:ext uri="{FF2B5EF4-FFF2-40B4-BE49-F238E27FC236}">
+                <a16:creationId xmlns:a16="http://schemas.microsoft.com/office/drawing/2014/main" id="{2F496B43-9219-4783-FA13-5112318B2316}"/>
+              </a:ext>
+            </a:extLst>
+          </p:cNvPr>
+          <p:cNvSpPr txBox="1">
+            <a:spLocks/>
+          </p:cNvSpPr>
+          <p:nvPr/>
+        </p:nvSpPr>
+        <p:spPr>
+          <a:xfrm>
+            <a:off x="840185" y="741438"/>
+            <a:ext cx="10511627" cy="646331"/>
+          </a:xfrm>
+          <a:prstGeom prst="rect">
+            <a:avLst/>
+          </a:prstGeom>
+        </p:spPr>
+        <p:txBody>
+          <a:bodyPr vert="horz" lIns="91440" tIns="0" rIns="91440" bIns="0" rtlCol="0" anchor="b" anchorCtr="0">
+            <a:noAutofit/>
+          </a:bodyPr>
+          <a:lstStyle>
+            <a:defPPr>
+              <a:defRPr lang="fr-FR"/>
+            </a:defPPr>
+            <a:lvl1pPr algn="ctr" defTabSz="914400" rtl="0" eaLnBrk="1" latinLnBrk="0" hangingPunct="1">
+              <a:lnSpc>
+                <a:spcPct val="100000"/>
+              </a:lnSpc>
+              <a:spcBef>
+                <a:spcPct val="0"/>
+              </a:spcBef>
+              <a:buNone/>
+              <a:defRPr lang="fr-FR" sz="3600" b="1" kern="1200" cap="all" baseline="0">
+                <a:solidFill>
+                  <a:schemeClr val="accent6"/>
+                </a:solidFill>
+                <a:latin typeface="+mj-lt"/>
+                <a:ea typeface="+mj-ea"/>
+                <a:cs typeface="+mj-cs"/>
+              </a:defRPr>
+            </a:lvl1pPr>
+          </a:lstStyle>
+          <a:p>
+            <a:r>
+              <a:rPr lang="fr-FR" dirty="0"/>
+              <a:t>Interprétations</a:t>
+            </a:r>
+            <a:br>
+              <a:rPr lang="fr-FR" dirty="0"/>
+            </a:br>
+            <a:r>
+              <a:rPr lang="fr-FR" sz="2400" dirty="0"/>
+              <a:t>influence des différents paramètres</a:t>
+            </a:r>
+            <a:endParaRPr lang="fr-FR" dirty="0"/>
+          </a:p>
+        </p:txBody>
+      </p:sp>
+      <mc:AlternateContent xmlns:mc="http://schemas.openxmlformats.org/markup-compatibility/2006">
+        <mc:Choice xmlns:a14="http://schemas.microsoft.com/office/drawing/2010/main" Requires="a14">
           <p:sp>
             <p:nvSpPr>
-              <p:cNvPr id="16" name="Espace réservé du texte 2">
+              <p:cNvPr id="3" name="Espace réservé du texte 2">
                 <a:extLst>
                   <a:ext uri="{FF2B5EF4-FFF2-40B4-BE49-F238E27FC236}">
-                    <a16:creationId xmlns:a16="http://schemas.microsoft.com/office/drawing/2014/main" id="{F923FE4F-E68C-2761-F4FF-744969602A56}"/>
+                    <a16:creationId xmlns:a16="http://schemas.microsoft.com/office/drawing/2014/main" id="{CC6C7EB6-DFBA-44AD-52D2-EA8C43E3918C}"/>
                   </a:ext>
                 </a:extLst>
               </p:cNvPr>
@@ -22913,8 +24060,8 @@
             </p:nvSpPr>
             <p:spPr>
               <a:xfrm>
-                <a:off x="7739764" y="2813492"/>
-                <a:ext cx="2704399" cy="646331"/>
+                <a:off x="6512690" y="1937646"/>
+                <a:ext cx="4398466" cy="4512440"/>
               </a:xfrm>
               <a:prstGeom prst="rect">
                 <a:avLst/>
@@ -23093,9 +24240,93 @@
               </a:lstStyle>
               <a:p>
                 <a:pPr>
-                  <a:lnSpc>
-                    <a:spcPct val="150000"/>
-                  </a:lnSpc>
+                  <a:spcAft>
+                    <a:spcPts val="1200"/>
+                  </a:spcAft>
+                </a:pPr>
+                <a:r>
+                  <a:rPr lang="fr-FR" sz="2000" b="1" dirty="0"/>
+                  <a:t>Influence des conditions initiales :</a:t>
+                </a:r>
+              </a:p>
+              <a:p>
+                <a:pPr marL="342900" indent="-342900">
+                  <a:spcAft>
+                    <a:spcPts val="1200"/>
+                  </a:spcAft>
+                  <a:buFont typeface="Arial" panose="020B0604020202020204" pitchFamily="34" charset="0"/>
+                  <a:buChar char="•"/>
+                </a:pPr>
+                <a14:m>
+                  <m:oMath xmlns:m="http://schemas.openxmlformats.org/officeDocument/2006/math">
+                    <m:sSub>
+                      <m:sSubPr>
+                        <m:ctrlPr>
+                          <a:rPr lang="fr-FR" sz="2000" b="0" i="1" smtClean="0">
+                            <a:latin typeface="Cambria Math" panose="02040503050406030204" pitchFamily="18" charset="0"/>
+                          </a:rPr>
+                        </m:ctrlPr>
+                      </m:sSubPr>
+                      <m:e>
+                        <m:r>
+                          <a:rPr lang="fr-FR" sz="2000" b="0" i="1" smtClean="0">
+                            <a:latin typeface="Cambria Math" panose="02040503050406030204" pitchFamily="18" charset="0"/>
+                          </a:rPr>
+                          <m:t>h</m:t>
+                        </m:r>
+                      </m:e>
+                      <m:sub>
+                        <m:r>
+                          <a:rPr lang="fr-FR" sz="2000" b="0" i="1" smtClean="0">
+                            <a:latin typeface="Cambria Math" panose="02040503050406030204" pitchFamily="18" charset="0"/>
+                          </a:rPr>
+                          <m:t>0</m:t>
+                        </m:r>
+                      </m:sub>
+                    </m:sSub>
+                    <m:r>
+                      <a:rPr lang="fr-FR" sz="2000" b="0" i="1" smtClean="0">
+                        <a:latin typeface="Cambria Math" panose="02040503050406030204" pitchFamily="18" charset="0"/>
+                      </a:rPr>
+                      <m:t>/</m:t>
+                    </m:r>
+                    <m:sSub>
+                      <m:sSubPr>
+                        <m:ctrlPr>
+                          <a:rPr lang="fr-FR" sz="2000" b="0" i="1" smtClean="0">
+                            <a:latin typeface="Cambria Math" panose="02040503050406030204" pitchFamily="18" charset="0"/>
+                          </a:rPr>
+                        </m:ctrlPr>
+                      </m:sSubPr>
+                      <m:e>
+                        <m:r>
+                          <a:rPr lang="fr-FR" sz="2000" b="0" i="1" smtClean="0">
+                            <a:latin typeface="Cambria Math" panose="02040503050406030204" pitchFamily="18" charset="0"/>
+                          </a:rPr>
+                          <m:t>𝑟</m:t>
+                        </m:r>
+                      </m:e>
+                      <m:sub>
+                        <m:r>
+                          <a:rPr lang="fr-FR" sz="2000" b="0" i="1" smtClean="0">
+                            <a:latin typeface="Cambria Math" panose="02040503050406030204" pitchFamily="18" charset="0"/>
+                          </a:rPr>
+                          <m:t>0</m:t>
+                        </m:r>
+                      </m:sub>
+                    </m:sSub>
+                  </m:oMath>
+                </a14:m>
+                <a:r>
+                  <a:rPr lang="fr-FR" sz="2000" dirty="0"/>
+                  <a:t> le rapport d’aspect (à volume fixé) impacte la position finale :</a:t>
+                </a:r>
+              </a:p>
+              <a:p>
+                <a:pPr>
+                  <a:spcAft>
+                    <a:spcPts val="1200"/>
+                  </a:spcAft>
                 </a:pPr>
                 <a14:m>
                   <m:oMathPara xmlns:m="http://schemas.openxmlformats.org/officeDocument/2006/math">
@@ -23103,59 +24334,99 @@
                       <m:jc m:val="centerGroup"/>
                     </m:oMathParaPr>
                     <m:oMath xmlns:m="http://schemas.openxmlformats.org/officeDocument/2006/math">
+                      <m:sSub>
+                        <m:sSubPr>
+                          <m:ctrlPr>
+                            <a:rPr lang="fr-FR" sz="2000" i="1">
+                              <a:latin typeface="Cambria Math" panose="02040503050406030204" pitchFamily="18" charset="0"/>
+                              <a:ea typeface="Cambria Math" panose="02040503050406030204" pitchFamily="18" charset="0"/>
+                            </a:rPr>
+                          </m:ctrlPr>
+                        </m:sSubPr>
+                        <m:e>
+                          <m:r>
+                            <a:rPr lang="fr-FR" sz="2000" b="0" i="1" smtClean="0">
+                              <a:latin typeface="Cambria Math" panose="02040503050406030204" pitchFamily="18" charset="0"/>
+                              <a:ea typeface="Cambria Math" panose="02040503050406030204" pitchFamily="18" charset="0"/>
+                            </a:rPr>
+                            <m:t>𝑟</m:t>
+                          </m:r>
+                        </m:e>
+                        <m:sub>
+                          <m:r>
+                            <a:rPr lang="fr-FR" sz="2000" i="1">
+                              <a:latin typeface="Cambria Math" panose="02040503050406030204" pitchFamily="18" charset="0"/>
+                              <a:ea typeface="Cambria Math" panose="02040503050406030204" pitchFamily="18" charset="0"/>
+                            </a:rPr>
+                            <m:t>0</m:t>
+                          </m:r>
+                        </m:sub>
+                      </m:sSub>
                       <m:r>
-                        <a:rPr lang="fr-FR" b="1" i="1" smtClean="0">
+                        <a:rPr lang="fr-FR" sz="2000" i="1">
                           <a:latin typeface="Cambria Math" panose="02040503050406030204" pitchFamily="18" charset="0"/>
+                          <a:ea typeface="Cambria Math" panose="02040503050406030204" pitchFamily="18" charset="0"/>
                         </a:rPr>
-                        <m:t>𝑮</m:t>
+                        <m:t>↗  ⇒ </m:t>
                       </m:r>
+                      <m:sSub>
+                        <m:sSubPr>
+                          <m:ctrlPr>
+                            <a:rPr lang="fr-FR" sz="2000" i="1">
+                              <a:latin typeface="Cambria Math" panose="02040503050406030204" pitchFamily="18" charset="0"/>
+                              <a:ea typeface="Cambria Math" panose="02040503050406030204" pitchFamily="18" charset="0"/>
+                            </a:rPr>
+                          </m:ctrlPr>
+                        </m:sSubPr>
+                        <m:e>
+                          <m:r>
+                            <a:rPr lang="fr-FR" sz="2000" i="1">
+                              <a:latin typeface="Cambria Math" panose="02040503050406030204" pitchFamily="18" charset="0"/>
+                              <a:ea typeface="Cambria Math" panose="02040503050406030204" pitchFamily="18" charset="0"/>
+                            </a:rPr>
+                            <m:t>𝐷</m:t>
+                          </m:r>
+                        </m:e>
+                        <m:sub>
+                          <m:r>
+                            <a:rPr lang="fr-FR" sz="2000" i="1">
+                              <a:latin typeface="Cambria Math" panose="02040503050406030204" pitchFamily="18" charset="0"/>
+                              <a:ea typeface="Cambria Math" panose="02040503050406030204" pitchFamily="18" charset="0"/>
+                            </a:rPr>
+                            <m:t>𝑓𝑖𝑛𝑎𝑙</m:t>
+                          </m:r>
+                        </m:sub>
+                      </m:sSub>
                       <m:r>
-                        <a:rPr lang="fr-FR" b="1" i="1">
+                        <a:rPr lang="fr-FR" sz="2000" i="1">
                           <a:latin typeface="Cambria Math" panose="02040503050406030204" pitchFamily="18" charset="0"/>
+                          <a:ea typeface="Cambria Math" panose="02040503050406030204" pitchFamily="18" charset="0"/>
                         </a:rPr>
-                        <m:t>=</m:t>
-                      </m:r>
-                      <m:r>
-                        <a:rPr lang="fr-FR" b="1" i="1" smtClean="0">
-                          <a:latin typeface="Cambria Math" panose="02040503050406030204" pitchFamily="18" charset="0"/>
-                        </a:rPr>
-                        <m:t>𝟏𝟎𝟎</m:t>
-                      </m:r>
-                      <m:r>
-                        <a:rPr lang="fr-FR" b="1" i="1">
-                          <a:latin typeface="Cambria Math" panose="02040503050406030204" pitchFamily="18" charset="0"/>
-                        </a:rPr>
-                        <m:t> </m:t>
-                      </m:r>
-                      <m:r>
-                        <a:rPr lang="fr-FR" b="1" i="1">
-                          <a:latin typeface="Cambria Math" panose="02040503050406030204" pitchFamily="18" charset="0"/>
-                        </a:rPr>
-                        <m:t>𝑷𝒂</m:t>
+                        <m:t>↗</m:t>
                       </m:r>
                     </m:oMath>
                   </m:oMathPara>
                 </a14:m>
-                <a:endParaRPr lang="fr-FR" b="1" dirty="0"/>
+                <a:endParaRPr lang="fr-FR" sz="2000" dirty="0"/>
               </a:p>
               <a:p>
                 <a:pPr>
-                  <a:lnSpc>
-                    <a:spcPct val="150000"/>
-                  </a:lnSpc>
+                  <a:spcAft>
+                    <a:spcPts val="1200"/>
+                  </a:spcAft>
                 </a:pPr>
-                <a:endParaRPr lang="fr-FR" sz="2000" dirty="0"/>
+                <a:endParaRPr lang="ar-AE" sz="2000" dirty="0"/>
               </a:p>
             </p:txBody>
           </p:sp>
         </mc:Choice>
-        <mc:Fallback xmlns="">
+        <mc:Fallback>
           <p:sp>
             <p:nvSpPr>
-              <p:cNvPr id="16" name="Espace réservé du texte 2">
+              <p:cNvPr id="3" name="Espace réservé du texte 2">
                 <a:extLst>
                   <a:ext uri="{FF2B5EF4-FFF2-40B4-BE49-F238E27FC236}">
-                    <a16:creationId xmlns:a16="http://schemas.microsoft.com/office/drawing/2014/main" id="{F923FE4F-E68C-2761-F4FF-744969602A56}"/>
+                    <a16:creationId xmlns:a16="http://schemas.microsoft.com/office/drawing/2014/main" id="{CC6C7EB6-DFBA-44AD-52D2-EA8C43E3918C}"/>
                   </a:ext>
                 </a:extLst>
               </p:cNvPr>
@@ -23166,16 +24437,16 @@
             </p:nvSpPr>
             <p:spPr>
               <a:xfrm>
-                <a:off x="7739764" y="2813492"/>
-                <a:ext cx="2704399" cy="646331"/>
+                <a:off x="6512690" y="1937646"/>
+                <a:ext cx="4398466" cy="4512440"/>
               </a:xfrm>
               <a:prstGeom prst="rect">
                 <a:avLst/>
               </a:prstGeom>
               <a:blipFill>
-                <a:blip r:embed="rId5"/>
+                <a:blip r:embed="rId3"/>
                 <a:stretch>
-                  <a:fillRect/>
+                  <a:fillRect l="-1385" t="-1757"/>
                 </a:stretch>
               </a:blipFill>
             </p:spPr>
@@ -23197,7 +24468,7 @@
     </p:spTree>
     <p:extLst>
       <p:ext uri="{BB962C8B-B14F-4D97-AF65-F5344CB8AC3E}">
-        <p14:creationId xmlns:p14="http://schemas.microsoft.com/office/powerpoint/2010/main" val="4106121250"/>
+        <p14:creationId xmlns:p14="http://schemas.microsoft.com/office/powerpoint/2010/main" val="838869246"/>
       </p:ext>
     </p:extLst>
   </p:cSld>
@@ -23208,308 +24479,6 @@
 </file>
 
 <file path=ppt/slides/slide6.xml><?xml version="1.0" encoding="utf-8"?>
-<p:sld xmlns:a="http://schemas.openxmlformats.org/drawingml/2006/main" xmlns:r="http://schemas.openxmlformats.org/officeDocument/2006/relationships" xmlns:p="http://schemas.openxmlformats.org/presentationml/2006/main">
-  <p:cSld>
-    <p:spTree>
-      <p:nvGrpSpPr>
-        <p:cNvPr id="1" name=""/>
-        <p:cNvGrpSpPr/>
-        <p:nvPr/>
-      </p:nvGrpSpPr>
-      <p:grpSpPr>
-        <a:xfrm>
-          <a:off x="0" y="0"/>
-          <a:ext cx="0" cy="0"/>
-          <a:chOff x="0" y="0"/>
-          <a:chExt cx="0" cy="0"/>
-        </a:xfrm>
-      </p:grpSpPr>
-      <p:sp>
-        <p:nvSpPr>
-          <p:cNvPr id="7" name="Titre 1">
-            <a:extLst>
-              <a:ext uri="{FF2B5EF4-FFF2-40B4-BE49-F238E27FC236}">
-                <a16:creationId xmlns:a16="http://schemas.microsoft.com/office/drawing/2014/main" id="{3553A97C-6CB9-5122-5F65-CBA2B304E8E1}"/>
-              </a:ext>
-            </a:extLst>
-          </p:cNvPr>
-          <p:cNvSpPr>
-            <a:spLocks noGrp="1"/>
-          </p:cNvSpPr>
-          <p:nvPr>
-            <p:ph type="title"/>
-          </p:nvPr>
-        </p:nvSpPr>
-        <p:spPr>
-          <a:xfrm>
-            <a:off x="840186" y="366454"/>
-            <a:ext cx="10511627" cy="646331"/>
-          </a:xfrm>
-        </p:spPr>
-        <p:txBody>
-          <a:bodyPr rtlCol="0"/>
-          <a:lstStyle>
-            <a:defPPr>
-              <a:defRPr lang="fr-FR"/>
-            </a:defPPr>
-          </a:lstStyle>
-          <a:p>
-            <a:pPr rtl="0"/>
-            <a:r>
-              <a:rPr lang="fr-FR" dirty="0"/>
-              <a:t>Etalement</a:t>
-            </a:r>
-          </a:p>
-        </p:txBody>
-      </p:sp>
-      <p:sp>
-        <p:nvSpPr>
-          <p:cNvPr id="8" name="Espace réservé du texte 2">
-            <a:extLst>
-              <a:ext uri="{FF2B5EF4-FFF2-40B4-BE49-F238E27FC236}">
-                <a16:creationId xmlns:a16="http://schemas.microsoft.com/office/drawing/2014/main" id="{DF764B89-76E2-5F33-9892-594CAC0AB0CE}"/>
-              </a:ext>
-            </a:extLst>
-          </p:cNvPr>
-          <p:cNvSpPr txBox="1">
-            <a:spLocks/>
-          </p:cNvSpPr>
-          <p:nvPr/>
-        </p:nvSpPr>
-        <p:spPr>
-          <a:xfrm>
-            <a:off x="2598414" y="5998023"/>
-            <a:ext cx="6995171" cy="493524"/>
-          </a:xfrm>
-          <a:prstGeom prst="rect">
-            <a:avLst/>
-          </a:prstGeom>
-        </p:spPr>
-        <p:txBody>
-          <a:bodyPr vert="horz" lIns="91440" tIns="0" rIns="91440" bIns="0" rtlCol="0">
-            <a:normAutofit/>
-          </a:bodyPr>
-          <a:lstStyle>
-            <a:defPPr>
-              <a:defRPr lang="fr-FR"/>
-            </a:defPPr>
-            <a:lvl1pPr marL="0" indent="0" algn="l" defTabSz="914400" rtl="0" eaLnBrk="1" latinLnBrk="0" hangingPunct="1">
-              <a:lnSpc>
-                <a:spcPct val="100000"/>
-              </a:lnSpc>
-              <a:spcBef>
-                <a:spcPts val="0"/>
-              </a:spcBef>
-              <a:buFont typeface="Arial" panose="020B0604020202020204" pitchFamily="34" charset="0"/>
-              <a:buNone/>
-              <a:defRPr lang="fr-FR" sz="2400" kern="1200">
-                <a:solidFill>
-                  <a:schemeClr val="accent6"/>
-                </a:solidFill>
-                <a:latin typeface="+mn-lt"/>
-                <a:ea typeface="+mn-ea"/>
-                <a:cs typeface="+mn-cs"/>
-              </a:defRPr>
-            </a:lvl1pPr>
-            <a:lvl2pPr marL="347472" indent="-347472" algn="l" defTabSz="914400" rtl="0" eaLnBrk="1" latinLnBrk="0" hangingPunct="1">
-              <a:lnSpc>
-                <a:spcPct val="100000"/>
-              </a:lnSpc>
-              <a:spcBef>
-                <a:spcPts val="0"/>
-              </a:spcBef>
-              <a:buFont typeface="Arial" panose="020B0604020202020204" pitchFamily="34" charset="0"/>
-              <a:buChar char="•"/>
-              <a:defRPr lang="fr-FR" sz="2400" kern="1200">
-                <a:solidFill>
-                  <a:schemeClr val="accent6"/>
-                </a:solidFill>
-                <a:latin typeface="+mn-lt"/>
-                <a:ea typeface="+mn-ea"/>
-                <a:cs typeface="+mn-cs"/>
-              </a:defRPr>
-            </a:lvl2pPr>
-            <a:lvl3pPr marL="685800" indent="-347472" algn="l" defTabSz="914400" rtl="0" eaLnBrk="1" latinLnBrk="0" hangingPunct="1">
-              <a:lnSpc>
-                <a:spcPct val="100000"/>
-              </a:lnSpc>
-              <a:spcBef>
-                <a:spcPts val="0"/>
-              </a:spcBef>
-              <a:buFont typeface="Arial" panose="020B0604020202020204" pitchFamily="34" charset="0"/>
-              <a:buChar char="•"/>
-              <a:defRPr lang="fr-FR" sz="2400" kern="1200">
-                <a:solidFill>
-                  <a:schemeClr val="accent6"/>
-                </a:solidFill>
-                <a:latin typeface="+mn-lt"/>
-                <a:ea typeface="+mn-ea"/>
-                <a:cs typeface="+mn-cs"/>
-              </a:defRPr>
-            </a:lvl3pPr>
-            <a:lvl4pPr marL="1600200" indent="-347472" algn="l" defTabSz="914400" rtl="0" eaLnBrk="1" latinLnBrk="0" hangingPunct="1">
-              <a:lnSpc>
-                <a:spcPct val="100000"/>
-              </a:lnSpc>
-              <a:spcBef>
-                <a:spcPts val="360"/>
-              </a:spcBef>
-              <a:buFont typeface="Arial" panose="020B0604020202020204" pitchFamily="34" charset="0"/>
-              <a:buChar char="•"/>
-              <a:defRPr lang="fr-FR" sz="1800" kern="1200">
-                <a:solidFill>
-                  <a:schemeClr val="accent6"/>
-                </a:solidFill>
-                <a:latin typeface="+mn-lt"/>
-                <a:ea typeface="+mn-ea"/>
-                <a:cs typeface="+mn-cs"/>
-              </a:defRPr>
-            </a:lvl4pPr>
-            <a:lvl5pPr marL="2057400" indent="-347472" algn="l" defTabSz="914400" rtl="0" eaLnBrk="1" latinLnBrk="0" hangingPunct="1">
-              <a:lnSpc>
-                <a:spcPct val="100000"/>
-              </a:lnSpc>
-              <a:spcBef>
-                <a:spcPts val="360"/>
-              </a:spcBef>
-              <a:buFont typeface="Arial" panose="020B0604020202020204" pitchFamily="34" charset="0"/>
-              <a:buChar char="•"/>
-              <a:defRPr lang="fr-FR" sz="1800" kern="1200">
-                <a:solidFill>
-                  <a:schemeClr val="accent6"/>
-                </a:solidFill>
-                <a:latin typeface="+mn-lt"/>
-                <a:ea typeface="+mn-ea"/>
-                <a:cs typeface="+mn-cs"/>
-              </a:defRPr>
-            </a:lvl5pPr>
-            <a:lvl6pPr marL="2514600" indent="-228600" algn="l" defTabSz="914400" rtl="0" eaLnBrk="1" latinLnBrk="0" hangingPunct="1">
-              <a:lnSpc>
-                <a:spcPct val="90000"/>
-              </a:lnSpc>
-              <a:spcBef>
-                <a:spcPts val="500"/>
-              </a:spcBef>
-              <a:buFont typeface="Arial" panose="020B0604020202020204" pitchFamily="34" charset="0"/>
-              <a:buChar char="•"/>
-              <a:defRPr lang="fr-FR" sz="1800" kern="1200">
-                <a:solidFill>
-                  <a:schemeClr val="tx1"/>
-                </a:solidFill>
-                <a:latin typeface="+mn-lt"/>
-                <a:ea typeface="+mn-ea"/>
-                <a:cs typeface="+mn-cs"/>
-              </a:defRPr>
-            </a:lvl6pPr>
-            <a:lvl7pPr marL="2971800" indent="-228600" algn="l" defTabSz="914400" rtl="0" eaLnBrk="1" latinLnBrk="0" hangingPunct="1">
-              <a:lnSpc>
-                <a:spcPct val="90000"/>
-              </a:lnSpc>
-              <a:spcBef>
-                <a:spcPts val="500"/>
-              </a:spcBef>
-              <a:buFont typeface="Arial" panose="020B0604020202020204" pitchFamily="34" charset="0"/>
-              <a:buChar char="•"/>
-              <a:defRPr lang="fr-FR" sz="1800" kern="1200">
-                <a:solidFill>
-                  <a:schemeClr val="tx1"/>
-                </a:solidFill>
-                <a:latin typeface="+mn-lt"/>
-                <a:ea typeface="+mn-ea"/>
-                <a:cs typeface="+mn-cs"/>
-              </a:defRPr>
-            </a:lvl7pPr>
-            <a:lvl8pPr marL="3429000" indent="-228600" algn="l" defTabSz="914400" rtl="0" eaLnBrk="1" latinLnBrk="0" hangingPunct="1">
-              <a:lnSpc>
-                <a:spcPct val="90000"/>
-              </a:lnSpc>
-              <a:spcBef>
-                <a:spcPts val="500"/>
-              </a:spcBef>
-              <a:buFont typeface="Arial" panose="020B0604020202020204" pitchFamily="34" charset="0"/>
-              <a:buChar char="•"/>
-              <a:defRPr lang="fr-FR" sz="1800" kern="1200">
-                <a:solidFill>
-                  <a:schemeClr val="tx1"/>
-                </a:solidFill>
-                <a:latin typeface="+mn-lt"/>
-                <a:ea typeface="+mn-ea"/>
-                <a:cs typeface="+mn-cs"/>
-              </a:defRPr>
-            </a:lvl8pPr>
-            <a:lvl9pPr marL="3886200" indent="-228600" algn="l" defTabSz="914400" rtl="0" eaLnBrk="1" latinLnBrk="0" hangingPunct="1">
-              <a:lnSpc>
-                <a:spcPct val="90000"/>
-              </a:lnSpc>
-              <a:spcBef>
-                <a:spcPts val="500"/>
-              </a:spcBef>
-              <a:buFont typeface="Arial" panose="020B0604020202020204" pitchFamily="34" charset="0"/>
-              <a:buChar char="•"/>
-              <a:defRPr lang="fr-FR" sz="1800" kern="1200">
-                <a:solidFill>
-                  <a:schemeClr val="tx1"/>
-                </a:solidFill>
-                <a:latin typeface="+mn-lt"/>
-                <a:ea typeface="+mn-ea"/>
-                <a:cs typeface="+mn-cs"/>
-              </a:defRPr>
-            </a:lvl9pPr>
-          </a:lstStyle>
-          <a:p>
-            <a:pPr algn="ctr"/>
-            <a:r>
-              <a:rPr lang="fr-FR" sz="2000" dirty="0"/>
-              <a:t>Pour différentes masses M</a:t>
-            </a:r>
-            <a:endParaRPr lang="ar-AE" sz="2000" dirty="0"/>
-          </a:p>
-        </p:txBody>
-      </p:sp>
-      <p:pic>
-        <p:nvPicPr>
-          <p:cNvPr id="5" name="Image 4">
-            <a:extLst>
-              <a:ext uri="{FF2B5EF4-FFF2-40B4-BE49-F238E27FC236}">
-                <a16:creationId xmlns:a16="http://schemas.microsoft.com/office/drawing/2014/main" id="{CF09BAE6-2315-DC72-D7CC-7D5ED5A80A2A}"/>
-              </a:ext>
-            </a:extLst>
-          </p:cNvPr>
-          <p:cNvPicPr>
-            <a:picLocks noChangeAspect="1"/>
-          </p:cNvPicPr>
-          <p:nvPr/>
-        </p:nvPicPr>
-        <p:blipFill>
-          <a:blip r:embed="rId2"/>
-          <a:stretch>
-            <a:fillRect/>
-          </a:stretch>
-        </p:blipFill>
-        <p:spPr>
-          <a:xfrm>
-            <a:off x="1209424" y="1234962"/>
-            <a:ext cx="9773152" cy="4388076"/>
-          </a:xfrm>
-          <a:prstGeom prst="rect">
-            <a:avLst/>
-          </a:prstGeom>
-        </p:spPr>
-      </p:pic>
-    </p:spTree>
-    <p:extLst>
-      <p:ext uri="{BB962C8B-B14F-4D97-AF65-F5344CB8AC3E}">
-        <p14:creationId xmlns:p14="http://schemas.microsoft.com/office/powerpoint/2010/main" val="4253638334"/>
-      </p:ext>
-    </p:extLst>
-  </p:cSld>
-  <p:clrMapOvr>
-    <a:masterClrMapping/>
-  </p:clrMapOvr>
-</p:sld>
-</file>
-
-<file path=ppt/slides/slide7.xml><?xml version="1.0" encoding="utf-8"?>
 <p:sld xmlns:a="http://schemas.openxmlformats.org/drawingml/2006/main" xmlns:r="http://schemas.openxmlformats.org/officeDocument/2006/relationships" xmlns:p="http://schemas.openxmlformats.org/presentationml/2006/main">
   <p:cSld>
     <p:spTree>
@@ -23596,8 +24565,8 @@
         </p:nvSpPr>
         <p:spPr>
           <a:xfrm>
-            <a:off x="840187" y="689619"/>
-            <a:ext cx="10511627" cy="646331"/>
+            <a:off x="840187" y="370033"/>
+            <a:ext cx="10511627" cy="1068658"/>
           </a:xfrm>
         </p:spPr>
         <p:txBody>
@@ -23611,7 +24580,7 @@
             <a:pPr algn="ctr" rtl="0"/>
             <a:r>
               <a:rPr lang="fr-FR" dirty="0"/>
-              <a:t>Expériences : compression</a:t>
+              <a:t>Expérience 1 : compressions</a:t>
             </a:r>
             <a:br>
               <a:rPr lang="fr-FR" dirty="0"/>
@@ -23646,7 +24615,7 @@
         </p:blipFill>
         <p:spPr>
           <a:xfrm rot="16200000">
-            <a:off x="5478716" y="1573889"/>
+            <a:off x="5469655" y="1611099"/>
             <a:ext cx="1220017" cy="3377209"/>
           </a:xfrm>
           <a:prstGeom prst="rect">
@@ -23676,7 +24645,7 @@
         </p:blipFill>
         <p:spPr>
           <a:xfrm rot="16200000">
-            <a:off x="5456117" y="3914715"/>
+            <a:off x="9126822" y="1452805"/>
             <a:ext cx="1237654" cy="3367766"/>
           </a:xfrm>
           <a:prstGeom prst="rect">
@@ -23769,7 +24738,7 @@
         </p:blipFill>
         <p:spPr>
           <a:xfrm>
-            <a:off x="8061142" y="2136519"/>
+            <a:off x="4403054" y="4560501"/>
             <a:ext cx="3365214" cy="1672328"/>
           </a:xfrm>
           <a:prstGeom prst="rect">
@@ -24002,7 +24971,7 @@
         </p:nvSpPr>
         <p:spPr>
           <a:xfrm>
-            <a:off x="4215188" y="1867820"/>
+            <a:off x="4273718" y="1888220"/>
             <a:ext cx="3562141" cy="816551"/>
           </a:xfrm>
           <a:prstGeom prst="rect">
@@ -24211,7 +25180,7 @@
         </p:nvSpPr>
         <p:spPr>
           <a:xfrm>
-            <a:off x="7903451" y="4007992"/>
+            <a:off x="7903451" y="3951879"/>
             <a:ext cx="3562141" cy="816551"/>
           </a:xfrm>
           <a:prstGeom prst="rect">
@@ -24450,7 +25419,7 @@
         </p:nvSpPr>
         <p:spPr>
           <a:xfrm>
-            <a:off x="7937577" y="1662923"/>
+            <a:off x="4273718" y="4058516"/>
             <a:ext cx="3562141" cy="816551"/>
           </a:xfrm>
           <a:prstGeom prst="rect">
@@ -24659,7 +25628,7 @@
         </p:nvSpPr>
         <p:spPr>
           <a:xfrm>
-            <a:off x="4206127" y="4195107"/>
+            <a:off x="7935265" y="1701310"/>
             <a:ext cx="3562141" cy="816551"/>
           </a:xfrm>
           <a:prstGeom prst="rect">
@@ -24865,7 +25834,7 @@
 </p:sld>
 </file>
 
-<file path=ppt/slides/slide8.xml><?xml version="1.0" encoding="utf-8"?>
+<file path=ppt/slides/slide7.xml><?xml version="1.0" encoding="utf-8"?>
 <p:sld xmlns:a="http://schemas.openxmlformats.org/drawingml/2006/main" xmlns:r="http://schemas.openxmlformats.org/officeDocument/2006/relationships" xmlns:p="http://schemas.openxmlformats.org/presentationml/2006/main">
   <p:cSld>
     <p:spTree>
@@ -24967,7 +25936,11 @@
             <a:pPr algn="ctr" rtl="0"/>
             <a:r>
               <a:rPr lang="fr-FR" dirty="0"/>
-              <a:t>Expériences : compression</a:t>
+              <a:t>Expérience 1 : </a:t>
+            </a:r>
+            <a:r>
+              <a:rPr lang="fr-FR" dirty="0" err="1"/>
+              <a:t>compressionS</a:t>
             </a:r>
             <a:br>
               <a:rPr lang="fr-FR" dirty="0"/>
@@ -24996,8 +25969,8 @@
         </p:nvSpPr>
         <p:spPr>
           <a:xfrm>
-            <a:off x="7520683" y="1782811"/>
-            <a:ext cx="3720099" cy="3950169"/>
+            <a:off x="8923105" y="1782811"/>
+            <a:ext cx="2152437" cy="4001540"/>
           </a:xfrm>
           <a:prstGeom prst="rect">
             <a:avLst/>
@@ -25269,10 +26242,10 @@
       </p:sp>
       <p:pic>
         <p:nvPicPr>
-          <p:cNvPr id="4" name="Image 3">
+          <p:cNvPr id="3" name="Image 2">
             <a:extLst>
               <a:ext uri="{FF2B5EF4-FFF2-40B4-BE49-F238E27FC236}">
-                <a16:creationId xmlns:a16="http://schemas.microsoft.com/office/drawing/2014/main" id="{F7531864-2F2C-62AE-4B9B-F48FA2DDBBA3}"/>
+                <a16:creationId xmlns:a16="http://schemas.microsoft.com/office/drawing/2014/main" id="{7B70687C-8401-3BC1-7DD1-4F463D7E54AA}"/>
               </a:ext>
             </a:extLst>
           </p:cNvPr>
@@ -25289,17 +26262,42 @@
         </p:blipFill>
         <p:spPr>
           <a:xfrm>
-            <a:off x="840187" y="1507460"/>
-            <a:ext cx="6481916" cy="4931728"/>
+            <a:off x="712975" y="1228612"/>
+            <a:ext cx="4325179" cy="3250921"/>
           </a:xfrm>
           <a:prstGeom prst="rect">
             <a:avLst/>
           </a:prstGeom>
-          <a:ln w="38100">
-            <a:solidFill>
-              <a:srgbClr val="AAC4E9"/>
-            </a:solidFill>
-          </a:ln>
+        </p:spPr>
+      </p:pic>
+      <p:pic>
+        <p:nvPicPr>
+          <p:cNvPr id="14" name="Image 13">
+            <a:extLst>
+              <a:ext uri="{FF2B5EF4-FFF2-40B4-BE49-F238E27FC236}">
+                <a16:creationId xmlns:a16="http://schemas.microsoft.com/office/drawing/2014/main" id="{AEF67EA2-B55C-2E48-36EE-C03B15F9471E}"/>
+              </a:ext>
+            </a:extLst>
+          </p:cNvPr>
+          <p:cNvPicPr>
+            <a:picLocks noChangeAspect="1"/>
+          </p:cNvPicPr>
+          <p:nvPr/>
+        </p:nvPicPr>
+        <p:blipFill>
+          <a:blip r:embed="rId3"/>
+          <a:stretch>
+            <a:fillRect/>
+          </a:stretch>
+        </p:blipFill>
+        <p:spPr>
+          <a:xfrm>
+            <a:off x="4699052" y="3428999"/>
+            <a:ext cx="3970011" cy="3033731"/>
+          </a:xfrm>
+          <a:prstGeom prst="rect">
+            <a:avLst/>
+          </a:prstGeom>
         </p:spPr>
       </p:pic>
     </p:spTree>
@@ -25315,7 +26313,7 @@
 </p:sld>
 </file>
 
-<file path=ppt/slides/slide9.xml><?xml version="1.0" encoding="utf-8"?>
+<file path=ppt/slides/slide8.xml><?xml version="1.0" encoding="utf-8"?>
 <p:sld xmlns:a="http://schemas.openxmlformats.org/drawingml/2006/main" xmlns:r="http://schemas.openxmlformats.org/officeDocument/2006/relationships" xmlns:p="http://schemas.openxmlformats.org/presentationml/2006/main">
   <p:cSld>
     <p:spTree>
@@ -25423,7 +26421,7 @@
             <a:pPr algn="ctr" rtl="0"/>
             <a:r>
               <a:rPr lang="fr-FR" dirty="0"/>
-              <a:t>Expériences : compression</a:t>
+              <a:t>Expérience 1 : compressions</a:t>
             </a:r>
             <a:br>
               <a:rPr lang="fr-FR" dirty="0"/>
@@ -25452,8 +26450,8 @@
         </p:nvSpPr>
         <p:spPr>
           <a:xfrm>
-            <a:off x="7520683" y="1782811"/>
-            <a:ext cx="3720099" cy="3950169"/>
+            <a:off x="7705619" y="1798957"/>
+            <a:ext cx="3544584" cy="3950169"/>
           </a:xfrm>
           <a:prstGeom prst="rect">
             <a:avLst/>
@@ -25643,7 +26641,7 @@
             </a:pPr>
             <a:r>
               <a:rPr lang="fr-FR" sz="2000" dirty="0"/>
-              <a:t>95 mg</a:t>
+              <a:t>55 mg</a:t>
             </a:r>
           </a:p>
           <a:p>
@@ -25653,7 +26651,7 @@
             </a:pPr>
             <a:r>
               <a:rPr lang="fr-FR" sz="2000" dirty="0"/>
-              <a:t>55 mg</a:t>
+              <a:t>30 mg</a:t>
             </a:r>
           </a:p>
           <a:p>
@@ -25702,7 +26700,7 @@
             </a:pPr>
             <a:r>
               <a:rPr lang="fr-FR" sz="2000" dirty="0"/>
-              <a:t>100 g</a:t>
+              <a:t>60 g</a:t>
             </a:r>
           </a:p>
           <a:p>
@@ -25712,7 +26710,7 @@
             </a:pPr>
             <a:r>
               <a:rPr lang="fr-FR" sz="2000" dirty="0"/>
-              <a:t>200 g</a:t>
+              <a:t>100 g</a:t>
             </a:r>
           </a:p>
           <a:p>
@@ -25723,10 +26721,748 @@
           </a:p>
         </p:txBody>
       </p:sp>
+      <p:pic>
+        <p:nvPicPr>
+          <p:cNvPr id="3" name="Image 2">
+            <a:extLst>
+              <a:ext uri="{FF2B5EF4-FFF2-40B4-BE49-F238E27FC236}">
+                <a16:creationId xmlns:a16="http://schemas.microsoft.com/office/drawing/2014/main" id="{48AF20D6-DE24-69F9-DC24-DF3DE89509A0}"/>
+              </a:ext>
+            </a:extLst>
+          </p:cNvPr>
+          <p:cNvPicPr>
+            <a:picLocks noChangeAspect="1"/>
+          </p:cNvPicPr>
+          <p:nvPr/>
+        </p:nvPicPr>
+        <p:blipFill>
+          <a:blip r:embed="rId2"/>
+          <a:stretch>
+            <a:fillRect/>
+          </a:stretch>
+        </p:blipFill>
+        <p:spPr>
+          <a:xfrm>
+            <a:off x="1184423" y="1591355"/>
+            <a:ext cx="6304375" cy="4809445"/>
+          </a:xfrm>
+          <a:prstGeom prst="rect">
+            <a:avLst/>
+          </a:prstGeom>
+        </p:spPr>
+      </p:pic>
     </p:spTree>
     <p:extLst>
       <p:ext uri="{BB962C8B-B14F-4D97-AF65-F5344CB8AC3E}">
         <p14:creationId xmlns:p14="http://schemas.microsoft.com/office/powerpoint/2010/main" val="2908055306"/>
+      </p:ext>
+    </p:extLst>
+  </p:cSld>
+  <p:clrMapOvr>
+    <a:masterClrMapping/>
+  </p:clrMapOvr>
+</p:sld>
+</file>
+
+<file path=ppt/slides/slide9.xml><?xml version="1.0" encoding="utf-8"?>
+<p:sld xmlns:a="http://schemas.openxmlformats.org/drawingml/2006/main" xmlns:r="http://schemas.openxmlformats.org/officeDocument/2006/relationships" xmlns:p="http://schemas.openxmlformats.org/presentationml/2006/main">
+  <p:cSld>
+    <p:spTree>
+      <p:nvGrpSpPr>
+        <p:cNvPr id="1" name="">
+          <a:extLst>
+            <a:ext uri="{FF2B5EF4-FFF2-40B4-BE49-F238E27FC236}">
+              <a16:creationId xmlns:a16="http://schemas.microsoft.com/office/drawing/2014/main" id="{C284667C-7748-0B6D-5904-4FDCE0C6F13A}"/>
+            </a:ext>
+          </a:extLst>
+        </p:cNvPr>
+        <p:cNvGrpSpPr/>
+        <p:nvPr/>
+      </p:nvGrpSpPr>
+      <p:grpSpPr>
+        <a:xfrm>
+          <a:off x="0" y="0"/>
+          <a:ext cx="0" cy="0"/>
+          <a:chOff x="0" y="0"/>
+          <a:chExt cx="0" cy="0"/>
+        </a:xfrm>
+      </p:grpSpPr>
+      <p:sp>
+        <p:nvSpPr>
+          <p:cNvPr id="7" name="Rectangle 6">
+            <a:extLst>
+              <a:ext uri="{FF2B5EF4-FFF2-40B4-BE49-F238E27FC236}">
+                <a16:creationId xmlns:a16="http://schemas.microsoft.com/office/drawing/2014/main" id="{2E41CEA9-1623-081B-323E-C349EF4523C6}"/>
+              </a:ext>
+            </a:extLst>
+          </p:cNvPr>
+          <p:cNvSpPr/>
+          <p:nvPr/>
+        </p:nvSpPr>
+        <p:spPr>
+          <a:xfrm>
+            <a:off x="9226193" y="3383207"/>
+            <a:ext cx="2529425" cy="3474793"/>
+          </a:xfrm>
+          <a:prstGeom prst="rect">
+            <a:avLst/>
+          </a:prstGeom>
+          <a:solidFill>
+            <a:srgbClr val="FDFAF6"/>
+          </a:solidFill>
+          <a:ln>
+            <a:noFill/>
+          </a:ln>
+        </p:spPr>
+        <p:style>
+          <a:lnRef idx="2">
+            <a:schemeClr val="accent1">
+              <a:shade val="15000"/>
+            </a:schemeClr>
+          </a:lnRef>
+          <a:fillRef idx="1">
+            <a:schemeClr val="accent1"/>
+          </a:fillRef>
+          <a:effectRef idx="0">
+            <a:schemeClr val="accent1"/>
+          </a:effectRef>
+          <a:fontRef idx="minor">
+            <a:schemeClr val="lt1"/>
+          </a:fontRef>
+        </p:style>
+        <p:txBody>
+          <a:bodyPr rtlCol="0" anchor="ctr"/>
+          <a:lstStyle/>
+          <a:p>
+            <a:pPr algn="ctr"/>
+            <a:endParaRPr lang="fr-FR" dirty="0"/>
+          </a:p>
+        </p:txBody>
+      </p:sp>
+      <p:sp>
+        <p:nvSpPr>
+          <p:cNvPr id="8" name="Titre 1">
+            <a:extLst>
+              <a:ext uri="{FF2B5EF4-FFF2-40B4-BE49-F238E27FC236}">
+                <a16:creationId xmlns:a16="http://schemas.microsoft.com/office/drawing/2014/main" id="{833D004C-4B34-1223-6A66-48B6E0A5B8A1}"/>
+              </a:ext>
+            </a:extLst>
+          </p:cNvPr>
+          <p:cNvSpPr>
+            <a:spLocks noGrp="1"/>
+          </p:cNvSpPr>
+          <p:nvPr>
+            <p:ph type="title"/>
+          </p:nvPr>
+        </p:nvSpPr>
+        <p:spPr>
+          <a:xfrm>
+            <a:off x="840187" y="689619"/>
+            <a:ext cx="10511627" cy="646331"/>
+          </a:xfrm>
+        </p:spPr>
+        <p:txBody>
+          <a:bodyPr rtlCol="0"/>
+          <a:lstStyle>
+            <a:defPPr>
+              <a:defRPr lang="fr-FR"/>
+            </a:defPPr>
+          </a:lstStyle>
+          <a:p>
+            <a:pPr algn="ctr" rtl="0"/>
+            <a:r>
+              <a:rPr lang="fr-FR" dirty="0"/>
+              <a:t>Expérience 2 : étalement</a:t>
+            </a:r>
+            <a:br>
+              <a:rPr lang="fr-FR" dirty="0"/>
+            </a:br>
+            <a:r>
+              <a:rPr lang="fr-FR" sz="2400" dirty="0"/>
+              <a:t>protocole</a:t>
+            </a:r>
+            <a:endParaRPr lang="fr-FR" dirty="0"/>
+          </a:p>
+        </p:txBody>
+      </p:sp>
+      <p:sp>
+        <p:nvSpPr>
+          <p:cNvPr id="13" name="Espace réservé du texte 2">
+            <a:extLst>
+              <a:ext uri="{FF2B5EF4-FFF2-40B4-BE49-F238E27FC236}">
+                <a16:creationId xmlns:a16="http://schemas.microsoft.com/office/drawing/2014/main" id="{D6B6C8DD-F4B6-BDD5-0535-9E17A028B4A9}"/>
+              </a:ext>
+            </a:extLst>
+          </p:cNvPr>
+          <p:cNvSpPr txBox="1">
+            <a:spLocks/>
+          </p:cNvSpPr>
+          <p:nvPr/>
+        </p:nvSpPr>
+        <p:spPr>
+          <a:xfrm>
+            <a:off x="1232899" y="1680069"/>
+            <a:ext cx="4623371" cy="3950169"/>
+          </a:xfrm>
+          <a:prstGeom prst="rect">
+            <a:avLst/>
+          </a:prstGeom>
+        </p:spPr>
+        <p:txBody>
+          <a:bodyPr vert="horz" lIns="91440" tIns="0" rIns="91440" bIns="0" rtlCol="0">
+            <a:normAutofit/>
+          </a:bodyPr>
+          <a:lstStyle>
+            <a:defPPr>
+              <a:defRPr lang="fr-FR"/>
+            </a:defPPr>
+            <a:lvl1pPr marL="0" indent="0" algn="l" defTabSz="914400" rtl="0" eaLnBrk="1" latinLnBrk="0" hangingPunct="1">
+              <a:lnSpc>
+                <a:spcPct val="100000"/>
+              </a:lnSpc>
+              <a:spcBef>
+                <a:spcPts val="0"/>
+              </a:spcBef>
+              <a:buFont typeface="Arial" panose="020B0604020202020204" pitchFamily="34" charset="0"/>
+              <a:buNone/>
+              <a:defRPr lang="fr-FR" sz="2400" kern="1200">
+                <a:solidFill>
+                  <a:schemeClr val="accent6"/>
+                </a:solidFill>
+                <a:latin typeface="+mn-lt"/>
+                <a:ea typeface="+mn-ea"/>
+                <a:cs typeface="+mn-cs"/>
+              </a:defRPr>
+            </a:lvl1pPr>
+            <a:lvl2pPr marL="347472" indent="-347472" algn="l" defTabSz="914400" rtl="0" eaLnBrk="1" latinLnBrk="0" hangingPunct="1">
+              <a:lnSpc>
+                <a:spcPct val="100000"/>
+              </a:lnSpc>
+              <a:spcBef>
+                <a:spcPts val="0"/>
+              </a:spcBef>
+              <a:buFont typeface="Arial" panose="020B0604020202020204" pitchFamily="34" charset="0"/>
+              <a:buChar char="•"/>
+              <a:defRPr lang="fr-FR" sz="2400" kern="1200">
+                <a:solidFill>
+                  <a:schemeClr val="accent6"/>
+                </a:solidFill>
+                <a:latin typeface="+mn-lt"/>
+                <a:ea typeface="+mn-ea"/>
+                <a:cs typeface="+mn-cs"/>
+              </a:defRPr>
+            </a:lvl2pPr>
+            <a:lvl3pPr marL="685800" indent="-347472" algn="l" defTabSz="914400" rtl="0" eaLnBrk="1" latinLnBrk="0" hangingPunct="1">
+              <a:lnSpc>
+                <a:spcPct val="100000"/>
+              </a:lnSpc>
+              <a:spcBef>
+                <a:spcPts val="0"/>
+              </a:spcBef>
+              <a:buFont typeface="Arial" panose="020B0604020202020204" pitchFamily="34" charset="0"/>
+              <a:buChar char="•"/>
+              <a:defRPr lang="fr-FR" sz="2400" kern="1200">
+                <a:solidFill>
+                  <a:schemeClr val="accent6"/>
+                </a:solidFill>
+                <a:latin typeface="+mn-lt"/>
+                <a:ea typeface="+mn-ea"/>
+                <a:cs typeface="+mn-cs"/>
+              </a:defRPr>
+            </a:lvl3pPr>
+            <a:lvl4pPr marL="1600200" indent="-347472" algn="l" defTabSz="914400" rtl="0" eaLnBrk="1" latinLnBrk="0" hangingPunct="1">
+              <a:lnSpc>
+                <a:spcPct val="100000"/>
+              </a:lnSpc>
+              <a:spcBef>
+                <a:spcPts val="360"/>
+              </a:spcBef>
+              <a:buFont typeface="Arial" panose="020B0604020202020204" pitchFamily="34" charset="0"/>
+              <a:buChar char="•"/>
+              <a:defRPr lang="fr-FR" sz="1800" kern="1200">
+                <a:solidFill>
+                  <a:schemeClr val="accent6"/>
+                </a:solidFill>
+                <a:latin typeface="+mn-lt"/>
+                <a:ea typeface="+mn-ea"/>
+                <a:cs typeface="+mn-cs"/>
+              </a:defRPr>
+            </a:lvl4pPr>
+            <a:lvl5pPr marL="2057400" indent="-347472" algn="l" defTabSz="914400" rtl="0" eaLnBrk="1" latinLnBrk="0" hangingPunct="1">
+              <a:lnSpc>
+                <a:spcPct val="100000"/>
+              </a:lnSpc>
+              <a:spcBef>
+                <a:spcPts val="360"/>
+              </a:spcBef>
+              <a:buFont typeface="Arial" panose="020B0604020202020204" pitchFamily="34" charset="0"/>
+              <a:buChar char="•"/>
+              <a:defRPr lang="fr-FR" sz="1800" kern="1200">
+                <a:solidFill>
+                  <a:schemeClr val="accent6"/>
+                </a:solidFill>
+                <a:latin typeface="+mn-lt"/>
+                <a:ea typeface="+mn-ea"/>
+                <a:cs typeface="+mn-cs"/>
+              </a:defRPr>
+            </a:lvl5pPr>
+            <a:lvl6pPr marL="2514600" indent="-228600" algn="l" defTabSz="914400" rtl="0" eaLnBrk="1" latinLnBrk="0" hangingPunct="1">
+              <a:lnSpc>
+                <a:spcPct val="90000"/>
+              </a:lnSpc>
+              <a:spcBef>
+                <a:spcPts val="500"/>
+              </a:spcBef>
+              <a:buFont typeface="Arial" panose="020B0604020202020204" pitchFamily="34" charset="0"/>
+              <a:buChar char="•"/>
+              <a:defRPr lang="fr-FR" sz="1800" kern="1200">
+                <a:solidFill>
+                  <a:schemeClr val="tx1"/>
+                </a:solidFill>
+                <a:latin typeface="+mn-lt"/>
+                <a:ea typeface="+mn-ea"/>
+                <a:cs typeface="+mn-cs"/>
+              </a:defRPr>
+            </a:lvl6pPr>
+            <a:lvl7pPr marL="2971800" indent="-228600" algn="l" defTabSz="914400" rtl="0" eaLnBrk="1" latinLnBrk="0" hangingPunct="1">
+              <a:lnSpc>
+                <a:spcPct val="90000"/>
+              </a:lnSpc>
+              <a:spcBef>
+                <a:spcPts val="500"/>
+              </a:spcBef>
+              <a:buFont typeface="Arial" panose="020B0604020202020204" pitchFamily="34" charset="0"/>
+              <a:buChar char="•"/>
+              <a:defRPr lang="fr-FR" sz="1800" kern="1200">
+                <a:solidFill>
+                  <a:schemeClr val="tx1"/>
+                </a:solidFill>
+                <a:latin typeface="+mn-lt"/>
+                <a:ea typeface="+mn-ea"/>
+                <a:cs typeface="+mn-cs"/>
+              </a:defRPr>
+            </a:lvl7pPr>
+            <a:lvl8pPr marL="3429000" indent="-228600" algn="l" defTabSz="914400" rtl="0" eaLnBrk="1" latinLnBrk="0" hangingPunct="1">
+              <a:lnSpc>
+                <a:spcPct val="90000"/>
+              </a:lnSpc>
+              <a:spcBef>
+                <a:spcPts val="500"/>
+              </a:spcBef>
+              <a:buFont typeface="Arial" panose="020B0604020202020204" pitchFamily="34" charset="0"/>
+              <a:buChar char="•"/>
+              <a:defRPr lang="fr-FR" sz="1800" kern="1200">
+                <a:solidFill>
+                  <a:schemeClr val="tx1"/>
+                </a:solidFill>
+                <a:latin typeface="+mn-lt"/>
+                <a:ea typeface="+mn-ea"/>
+                <a:cs typeface="+mn-cs"/>
+              </a:defRPr>
+            </a:lvl8pPr>
+            <a:lvl9pPr marL="3886200" indent="-228600" algn="l" defTabSz="914400" rtl="0" eaLnBrk="1" latinLnBrk="0" hangingPunct="1">
+              <a:lnSpc>
+                <a:spcPct val="90000"/>
+              </a:lnSpc>
+              <a:spcBef>
+                <a:spcPts val="500"/>
+              </a:spcBef>
+              <a:buFont typeface="Arial" panose="020B0604020202020204" pitchFamily="34" charset="0"/>
+              <a:buChar char="•"/>
+              <a:defRPr lang="fr-FR" sz="1800" kern="1200">
+                <a:solidFill>
+                  <a:schemeClr val="tx1"/>
+                </a:solidFill>
+                <a:latin typeface="+mn-lt"/>
+                <a:ea typeface="+mn-ea"/>
+                <a:cs typeface="+mn-cs"/>
+              </a:defRPr>
+            </a:lvl9pPr>
+          </a:lstStyle>
+          <a:p>
+            <a:r>
+              <a:rPr lang="fr-FR" sz="2000" dirty="0"/>
+              <a:t>1. Dépôt d’une goutte sur une lame de verre, et dépôt de la lame supérieure. </a:t>
+            </a:r>
+          </a:p>
+          <a:p>
+            <a:endParaRPr lang="fr-FR" sz="2000" dirty="0"/>
+          </a:p>
+          <a:p>
+            <a:r>
+              <a:rPr lang="fr-FR" sz="2000" dirty="0"/>
+              <a:t>2. Dépôt de la masse : un bécher avec de l’eau (M = 50g)</a:t>
+            </a:r>
+          </a:p>
+          <a:p>
+            <a:pPr marL="690372" lvl="1" indent="-342900">
+              <a:buFont typeface="Wingdings" panose="05000000000000000000" pitchFamily="2" charset="2"/>
+              <a:buChar char="Ø"/>
+            </a:pPr>
+            <a:r>
+              <a:rPr lang="fr-FR" sz="2000" dirty="0"/>
+              <a:t>Masse transparente !</a:t>
+            </a:r>
+          </a:p>
+          <a:p>
+            <a:endParaRPr lang="fr-FR" sz="2000" dirty="0"/>
+          </a:p>
+          <a:p>
+            <a:endParaRPr lang="fr-FR" sz="2000" dirty="0"/>
+          </a:p>
+        </p:txBody>
+      </p:sp>
+      <p:sp>
+        <p:nvSpPr>
+          <p:cNvPr id="4" name="Espace réservé du texte 2">
+            <a:extLst>
+              <a:ext uri="{FF2B5EF4-FFF2-40B4-BE49-F238E27FC236}">
+                <a16:creationId xmlns:a16="http://schemas.microsoft.com/office/drawing/2014/main" id="{F66D75F1-858B-6D59-3A05-8B8886E4912F}"/>
+              </a:ext>
+            </a:extLst>
+          </p:cNvPr>
+          <p:cNvSpPr txBox="1">
+            <a:spLocks/>
+          </p:cNvSpPr>
+          <p:nvPr/>
+        </p:nvSpPr>
+        <p:spPr>
+          <a:xfrm>
+            <a:off x="6214153" y="1680068"/>
+            <a:ext cx="4623371" cy="3950169"/>
+          </a:xfrm>
+          <a:prstGeom prst="rect">
+            <a:avLst/>
+          </a:prstGeom>
+        </p:spPr>
+        <p:txBody>
+          <a:bodyPr vert="horz" lIns="91440" tIns="0" rIns="91440" bIns="0" rtlCol="0">
+            <a:normAutofit/>
+          </a:bodyPr>
+          <a:lstStyle>
+            <a:defPPr>
+              <a:defRPr lang="fr-FR"/>
+            </a:defPPr>
+            <a:lvl1pPr marL="0" indent="0" algn="l" defTabSz="914400" rtl="0" eaLnBrk="1" latinLnBrk="0" hangingPunct="1">
+              <a:lnSpc>
+                <a:spcPct val="100000"/>
+              </a:lnSpc>
+              <a:spcBef>
+                <a:spcPts val="0"/>
+              </a:spcBef>
+              <a:buFont typeface="Arial" panose="020B0604020202020204" pitchFamily="34" charset="0"/>
+              <a:buNone/>
+              <a:defRPr lang="fr-FR" sz="2400" kern="1200">
+                <a:solidFill>
+                  <a:schemeClr val="accent6"/>
+                </a:solidFill>
+                <a:latin typeface="+mn-lt"/>
+                <a:ea typeface="+mn-ea"/>
+                <a:cs typeface="+mn-cs"/>
+              </a:defRPr>
+            </a:lvl1pPr>
+            <a:lvl2pPr marL="347472" indent="-347472" algn="l" defTabSz="914400" rtl="0" eaLnBrk="1" latinLnBrk="0" hangingPunct="1">
+              <a:lnSpc>
+                <a:spcPct val="100000"/>
+              </a:lnSpc>
+              <a:spcBef>
+                <a:spcPts val="0"/>
+              </a:spcBef>
+              <a:buFont typeface="Arial" panose="020B0604020202020204" pitchFamily="34" charset="0"/>
+              <a:buChar char="•"/>
+              <a:defRPr lang="fr-FR" sz="2400" kern="1200">
+                <a:solidFill>
+                  <a:schemeClr val="accent6"/>
+                </a:solidFill>
+                <a:latin typeface="+mn-lt"/>
+                <a:ea typeface="+mn-ea"/>
+                <a:cs typeface="+mn-cs"/>
+              </a:defRPr>
+            </a:lvl2pPr>
+            <a:lvl3pPr marL="685800" indent="-347472" algn="l" defTabSz="914400" rtl="0" eaLnBrk="1" latinLnBrk="0" hangingPunct="1">
+              <a:lnSpc>
+                <a:spcPct val="100000"/>
+              </a:lnSpc>
+              <a:spcBef>
+                <a:spcPts val="0"/>
+              </a:spcBef>
+              <a:buFont typeface="Arial" panose="020B0604020202020204" pitchFamily="34" charset="0"/>
+              <a:buChar char="•"/>
+              <a:defRPr lang="fr-FR" sz="2400" kern="1200">
+                <a:solidFill>
+                  <a:schemeClr val="accent6"/>
+                </a:solidFill>
+                <a:latin typeface="+mn-lt"/>
+                <a:ea typeface="+mn-ea"/>
+                <a:cs typeface="+mn-cs"/>
+              </a:defRPr>
+            </a:lvl3pPr>
+            <a:lvl4pPr marL="1600200" indent="-347472" algn="l" defTabSz="914400" rtl="0" eaLnBrk="1" latinLnBrk="0" hangingPunct="1">
+              <a:lnSpc>
+                <a:spcPct val="100000"/>
+              </a:lnSpc>
+              <a:spcBef>
+                <a:spcPts val="360"/>
+              </a:spcBef>
+              <a:buFont typeface="Arial" panose="020B0604020202020204" pitchFamily="34" charset="0"/>
+              <a:buChar char="•"/>
+              <a:defRPr lang="fr-FR" sz="1800" kern="1200">
+                <a:solidFill>
+                  <a:schemeClr val="accent6"/>
+                </a:solidFill>
+                <a:latin typeface="+mn-lt"/>
+                <a:ea typeface="+mn-ea"/>
+                <a:cs typeface="+mn-cs"/>
+              </a:defRPr>
+            </a:lvl4pPr>
+            <a:lvl5pPr marL="2057400" indent="-347472" algn="l" defTabSz="914400" rtl="0" eaLnBrk="1" latinLnBrk="0" hangingPunct="1">
+              <a:lnSpc>
+                <a:spcPct val="100000"/>
+              </a:lnSpc>
+              <a:spcBef>
+                <a:spcPts val="360"/>
+              </a:spcBef>
+              <a:buFont typeface="Arial" panose="020B0604020202020204" pitchFamily="34" charset="0"/>
+              <a:buChar char="•"/>
+              <a:defRPr lang="fr-FR" sz="1800" kern="1200">
+                <a:solidFill>
+                  <a:schemeClr val="accent6"/>
+                </a:solidFill>
+                <a:latin typeface="+mn-lt"/>
+                <a:ea typeface="+mn-ea"/>
+                <a:cs typeface="+mn-cs"/>
+              </a:defRPr>
+            </a:lvl5pPr>
+            <a:lvl6pPr marL="2514600" indent="-228600" algn="l" defTabSz="914400" rtl="0" eaLnBrk="1" latinLnBrk="0" hangingPunct="1">
+              <a:lnSpc>
+                <a:spcPct val="90000"/>
+              </a:lnSpc>
+              <a:spcBef>
+                <a:spcPts val="500"/>
+              </a:spcBef>
+              <a:buFont typeface="Arial" panose="020B0604020202020204" pitchFamily="34" charset="0"/>
+              <a:buChar char="•"/>
+              <a:defRPr lang="fr-FR" sz="1800" kern="1200">
+                <a:solidFill>
+                  <a:schemeClr val="tx1"/>
+                </a:solidFill>
+                <a:latin typeface="+mn-lt"/>
+                <a:ea typeface="+mn-ea"/>
+                <a:cs typeface="+mn-cs"/>
+              </a:defRPr>
+            </a:lvl6pPr>
+            <a:lvl7pPr marL="2971800" indent="-228600" algn="l" defTabSz="914400" rtl="0" eaLnBrk="1" latinLnBrk="0" hangingPunct="1">
+              <a:lnSpc>
+                <a:spcPct val="90000"/>
+              </a:lnSpc>
+              <a:spcBef>
+                <a:spcPts val="500"/>
+              </a:spcBef>
+              <a:buFont typeface="Arial" panose="020B0604020202020204" pitchFamily="34" charset="0"/>
+              <a:buChar char="•"/>
+              <a:defRPr lang="fr-FR" sz="1800" kern="1200">
+                <a:solidFill>
+                  <a:schemeClr val="tx1"/>
+                </a:solidFill>
+                <a:latin typeface="+mn-lt"/>
+                <a:ea typeface="+mn-ea"/>
+                <a:cs typeface="+mn-cs"/>
+              </a:defRPr>
+            </a:lvl7pPr>
+            <a:lvl8pPr marL="3429000" indent="-228600" algn="l" defTabSz="914400" rtl="0" eaLnBrk="1" latinLnBrk="0" hangingPunct="1">
+              <a:lnSpc>
+                <a:spcPct val="90000"/>
+              </a:lnSpc>
+              <a:spcBef>
+                <a:spcPts val="500"/>
+              </a:spcBef>
+              <a:buFont typeface="Arial" panose="020B0604020202020204" pitchFamily="34" charset="0"/>
+              <a:buChar char="•"/>
+              <a:defRPr lang="fr-FR" sz="1800" kern="1200">
+                <a:solidFill>
+                  <a:schemeClr val="tx1"/>
+                </a:solidFill>
+                <a:latin typeface="+mn-lt"/>
+                <a:ea typeface="+mn-ea"/>
+                <a:cs typeface="+mn-cs"/>
+              </a:defRPr>
+            </a:lvl8pPr>
+            <a:lvl9pPr marL="3886200" indent="-228600" algn="l" defTabSz="914400" rtl="0" eaLnBrk="1" latinLnBrk="0" hangingPunct="1">
+              <a:lnSpc>
+                <a:spcPct val="90000"/>
+              </a:lnSpc>
+              <a:spcBef>
+                <a:spcPts val="500"/>
+              </a:spcBef>
+              <a:buFont typeface="Arial" panose="020B0604020202020204" pitchFamily="34" charset="0"/>
+              <a:buChar char="•"/>
+              <a:defRPr lang="fr-FR" sz="1800" kern="1200">
+                <a:solidFill>
+                  <a:schemeClr val="tx1"/>
+                </a:solidFill>
+                <a:latin typeface="+mn-lt"/>
+                <a:ea typeface="+mn-ea"/>
+                <a:cs typeface="+mn-cs"/>
+              </a:defRPr>
+            </a:lvl9pPr>
+          </a:lstStyle>
+          <a:p>
+            <a:r>
+              <a:rPr lang="fr-FR" sz="2000" dirty="0"/>
+              <a:t>3. Prise en photo régulière et mesure du diamètre.</a:t>
+            </a:r>
+          </a:p>
+          <a:p>
+            <a:endParaRPr lang="fr-FR" sz="2000" dirty="0"/>
+          </a:p>
+        </p:txBody>
+      </p:sp>
+      <p:grpSp>
+        <p:nvGrpSpPr>
+          <p:cNvPr id="16" name="Groupe 15">
+            <a:extLst>
+              <a:ext uri="{FF2B5EF4-FFF2-40B4-BE49-F238E27FC236}">
+                <a16:creationId xmlns:a16="http://schemas.microsoft.com/office/drawing/2014/main" id="{1806A420-93CB-FFFF-4CD5-8C3BC4801527}"/>
+              </a:ext>
+            </a:extLst>
+          </p:cNvPr>
+          <p:cNvGrpSpPr/>
+          <p:nvPr/>
+        </p:nvGrpSpPr>
+        <p:grpSpPr>
+          <a:xfrm>
+            <a:off x="9203519" y="2293949"/>
+            <a:ext cx="1395368" cy="3950169"/>
+            <a:chOff x="9361675" y="1623805"/>
+            <a:chExt cx="1724532" cy="4825784"/>
+          </a:xfrm>
+        </p:grpSpPr>
+        <p:pic>
+          <p:nvPicPr>
+            <p:cNvPr id="6" name="Image 5">
+              <a:extLst>
+                <a:ext uri="{FF2B5EF4-FFF2-40B4-BE49-F238E27FC236}">
+                  <a16:creationId xmlns:a16="http://schemas.microsoft.com/office/drawing/2014/main" id="{168DD817-9652-F34B-2E91-169086856FDF}"/>
+                </a:ext>
+              </a:extLst>
+            </p:cNvPr>
+            <p:cNvPicPr>
+              <a:picLocks noChangeAspect="1"/>
+            </p:cNvPicPr>
+            <p:nvPr/>
+          </p:nvPicPr>
+          <p:blipFill>
+            <a:blip r:embed="rId2"/>
+            <a:stretch>
+              <a:fillRect/>
+            </a:stretch>
+          </p:blipFill>
+          <p:spPr>
+            <a:xfrm rot="5400000">
+              <a:off x="9642834" y="1343339"/>
+              <a:ext cx="1162906" cy="1723838"/>
+            </a:xfrm>
+            <a:prstGeom prst="rect">
+              <a:avLst/>
+            </a:prstGeom>
+          </p:spPr>
+        </p:pic>
+        <p:pic>
+          <p:nvPicPr>
+            <p:cNvPr id="10" name="Image 9">
+              <a:extLst>
+                <a:ext uri="{FF2B5EF4-FFF2-40B4-BE49-F238E27FC236}">
+                  <a16:creationId xmlns:a16="http://schemas.microsoft.com/office/drawing/2014/main" id="{949081A2-7C15-5BB3-B7DD-83E2C2892C1B}"/>
+                </a:ext>
+              </a:extLst>
+            </p:cNvPr>
+            <p:cNvPicPr>
+              <a:picLocks noChangeAspect="1"/>
+            </p:cNvPicPr>
+            <p:nvPr/>
+          </p:nvPicPr>
+          <p:blipFill>
+            <a:blip r:embed="rId3"/>
+            <a:stretch>
+              <a:fillRect/>
+            </a:stretch>
+          </p:blipFill>
+          <p:spPr>
+            <a:xfrm rot="5400000">
+              <a:off x="9636182" y="2565143"/>
+              <a:ext cx="1174824" cy="1723838"/>
+            </a:xfrm>
+            <a:prstGeom prst="rect">
+              <a:avLst/>
+            </a:prstGeom>
+          </p:spPr>
+        </p:pic>
+        <p:pic>
+          <p:nvPicPr>
+            <p:cNvPr id="12" name="Image 11">
+              <a:extLst>
+                <a:ext uri="{FF2B5EF4-FFF2-40B4-BE49-F238E27FC236}">
+                  <a16:creationId xmlns:a16="http://schemas.microsoft.com/office/drawing/2014/main" id="{7D41E662-D824-3464-7DD4-0854782F7FA9}"/>
+                </a:ext>
+              </a:extLst>
+            </p:cNvPr>
+            <p:cNvPicPr>
+              <a:picLocks noChangeAspect="1"/>
+            </p:cNvPicPr>
+            <p:nvPr/>
+          </p:nvPicPr>
+          <p:blipFill>
+            <a:blip r:embed="rId4"/>
+            <a:srcRect r="3823"/>
+            <a:stretch>
+              <a:fillRect/>
+            </a:stretch>
+          </p:blipFill>
+          <p:spPr>
+            <a:xfrm rot="5400000">
+              <a:off x="9644876" y="3784906"/>
+              <a:ext cx="1158519" cy="1723534"/>
+            </a:xfrm>
+            <a:prstGeom prst="rect">
+              <a:avLst/>
+            </a:prstGeom>
+          </p:spPr>
+        </p:pic>
+        <p:pic>
+          <p:nvPicPr>
+            <p:cNvPr id="15" name="Image 14">
+              <a:extLst>
+                <a:ext uri="{FF2B5EF4-FFF2-40B4-BE49-F238E27FC236}">
+                  <a16:creationId xmlns:a16="http://schemas.microsoft.com/office/drawing/2014/main" id="{11F44C58-D515-6CC8-F501-D741969B726B}"/>
+                </a:ext>
+              </a:extLst>
+            </p:cNvPr>
+            <p:cNvPicPr>
+              <a:picLocks noChangeAspect="1"/>
+            </p:cNvPicPr>
+            <p:nvPr/>
+          </p:nvPicPr>
+          <p:blipFill>
+            <a:blip r:embed="rId5"/>
+            <a:stretch>
+              <a:fillRect/>
+            </a:stretch>
+          </p:blipFill>
+          <p:spPr>
+            <a:xfrm rot="5400000">
+              <a:off x="9638929" y="5002311"/>
+              <a:ext cx="1170717" cy="1723839"/>
+            </a:xfrm>
+            <a:prstGeom prst="rect">
+              <a:avLst/>
+            </a:prstGeom>
+          </p:spPr>
+        </p:pic>
+      </p:grpSp>
+    </p:spTree>
+    <p:extLst>
+      <p:ext uri="{BB962C8B-B14F-4D97-AF65-F5344CB8AC3E}">
+        <p14:creationId xmlns:p14="http://schemas.microsoft.com/office/powerpoint/2010/main" val="4116533368"/>
       </p:ext>
     </p:extLst>
   </p:cSld>
@@ -26528,6 +28264,12 @@
 </file>
 
 <file path=customXml/item1.xml><?xml version="1.0" encoding="utf-8"?>
+<p:properties xmlns:p="http://schemas.microsoft.com/office/2006/metadata/properties" xmlns:xsi="http://www.w3.org/2001/XMLSchema-instance" xmlns:pc="http://schemas.microsoft.com/office/infopath/2007/PartnerControls">
+  <documentManagement/>
+</p:properties>
+</file>
+
+<file path=customXml/item2.xml><?xml version="1.0" encoding="utf-8"?>
 <ct:contentTypeSchema xmlns:ct="http://schemas.microsoft.com/office/2006/metadata/contentType" xmlns:ma="http://schemas.microsoft.com/office/2006/metadata/properties/metaAttributes" ct:_="" ma:_="" ma:contentTypeName="Document" ma:contentTypeID="0x0101007A262EAC855B9A4AA1EA640DE55D9291" ma:contentTypeVersion="1" ma:contentTypeDescription="Crée un document." ma:contentTypeScope="" ma:versionID="b77c85bbfd0b92efe37df041e558d067">
   <xsd:schema xmlns:xsd="http://www.w3.org/2001/XMLSchema" xmlns:xs="http://www.w3.org/2001/XMLSchema" xmlns:p="http://schemas.microsoft.com/office/2006/metadata/properties" xmlns:ns3="5fe2be53-eead-4083-8773-55ad5d51649a" targetNamespace="http://schemas.microsoft.com/office/2006/metadata/properties" ma:root="true" ma:fieldsID="d116f912760d7d2eb93dc091ad074d5c" ns3:_="">
     <xsd:import namespace="5fe2be53-eead-4083-8773-55ad5d51649a"/>
@@ -26653,12 +28395,6 @@
 </ct:contentTypeSchema>
 </file>
 
-<file path=customXml/item2.xml><?xml version="1.0" encoding="utf-8"?>
-<p:properties xmlns:p="http://schemas.microsoft.com/office/2006/metadata/properties" xmlns:xsi="http://www.w3.org/2001/XMLSchema-instance" xmlns:pc="http://schemas.microsoft.com/office/infopath/2007/PartnerControls">
-  <documentManagement/>
-</p:properties>
-</file>
-
 <file path=customXml/item3.xml><?xml version="1.0" encoding="utf-8"?>
 <?mso-contentType ?>
 <FormTemplates xmlns="http://schemas.microsoft.com/sharepoint/v3/contenttype/forms">
@@ -26669,6 +28405,22 @@
 </file>
 
 <file path=customXml/itemProps1.xml><?xml version="1.0" encoding="utf-8"?>
+<ds:datastoreItem xmlns:ds="http://schemas.openxmlformats.org/officeDocument/2006/customXml" ds:itemID="{BA719FA4-954C-4FA8-82CB-206659C3B826}">
+  <ds:schemaRefs>
+    <ds:schemaRef ds:uri="http://schemas.microsoft.com/office/infopath/2007/PartnerControls"/>
+    <ds:schemaRef ds:uri="http://purl.org/dc/elements/1.1/"/>
+    <ds:schemaRef ds:uri="http://schemas.microsoft.com/office/2006/metadata/properties"/>
+    <ds:schemaRef ds:uri="5fe2be53-eead-4083-8773-55ad5d51649a"/>
+    <ds:schemaRef ds:uri="http://purl.org/dc/terms/"/>
+    <ds:schemaRef ds:uri="http://schemas.openxmlformats.org/package/2006/metadata/core-properties"/>
+    <ds:schemaRef ds:uri="http://schemas.microsoft.com/office/2006/documentManagement/types"/>
+    <ds:schemaRef ds:uri="http://www.w3.org/XML/1998/namespace"/>
+    <ds:schemaRef ds:uri="http://purl.org/dc/dcmitype/"/>
+  </ds:schemaRefs>
+</ds:datastoreItem>
+</file>
+
+<file path=customXml/itemProps2.xml><?xml version="1.0" encoding="utf-8"?>
 <ds:datastoreItem xmlns:ds="http://schemas.openxmlformats.org/officeDocument/2006/customXml" ds:itemID="{995F1B84-5324-45B5-9B4C-63D8886BFBE7}">
   <ds:schemaRefs>
     <ds:schemaRef ds:uri="http://schemas.microsoft.com/office/2006/metadata/contentType"/>
@@ -26686,22 +28438,6 @@
 </ds:datastoreItem>
 </file>
 
-<file path=customXml/itemProps2.xml><?xml version="1.0" encoding="utf-8"?>
-<ds:datastoreItem xmlns:ds="http://schemas.openxmlformats.org/officeDocument/2006/customXml" ds:itemID="{BA719FA4-954C-4FA8-82CB-206659C3B826}">
-  <ds:schemaRefs>
-    <ds:schemaRef ds:uri="http://schemas.microsoft.com/office/infopath/2007/PartnerControls"/>
-    <ds:schemaRef ds:uri="http://purl.org/dc/elements/1.1/"/>
-    <ds:schemaRef ds:uri="http://schemas.microsoft.com/office/2006/metadata/properties"/>
-    <ds:schemaRef ds:uri="5fe2be53-eead-4083-8773-55ad5d51649a"/>
-    <ds:schemaRef ds:uri="http://purl.org/dc/terms/"/>
-    <ds:schemaRef ds:uri="http://schemas.openxmlformats.org/package/2006/metadata/core-properties"/>
-    <ds:schemaRef ds:uri="http://schemas.microsoft.com/office/2006/documentManagement/types"/>
-    <ds:schemaRef ds:uri="http://www.w3.org/XML/1998/namespace"/>
-    <ds:schemaRef ds:uri="http://purl.org/dc/dcmitype/"/>
-  </ds:schemaRefs>
-</ds:datastoreItem>
-</file>
-
 <file path=customXml/itemProps3.xml><?xml version="1.0" encoding="utf-8"?>
 <ds:datastoreItem xmlns:ds="http://schemas.openxmlformats.org/officeDocument/2006/customXml" ds:itemID="{16DBB56F-4362-4386-A1A1-3DF898896616}">
   <ds:schemaRefs>
